--- a/docs/pptx/whole/ritu-ratio-by-sex.pptx
+++ b/docs/pptx/whole/ritu-ratio-by-sex.pptx
@@ -3131,3084 +3131,3084 @@
           </p:nvSpPr>
           <p:spPr>
             <a:xfrm>
-              <a:off x="1429252" y="3106034"/>
-              <a:ext cx="6839649" cy="2441591"/>
+              <a:off x="1429252" y="3085603"/>
+              <a:ext cx="6839649" cy="2462022"/>
             </a:xfrm>
             <a:custGeom>
               <a:avLst/>
               <a:pathLst>
-                <a:path w="6839649" h="2441591">
+                <a:path w="6839649" h="2462022">
                   <a:moveTo>
-                    <a:pt x="0" y="2267597"/>
+                    <a:pt x="0" y="2286839"/>
                   </a:moveTo>
                   <a:lnTo>
-                    <a:pt x="13384" y="2264072"/>
-                  </a:lnTo>
-                  <a:lnTo>
-                    <a:pt x="26769" y="2260559"/>
-                  </a:lnTo>
-                  <a:lnTo>
-                    <a:pt x="40154" y="2257065"/>
-                  </a:lnTo>
-                  <a:lnTo>
-                    <a:pt x="53539" y="2253582"/>
-                  </a:lnTo>
-                  <a:lnTo>
-                    <a:pt x="66924" y="2250107"/>
-                  </a:lnTo>
-                  <a:lnTo>
-                    <a:pt x="80308" y="2246641"/>
-                  </a:lnTo>
-                  <a:lnTo>
-                    <a:pt x="93693" y="2243176"/>
-                  </a:lnTo>
-                  <a:lnTo>
-                    <a:pt x="107078" y="2239709"/>
-                  </a:lnTo>
-                  <a:lnTo>
-                    <a:pt x="120463" y="2236238"/>
-                  </a:lnTo>
-                  <a:lnTo>
-                    <a:pt x="133848" y="2232751"/>
-                  </a:lnTo>
-                  <a:lnTo>
-                    <a:pt x="147233" y="2229250"/>
-                  </a:lnTo>
-                  <a:lnTo>
-                    <a:pt x="160617" y="2225729"/>
-                  </a:lnTo>
-                  <a:lnTo>
-                    <a:pt x="174002" y="2222167"/>
-                  </a:lnTo>
-                  <a:lnTo>
-                    <a:pt x="187387" y="2218574"/>
-                  </a:lnTo>
-                  <a:lnTo>
-                    <a:pt x="200772" y="2214948"/>
-                  </a:lnTo>
-                  <a:lnTo>
-                    <a:pt x="214157" y="2211247"/>
-                  </a:lnTo>
-                  <a:lnTo>
-                    <a:pt x="227542" y="2207496"/>
-                  </a:lnTo>
-                  <a:lnTo>
-                    <a:pt x="240926" y="2203694"/>
-                  </a:lnTo>
-                  <a:lnTo>
-                    <a:pt x="254311" y="2199787"/>
-                  </a:lnTo>
-                  <a:lnTo>
-                    <a:pt x="267696" y="2195803"/>
-                  </a:lnTo>
-                  <a:lnTo>
-                    <a:pt x="281081" y="2191747"/>
-                  </a:lnTo>
-                  <a:lnTo>
-                    <a:pt x="294466" y="2187562"/>
-                  </a:lnTo>
-                  <a:lnTo>
-                    <a:pt x="307851" y="2183267"/>
-                  </a:lnTo>
-                  <a:lnTo>
-                    <a:pt x="321235" y="2178878"/>
-                  </a:lnTo>
-                  <a:lnTo>
-                    <a:pt x="334620" y="2174342"/>
-                  </a:lnTo>
-                  <a:lnTo>
-                    <a:pt x="348005" y="2169656"/>
-                  </a:lnTo>
-                  <a:lnTo>
-                    <a:pt x="361390" y="2164855"/>
-                  </a:lnTo>
-                  <a:lnTo>
-                    <a:pt x="374775" y="2159898"/>
-                  </a:lnTo>
-                  <a:lnTo>
-                    <a:pt x="388160" y="2154745"/>
-                  </a:lnTo>
-                  <a:lnTo>
-                    <a:pt x="401544" y="2149460"/>
-                  </a:lnTo>
-                  <a:lnTo>
-                    <a:pt x="414929" y="2144014"/>
-                  </a:lnTo>
-                  <a:lnTo>
-                    <a:pt x="428314" y="2138328"/>
-                  </a:lnTo>
-                  <a:lnTo>
-                    <a:pt x="441699" y="2132493"/>
-                  </a:lnTo>
-                  <a:lnTo>
-                    <a:pt x="455084" y="2126501"/>
-                  </a:lnTo>
-                  <a:lnTo>
-                    <a:pt x="468469" y="2120226"/>
-                  </a:lnTo>
-                  <a:lnTo>
-                    <a:pt x="481853" y="2113789"/>
-                  </a:lnTo>
-                  <a:lnTo>
-                    <a:pt x="495238" y="2107190"/>
-                  </a:lnTo>
-                  <a:lnTo>
-                    <a:pt x="508623" y="2100299"/>
-                  </a:lnTo>
-                  <a:lnTo>
-                    <a:pt x="522008" y="2093222"/>
-                  </a:lnTo>
-                  <a:lnTo>
-                    <a:pt x="535393" y="2085975"/>
-                  </a:lnTo>
-                  <a:lnTo>
-                    <a:pt x="548778" y="2078450"/>
-                  </a:lnTo>
-                  <a:lnTo>
-                    <a:pt x="562162" y="2070711"/>
-                  </a:lnTo>
-                  <a:lnTo>
-                    <a:pt x="575547" y="2062798"/>
-                  </a:lnTo>
-                  <a:lnTo>
-                    <a:pt x="588932" y="2054628"/>
-                  </a:lnTo>
-                  <a:lnTo>
-                    <a:pt x="602317" y="2046220"/>
-                  </a:lnTo>
-                  <a:lnTo>
-                    <a:pt x="615702" y="2037639"/>
-                  </a:lnTo>
-                  <a:lnTo>
-                    <a:pt x="629087" y="2028829"/>
-                  </a:lnTo>
-                  <a:lnTo>
-                    <a:pt x="642471" y="2019761"/>
-                  </a:lnTo>
-                  <a:lnTo>
-                    <a:pt x="655856" y="2010526"/>
-                  </a:lnTo>
-                  <a:lnTo>
-                    <a:pt x="669241" y="2001092"/>
-                  </a:lnTo>
-                  <a:lnTo>
-                    <a:pt x="682626" y="1991388"/>
-                  </a:lnTo>
-                  <a:lnTo>
-                    <a:pt x="696011" y="1981524"/>
-                  </a:lnTo>
-                  <a:lnTo>
-                    <a:pt x="709396" y="1971494"/>
-                  </a:lnTo>
-                  <a:lnTo>
-                    <a:pt x="722780" y="1961188"/>
-                  </a:lnTo>
-                  <a:lnTo>
-                    <a:pt x="736165" y="1950733"/>
-                  </a:lnTo>
-                  <a:lnTo>
-                    <a:pt x="749550" y="1940130"/>
-                  </a:lnTo>
-                  <a:lnTo>
-                    <a:pt x="762935" y="1929275"/>
-                  </a:lnTo>
-                  <a:lnTo>
-                    <a:pt x="776320" y="1918272"/>
-                  </a:lnTo>
-                  <a:lnTo>
-                    <a:pt x="789705" y="1907133"/>
-                  </a:lnTo>
-                  <a:lnTo>
-                    <a:pt x="803089" y="1895781"/>
-                  </a:lnTo>
-                  <a:lnTo>
-                    <a:pt x="816474" y="1884276"/>
-                  </a:lnTo>
-                  <a:lnTo>
-                    <a:pt x="829859" y="1872647"/>
-                  </a:lnTo>
-                  <a:lnTo>
-                    <a:pt x="843244" y="1860841"/>
-                  </a:lnTo>
-                  <a:lnTo>
-                    <a:pt x="856629" y="1848879"/>
-                  </a:lnTo>
-                  <a:lnTo>
-                    <a:pt x="870014" y="1836805"/>
-                  </a:lnTo>
-                  <a:lnTo>
-                    <a:pt x="883398" y="1824585"/>
-                  </a:lnTo>
-                  <a:lnTo>
-                    <a:pt x="896783" y="1812207"/>
-                  </a:lnTo>
-                  <a:lnTo>
-                    <a:pt x="910168" y="1799728"/>
-                  </a:lnTo>
-                  <a:lnTo>
-                    <a:pt x="923553" y="1787129"/>
-                  </a:lnTo>
-                  <a:lnTo>
-                    <a:pt x="936938" y="1774370"/>
-                  </a:lnTo>
-                  <a:lnTo>
-                    <a:pt x="950323" y="1761517"/>
-                  </a:lnTo>
-                  <a:lnTo>
-                    <a:pt x="963707" y="1748566"/>
-                  </a:lnTo>
-                  <a:lnTo>
-                    <a:pt x="977092" y="1735451"/>
-                  </a:lnTo>
-                  <a:lnTo>
-                    <a:pt x="990477" y="1722247"/>
-                  </a:lnTo>
-                  <a:lnTo>
-                    <a:pt x="1003862" y="1708955"/>
-                  </a:lnTo>
-                  <a:lnTo>
-                    <a:pt x="1017247" y="1695506"/>
-                  </a:lnTo>
-                  <a:lnTo>
-                    <a:pt x="1030632" y="1681962"/>
-                  </a:lnTo>
-                  <a:lnTo>
-                    <a:pt x="1044016" y="1668331"/>
-                  </a:lnTo>
-                  <a:lnTo>
-                    <a:pt x="1057401" y="1654557"/>
-                  </a:lnTo>
-                  <a:lnTo>
-                    <a:pt x="1070786" y="1640675"/>
-                  </a:lnTo>
-                  <a:lnTo>
-                    <a:pt x="1084171" y="1626704"/>
-                  </a:lnTo>
-                  <a:lnTo>
-                    <a:pt x="1097556" y="1612599"/>
-                  </a:lnTo>
-                  <a:lnTo>
-                    <a:pt x="1110941" y="1598369"/>
-                  </a:lnTo>
-                  <a:lnTo>
-                    <a:pt x="1124325" y="1584046"/>
-                  </a:lnTo>
-                  <a:lnTo>
-                    <a:pt x="1137710" y="1569596"/>
-                  </a:lnTo>
-                  <a:lnTo>
-                    <a:pt x="1151095" y="1555001"/>
-                  </a:lnTo>
-                  <a:lnTo>
-                    <a:pt x="1164480" y="1540307"/>
-                  </a:lnTo>
-                  <a:lnTo>
-                    <a:pt x="1177865" y="1525493"/>
-                  </a:lnTo>
-                  <a:lnTo>
-                    <a:pt x="1191250" y="1510509"/>
-                  </a:lnTo>
-                  <a:lnTo>
-                    <a:pt x="1204634" y="1495420"/>
-                  </a:lnTo>
-                  <a:lnTo>
-                    <a:pt x="1218019" y="1480218"/>
-                  </a:lnTo>
-                  <a:lnTo>
-                    <a:pt x="1231404" y="1464819"/>
-                  </a:lnTo>
-                  <a:lnTo>
-                    <a:pt x="1244789" y="1449308"/>
-                  </a:lnTo>
-                  <a:lnTo>
-                    <a:pt x="1258174" y="1433684"/>
-                  </a:lnTo>
-                  <a:lnTo>
-                    <a:pt x="1271559" y="1417852"/>
-                  </a:lnTo>
-                  <a:lnTo>
-                    <a:pt x="1284943" y="1401893"/>
-                  </a:lnTo>
-                  <a:lnTo>
-                    <a:pt x="1298328" y="1385814"/>
-                  </a:lnTo>
-                  <a:lnTo>
-                    <a:pt x="1311713" y="1369535"/>
-                  </a:lnTo>
-                  <a:lnTo>
-                    <a:pt x="1325098" y="1353106"/>
-                  </a:lnTo>
-                  <a:lnTo>
-                    <a:pt x="1338483" y="1336552"/>
-                  </a:lnTo>
-                  <a:lnTo>
-                    <a:pt x="1351868" y="1319809"/>
-                  </a:lnTo>
-                  <a:lnTo>
-                    <a:pt x="1365252" y="1302894"/>
-                  </a:lnTo>
-                  <a:lnTo>
-                    <a:pt x="1378637" y="1285851"/>
-                  </a:lnTo>
-                  <a:lnTo>
-                    <a:pt x="1392022" y="1268636"/>
-                  </a:lnTo>
-                  <a:lnTo>
-                    <a:pt x="1405407" y="1251230"/>
-                  </a:lnTo>
-                  <a:lnTo>
-                    <a:pt x="1418792" y="1233697"/>
-                  </a:lnTo>
-                  <a:lnTo>
-                    <a:pt x="1432177" y="1216010"/>
-                  </a:lnTo>
-                  <a:lnTo>
-                    <a:pt x="1445561" y="1198119"/>
-                  </a:lnTo>
-                  <a:lnTo>
-                    <a:pt x="1458946" y="1180105"/>
-                  </a:lnTo>
-                  <a:lnTo>
-                    <a:pt x="1472331" y="1161960"/>
-                  </a:lnTo>
-                  <a:lnTo>
-                    <a:pt x="1485716" y="1143605"/>
-                  </a:lnTo>
-                  <a:lnTo>
-                    <a:pt x="1499101" y="1125135"/>
-                  </a:lnTo>
-                  <a:lnTo>
-                    <a:pt x="1512486" y="1106551"/>
-                  </a:lnTo>
-                  <a:lnTo>
-                    <a:pt x="1525870" y="1087773"/>
-                  </a:lnTo>
-                  <a:lnTo>
-                    <a:pt x="1539255" y="1068885"/>
-                  </a:lnTo>
-                  <a:lnTo>
-                    <a:pt x="1552640" y="1049898"/>
-                  </a:lnTo>
-                  <a:lnTo>
-                    <a:pt x="1566025" y="1030753"/>
-                  </a:lnTo>
-                  <a:lnTo>
-                    <a:pt x="1579410" y="1011504"/>
-                  </a:lnTo>
-                  <a:lnTo>
-                    <a:pt x="1592795" y="992172"/>
-                  </a:lnTo>
-                  <a:lnTo>
-                    <a:pt x="1606179" y="972723"/>
-                  </a:lnTo>
-                  <a:lnTo>
-                    <a:pt x="1619564" y="953183"/>
-                  </a:lnTo>
-                  <a:lnTo>
-                    <a:pt x="1632949" y="933582"/>
-                  </a:lnTo>
-                  <a:lnTo>
-                    <a:pt x="1646334" y="913904"/>
-                  </a:lnTo>
-                  <a:lnTo>
-                    <a:pt x="1659719" y="894160"/>
-                  </a:lnTo>
-                  <a:lnTo>
-                    <a:pt x="1673104" y="874379"/>
-                  </a:lnTo>
-                  <a:lnTo>
-                    <a:pt x="1686488" y="854560"/>
-                  </a:lnTo>
-                  <a:lnTo>
-                    <a:pt x="1699873" y="834711"/>
-                  </a:lnTo>
-                  <a:lnTo>
-                    <a:pt x="1713258" y="814854"/>
-                  </a:lnTo>
-                  <a:lnTo>
-                    <a:pt x="1726643" y="794993"/>
-                  </a:lnTo>
-                  <a:lnTo>
-                    <a:pt x="1740028" y="775150"/>
-                  </a:lnTo>
-                  <a:lnTo>
-                    <a:pt x="1753413" y="755331"/>
-                  </a:lnTo>
-                  <a:lnTo>
-                    <a:pt x="1766797" y="735538"/>
-                  </a:lnTo>
-                  <a:lnTo>
-                    <a:pt x="1780182" y="715819"/>
-                  </a:lnTo>
-                  <a:lnTo>
-                    <a:pt x="1793567" y="696160"/>
-                  </a:lnTo>
-                  <a:lnTo>
-                    <a:pt x="1806952" y="676560"/>
-                  </a:lnTo>
-                  <a:lnTo>
-                    <a:pt x="1820337" y="657081"/>
-                  </a:lnTo>
-                  <a:lnTo>
-                    <a:pt x="1833722" y="637707"/>
-                  </a:lnTo>
-                  <a:lnTo>
-                    <a:pt x="1847106" y="618427"/>
-                  </a:lnTo>
-                  <a:lnTo>
-                    <a:pt x="1860491" y="599306"/>
-                  </a:lnTo>
-                  <a:lnTo>
-                    <a:pt x="1873876" y="580346"/>
-                  </a:lnTo>
-                  <a:lnTo>
-                    <a:pt x="1887261" y="561513"/>
-                  </a:lnTo>
-                  <a:lnTo>
-                    <a:pt x="1900646" y="542866"/>
-                  </a:lnTo>
-                  <a:lnTo>
-                    <a:pt x="1914031" y="524443"/>
-                  </a:lnTo>
-                  <a:lnTo>
-                    <a:pt x="1927415" y="506180"/>
-                  </a:lnTo>
-                  <a:lnTo>
-                    <a:pt x="1940800" y="488121"/>
-                  </a:lnTo>
-                  <a:lnTo>
-                    <a:pt x="1954185" y="470352"/>
-                  </a:lnTo>
-                  <a:lnTo>
-                    <a:pt x="1967570" y="452773"/>
-                  </a:lnTo>
-                  <a:lnTo>
-                    <a:pt x="1980955" y="435404"/>
-                  </a:lnTo>
-                  <a:lnTo>
-                    <a:pt x="1994340" y="418397"/>
-                  </a:lnTo>
-                  <a:lnTo>
-                    <a:pt x="2007724" y="401605"/>
-                  </a:lnTo>
-                  <a:lnTo>
-                    <a:pt x="2021109" y="385030"/>
-                  </a:lnTo>
-                  <a:lnTo>
-                    <a:pt x="2034494" y="368866"/>
-                  </a:lnTo>
-                  <a:lnTo>
-                    <a:pt x="2047879" y="352950"/>
-                  </a:lnTo>
-                  <a:lnTo>
-                    <a:pt x="2061264" y="337272"/>
-                  </a:lnTo>
-                  <a:lnTo>
-                    <a:pt x="2074649" y="322005"/>
-                  </a:lnTo>
-                  <a:lnTo>
-                    <a:pt x="2088033" y="307037"/>
-                  </a:lnTo>
-                  <a:lnTo>
-                    <a:pt x="2101418" y="292325"/>
-                  </a:lnTo>
-                  <a:lnTo>
-                    <a:pt x="2114803" y="278009"/>
-                  </a:lnTo>
-                  <a:lnTo>
-                    <a:pt x="2128188" y="264046"/>
-                  </a:lnTo>
-                  <a:lnTo>
-                    <a:pt x="2141573" y="250349"/>
-                  </a:lnTo>
-                  <a:lnTo>
-                    <a:pt x="2154958" y="237027"/>
-                  </a:lnTo>
-                  <a:lnTo>
-                    <a:pt x="2168342" y="224106"/>
-                  </a:lnTo>
-                  <a:lnTo>
-                    <a:pt x="2181727" y="211460"/>
-                  </a:lnTo>
-                  <a:lnTo>
-                    <a:pt x="2195112" y="199158"/>
-                  </a:lnTo>
-                  <a:lnTo>
-                    <a:pt x="2208497" y="187304"/>
-                  </a:lnTo>
-                  <a:lnTo>
-                    <a:pt x="2221882" y="175729"/>
-                  </a:lnTo>
-                  <a:lnTo>
-                    <a:pt x="2235267" y="164463"/>
-                  </a:lnTo>
-                  <a:lnTo>
-                    <a:pt x="2248651" y="153688"/>
-                  </a:lnTo>
-                  <a:lnTo>
-                    <a:pt x="2262036" y="143195"/>
-                  </a:lnTo>
-                  <a:lnTo>
-                    <a:pt x="2275421" y="132982"/>
-                  </a:lnTo>
-                  <a:lnTo>
-                    <a:pt x="2288806" y="123281"/>
-                  </a:lnTo>
-                  <a:lnTo>
-                    <a:pt x="2302191" y="113872"/>
-                  </a:lnTo>
-                  <a:lnTo>
-                    <a:pt x="2315576" y="104745"/>
-                  </a:lnTo>
-                  <a:lnTo>
-                    <a:pt x="2328960" y="96091"/>
-                  </a:lnTo>
-                  <a:lnTo>
-                    <a:pt x="2342345" y="87770"/>
-                  </a:lnTo>
-                  <a:lnTo>
-                    <a:pt x="2355730" y="79732"/>
-                  </a:lnTo>
-                  <a:lnTo>
-                    <a:pt x="2369115" y="72129"/>
-                  </a:lnTo>
-                  <a:lnTo>
-                    <a:pt x="2382500" y="64903"/>
-                  </a:lnTo>
-                  <a:lnTo>
-                    <a:pt x="2395885" y="57962"/>
-                  </a:lnTo>
-                  <a:lnTo>
-                    <a:pt x="2409269" y="51421"/>
-                  </a:lnTo>
-                  <a:lnTo>
-                    <a:pt x="2422654" y="45304"/>
-                  </a:lnTo>
-                  <a:lnTo>
-                    <a:pt x="2436039" y="39478"/>
-                  </a:lnTo>
-                  <a:lnTo>
-                    <a:pt x="2449424" y="34020"/>
-                  </a:lnTo>
-                  <a:lnTo>
-                    <a:pt x="2462809" y="29039"/>
-                  </a:lnTo>
-                  <a:lnTo>
-                    <a:pt x="2476194" y="24359"/>
-                  </a:lnTo>
-                  <a:lnTo>
-                    <a:pt x="2489578" y="20016"/>
-                  </a:lnTo>
-                  <a:lnTo>
-                    <a:pt x="2502963" y="16212"/>
-                  </a:lnTo>
-                  <a:lnTo>
-                    <a:pt x="2516348" y="12724"/>
-                  </a:lnTo>
-                  <a:lnTo>
-                    <a:pt x="2529733" y="9551"/>
-                  </a:lnTo>
-                  <a:lnTo>
-                    <a:pt x="2543118" y="6970"/>
-                  </a:lnTo>
-                  <a:lnTo>
-                    <a:pt x="2556503" y="4731"/>
-                  </a:lnTo>
-                  <a:lnTo>
-                    <a:pt x="2569887" y="2825"/>
-                  </a:lnTo>
-                  <a:lnTo>
-                    <a:pt x="2583272" y="1495"/>
-                  </a:lnTo>
-                  <a:lnTo>
-                    <a:pt x="2596657" y="576"/>
-                  </a:lnTo>
-                  <a:lnTo>
-                    <a:pt x="2610042" y="9"/>
+                    <a:pt x="13384" y="2283325"/>
+                  </a:lnTo>
+                  <a:lnTo>
+                    <a:pt x="26769" y="2279831"/>
+                  </a:lnTo>
+                  <a:lnTo>
+                    <a:pt x="40154" y="2276372"/>
+                  </a:lnTo>
+                  <a:lnTo>
+                    <a:pt x="53539" y="2272933"/>
+                  </a:lnTo>
+                  <a:lnTo>
+                    <a:pt x="66924" y="2269510"/>
+                  </a:lnTo>
+                  <a:lnTo>
+                    <a:pt x="80308" y="2266109"/>
+                  </a:lnTo>
+                  <a:lnTo>
+                    <a:pt x="93693" y="2262721"/>
+                  </a:lnTo>
+                  <a:lnTo>
+                    <a:pt x="107078" y="2259341"/>
+                  </a:lnTo>
+                  <a:lnTo>
+                    <a:pt x="120463" y="2255967"/>
+                  </a:lnTo>
+                  <a:lnTo>
+                    <a:pt x="133848" y="2252591"/>
+                  </a:lnTo>
+                  <a:lnTo>
+                    <a:pt x="147233" y="2249209"/>
+                  </a:lnTo>
+                  <a:lnTo>
+                    <a:pt x="160617" y="2245817"/>
+                  </a:lnTo>
+                  <a:lnTo>
+                    <a:pt x="174002" y="2242399"/>
+                  </a:lnTo>
+                  <a:lnTo>
+                    <a:pt x="187387" y="2238957"/>
+                  </a:lnTo>
+                  <a:lnTo>
+                    <a:pt x="200772" y="2235490"/>
+                  </a:lnTo>
+                  <a:lnTo>
+                    <a:pt x="214157" y="2231961"/>
+                  </a:lnTo>
+                  <a:lnTo>
+                    <a:pt x="227542" y="2228389"/>
+                  </a:lnTo>
+                  <a:lnTo>
+                    <a:pt x="240926" y="2224772"/>
+                  </a:lnTo>
+                  <a:lnTo>
+                    <a:pt x="254311" y="2221066"/>
+                  </a:lnTo>
+                  <a:lnTo>
+                    <a:pt x="267696" y="2217285"/>
+                  </a:lnTo>
+                  <a:lnTo>
+                    <a:pt x="281081" y="2213437"/>
+                  </a:lnTo>
+                  <a:lnTo>
+                    <a:pt x="294466" y="2209480"/>
+                  </a:lnTo>
+                  <a:lnTo>
+                    <a:pt x="307851" y="2205407"/>
+                  </a:lnTo>
+                  <a:lnTo>
+                    <a:pt x="321235" y="2201245"/>
+                  </a:lnTo>
+                  <a:lnTo>
+                    <a:pt x="334620" y="2196958"/>
+                  </a:lnTo>
+                  <a:lnTo>
+                    <a:pt x="348005" y="2192512"/>
+                  </a:lnTo>
+                  <a:lnTo>
+                    <a:pt x="361390" y="2187953"/>
+                  </a:lnTo>
+                  <a:lnTo>
+                    <a:pt x="374775" y="2183265"/>
+                  </a:lnTo>
+                  <a:lnTo>
+                    <a:pt x="388160" y="2178366"/>
+                  </a:lnTo>
+                  <a:lnTo>
+                    <a:pt x="401544" y="2173335"/>
+                  </a:lnTo>
+                  <a:lnTo>
+                    <a:pt x="414929" y="2168172"/>
+                  </a:lnTo>
+                  <a:lnTo>
+                    <a:pt x="428314" y="2162757"/>
+                  </a:lnTo>
+                  <a:lnTo>
+                    <a:pt x="441699" y="2157189"/>
+                  </a:lnTo>
+                  <a:lnTo>
+                    <a:pt x="455084" y="2151473"/>
+                  </a:lnTo>
+                  <a:lnTo>
+                    <a:pt x="468469" y="2145508"/>
+                  </a:lnTo>
+                  <a:lnTo>
+                    <a:pt x="481853" y="2139351"/>
+                  </a:lnTo>
+                  <a:lnTo>
+                    <a:pt x="495238" y="2133034"/>
+                  </a:lnTo>
+                  <a:lnTo>
+                    <a:pt x="508623" y="2126481"/>
+                  </a:lnTo>
+                  <a:lnTo>
+                    <a:pt x="522008" y="2119700"/>
+                  </a:lnTo>
+                  <a:lnTo>
+                    <a:pt x="535393" y="2112752"/>
+                  </a:lnTo>
+                  <a:lnTo>
+                    <a:pt x="548778" y="2105590"/>
+                  </a:lnTo>
+                  <a:lnTo>
+                    <a:pt x="562162" y="2098167"/>
+                  </a:lnTo>
+                  <a:lnTo>
+                    <a:pt x="575547" y="2090575"/>
+                  </a:lnTo>
+                  <a:lnTo>
+                    <a:pt x="588932" y="2082798"/>
+                  </a:lnTo>
+                  <a:lnTo>
+                    <a:pt x="602317" y="2074732"/>
+                  </a:lnTo>
+                  <a:lnTo>
+                    <a:pt x="615702" y="2066502"/>
+                  </a:lnTo>
+                  <a:lnTo>
+                    <a:pt x="629087" y="2058107"/>
+                  </a:lnTo>
+                  <a:lnTo>
+                    <a:pt x="642471" y="2049427"/>
+                  </a:lnTo>
+                  <a:lnTo>
+                    <a:pt x="655856" y="2040578"/>
+                  </a:lnTo>
+                  <a:lnTo>
+                    <a:pt x="669241" y="2031573"/>
+                  </a:lnTo>
+                  <a:lnTo>
+                    <a:pt x="682626" y="2022324"/>
+                  </a:lnTo>
+                  <a:lnTo>
+                    <a:pt x="696011" y="2012891"/>
+                  </a:lnTo>
+                  <a:lnTo>
+                    <a:pt x="709396" y="2003313"/>
+                  </a:lnTo>
+                  <a:lnTo>
+                    <a:pt x="722780" y="1993531"/>
+                  </a:lnTo>
+                  <a:lnTo>
+                    <a:pt x="736165" y="1983557"/>
+                  </a:lnTo>
+                  <a:lnTo>
+                    <a:pt x="749550" y="1973449"/>
+                  </a:lnTo>
+                  <a:lnTo>
+                    <a:pt x="762935" y="1963179"/>
+                  </a:lnTo>
+                  <a:lnTo>
+                    <a:pt x="776320" y="1952710"/>
+                  </a:lnTo>
+                  <a:lnTo>
+                    <a:pt x="789705" y="1942122"/>
+                  </a:lnTo>
+                  <a:lnTo>
+                    <a:pt x="803089" y="1931405"/>
+                  </a:lnTo>
+                  <a:lnTo>
+                    <a:pt x="816474" y="1920491"/>
+                  </a:lnTo>
+                  <a:lnTo>
+                    <a:pt x="829859" y="1909468"/>
+                  </a:lnTo>
+                  <a:lnTo>
+                    <a:pt x="843244" y="1898339"/>
+                  </a:lnTo>
+                  <a:lnTo>
+                    <a:pt x="856629" y="1887031"/>
+                  </a:lnTo>
+                  <a:lnTo>
+                    <a:pt x="870014" y="1875616"/>
+                  </a:lnTo>
+                  <a:lnTo>
+                    <a:pt x="883398" y="1864103"/>
+                  </a:lnTo>
+                  <a:lnTo>
+                    <a:pt x="896783" y="1852442"/>
+                  </a:lnTo>
+                  <a:lnTo>
+                    <a:pt x="910168" y="1840666"/>
+                  </a:lnTo>
+                  <a:lnTo>
+                    <a:pt x="923553" y="1828799"/>
+                  </a:lnTo>
+                  <a:lnTo>
+                    <a:pt x="936938" y="1816808"/>
+                  </a:lnTo>
+                  <a:lnTo>
+                    <a:pt x="950323" y="1804690"/>
+                  </a:lnTo>
+                  <a:lnTo>
+                    <a:pt x="963707" y="1792484"/>
+                  </a:lnTo>
+                  <a:lnTo>
+                    <a:pt x="977092" y="1780172"/>
+                  </a:lnTo>
+                  <a:lnTo>
+                    <a:pt x="990477" y="1767718"/>
+                  </a:lnTo>
+                  <a:lnTo>
+                    <a:pt x="1003862" y="1755176"/>
+                  </a:lnTo>
+                  <a:lnTo>
+                    <a:pt x="1017247" y="1742539"/>
+                  </a:lnTo>
+                  <a:lnTo>
+                    <a:pt x="1030632" y="1729741"/>
+                  </a:lnTo>
+                  <a:lnTo>
+                    <a:pt x="1044016" y="1716848"/>
+                  </a:lnTo>
+                  <a:lnTo>
+                    <a:pt x="1057401" y="1703861"/>
+                  </a:lnTo>
+                  <a:lnTo>
+                    <a:pt x="1070786" y="1690707"/>
+                  </a:lnTo>
+                  <a:lnTo>
+                    <a:pt x="1084171" y="1677438"/>
+                  </a:lnTo>
+                  <a:lnTo>
+                    <a:pt x="1097556" y="1664066"/>
+                  </a:lnTo>
+                  <a:lnTo>
+                    <a:pt x="1110941" y="1650529"/>
+                  </a:lnTo>
+                  <a:lnTo>
+                    <a:pt x="1124325" y="1636848"/>
+                  </a:lnTo>
+                  <a:lnTo>
+                    <a:pt x="1137710" y="1623051"/>
+                  </a:lnTo>
+                  <a:lnTo>
+                    <a:pt x="1151095" y="1609092"/>
+                  </a:lnTo>
+                  <a:lnTo>
+                    <a:pt x="1164480" y="1594952"/>
+                  </a:lnTo>
+                  <a:lnTo>
+                    <a:pt x="1177865" y="1580684"/>
+                  </a:lnTo>
+                  <a:lnTo>
+                    <a:pt x="1191250" y="1566260"/>
+                  </a:lnTo>
+                  <a:lnTo>
+                    <a:pt x="1204634" y="1551613"/>
+                  </a:lnTo>
+                  <a:lnTo>
+                    <a:pt x="1218019" y="1536824"/>
+                  </a:lnTo>
+                  <a:lnTo>
+                    <a:pt x="1231404" y="1521890"/>
+                  </a:lnTo>
+                  <a:lnTo>
+                    <a:pt x="1244789" y="1506687"/>
+                  </a:lnTo>
+                  <a:lnTo>
+                    <a:pt x="1258174" y="1491330"/>
+                  </a:lnTo>
+                  <a:lnTo>
+                    <a:pt x="1271559" y="1475818"/>
+                  </a:lnTo>
+                  <a:lnTo>
+                    <a:pt x="1284943" y="1460039"/>
+                  </a:lnTo>
+                  <a:lnTo>
+                    <a:pt x="1298328" y="1444072"/>
+                  </a:lnTo>
+                  <a:lnTo>
+                    <a:pt x="1311713" y="1427941"/>
+                  </a:lnTo>
+                  <a:lnTo>
+                    <a:pt x="1325098" y="1411556"/>
+                  </a:lnTo>
+                  <a:lnTo>
+                    <a:pt x="1338483" y="1394947"/>
+                  </a:lnTo>
+                  <a:lnTo>
+                    <a:pt x="1351868" y="1378166"/>
+                  </a:lnTo>
+                  <a:lnTo>
+                    <a:pt x="1365252" y="1361154"/>
+                  </a:lnTo>
+                  <a:lnTo>
+                    <a:pt x="1378637" y="1343884"/>
+                  </a:lnTo>
+                  <a:lnTo>
+                    <a:pt x="1392022" y="1326440"/>
+                  </a:lnTo>
+                  <a:lnTo>
+                    <a:pt x="1405407" y="1308793"/>
+                  </a:lnTo>
+                  <a:lnTo>
+                    <a:pt x="1418792" y="1290859"/>
+                  </a:lnTo>
+                  <a:lnTo>
+                    <a:pt x="1432177" y="1272754"/>
+                  </a:lnTo>
+                  <a:lnTo>
+                    <a:pt x="1445561" y="1254478"/>
+                  </a:lnTo>
+                  <a:lnTo>
+                    <a:pt x="1458946" y="1235897"/>
+                  </a:lnTo>
+                  <a:lnTo>
+                    <a:pt x="1472331" y="1217152"/>
+                  </a:lnTo>
+                  <a:lnTo>
+                    <a:pt x="1485716" y="1198246"/>
+                  </a:lnTo>
+                  <a:lnTo>
+                    <a:pt x="1499101" y="1179079"/>
+                  </a:lnTo>
+                  <a:lnTo>
+                    <a:pt x="1512486" y="1159736"/>
+                  </a:lnTo>
+                  <a:lnTo>
+                    <a:pt x="1525870" y="1140246"/>
+                  </a:lnTo>
+                  <a:lnTo>
+                    <a:pt x="1539255" y="1120545"/>
+                  </a:lnTo>
+                  <a:lnTo>
+                    <a:pt x="1552640" y="1100665"/>
+                  </a:lnTo>
+                  <a:lnTo>
+                    <a:pt x="1566025" y="1080658"/>
+                  </a:lnTo>
+                  <a:lnTo>
+                    <a:pt x="1579410" y="1060491"/>
+                  </a:lnTo>
+                  <a:lnTo>
+                    <a:pt x="1592795" y="1040156"/>
+                  </a:lnTo>
+                  <a:lnTo>
+                    <a:pt x="1606179" y="1019719"/>
+                  </a:lnTo>
+                  <a:lnTo>
+                    <a:pt x="1619564" y="999171"/>
+                  </a:lnTo>
+                  <a:lnTo>
+                    <a:pt x="1632949" y="978480"/>
+                  </a:lnTo>
+                  <a:lnTo>
+                    <a:pt x="1646334" y="957718"/>
+                  </a:lnTo>
+                  <a:lnTo>
+                    <a:pt x="1659719" y="936887"/>
+                  </a:lnTo>
+                  <a:lnTo>
+                    <a:pt x="1673104" y="915960"/>
+                  </a:lnTo>
+                  <a:lnTo>
+                    <a:pt x="1686488" y="894993"/>
+                  </a:lnTo>
+                  <a:lnTo>
+                    <a:pt x="1699873" y="873992"/>
+                  </a:lnTo>
+                  <a:lnTo>
+                    <a:pt x="1713258" y="852959"/>
+                  </a:lnTo>
+                  <a:lnTo>
+                    <a:pt x="1726643" y="831921"/>
+                  </a:lnTo>
+                  <a:lnTo>
+                    <a:pt x="1740028" y="810887"/>
+                  </a:lnTo>
+                  <a:lnTo>
+                    <a:pt x="1753413" y="789876"/>
+                  </a:lnTo>
+                  <a:lnTo>
+                    <a:pt x="1766797" y="768911"/>
+                  </a:lnTo>
+                  <a:lnTo>
+                    <a:pt x="1780182" y="747990"/>
+                  </a:lnTo>
+                  <a:lnTo>
+                    <a:pt x="1793567" y="727136"/>
+                  </a:lnTo>
+                  <a:lnTo>
+                    <a:pt x="1806952" y="706392"/>
+                  </a:lnTo>
+                  <a:lnTo>
+                    <a:pt x="1820337" y="685733"/>
+                  </a:lnTo>
+                  <a:lnTo>
+                    <a:pt x="1833722" y="665174"/>
+                  </a:lnTo>
+                  <a:lnTo>
+                    <a:pt x="1847106" y="644802"/>
+                  </a:lnTo>
+                  <a:lnTo>
+                    <a:pt x="1860491" y="624555"/>
+                  </a:lnTo>
+                  <a:lnTo>
+                    <a:pt x="1873876" y="604436"/>
+                  </a:lnTo>
+                  <a:lnTo>
+                    <a:pt x="1887261" y="584575"/>
+                  </a:lnTo>
+                  <a:lnTo>
+                    <a:pt x="1900646" y="564886"/>
+                  </a:lnTo>
+                  <a:lnTo>
+                    <a:pt x="1914031" y="545363"/>
+                  </a:lnTo>
+                  <a:lnTo>
+                    <a:pt x="1927415" y="526128"/>
+                  </a:lnTo>
+                  <a:lnTo>
+                    <a:pt x="1940800" y="507133"/>
+                  </a:lnTo>
+                  <a:lnTo>
+                    <a:pt x="1954185" y="488339"/>
+                  </a:lnTo>
+                  <a:lnTo>
+                    <a:pt x="1967570" y="469847"/>
+                  </a:lnTo>
+                  <a:lnTo>
+                    <a:pt x="1980955" y="451670"/>
+                  </a:lnTo>
+                  <a:lnTo>
+                    <a:pt x="1994340" y="433725"/>
+                  </a:lnTo>
+                  <a:lnTo>
+                    <a:pt x="2007724" y="416080"/>
+                  </a:lnTo>
+                  <a:lnTo>
+                    <a:pt x="2021109" y="398827"/>
+                  </a:lnTo>
+                  <a:lnTo>
+                    <a:pt x="2034494" y="381831"/>
+                  </a:lnTo>
+                  <a:lnTo>
+                    <a:pt x="2047879" y="365119"/>
+                  </a:lnTo>
+                  <a:lnTo>
+                    <a:pt x="2061264" y="348877"/>
+                  </a:lnTo>
+                  <a:lnTo>
+                    <a:pt x="2074649" y="332913"/>
+                  </a:lnTo>
+                  <a:lnTo>
+                    <a:pt x="2088033" y="317227"/>
+                  </a:lnTo>
+                  <a:lnTo>
+                    <a:pt x="2101418" y="302038"/>
+                  </a:lnTo>
+                  <a:lnTo>
+                    <a:pt x="2114803" y="287163"/>
+                  </a:lnTo>
+                  <a:lnTo>
+                    <a:pt x="2128188" y="272580"/>
+                  </a:lnTo>
+                  <a:lnTo>
+                    <a:pt x="2141573" y="258461"/>
+                  </a:lnTo>
+                  <a:lnTo>
+                    <a:pt x="2154958" y="244715"/>
+                  </a:lnTo>
+                  <a:lnTo>
+                    <a:pt x="2168342" y="231268"/>
+                  </a:lnTo>
+                  <a:lnTo>
+                    <a:pt x="2181727" y="218241"/>
+                  </a:lnTo>
+                  <a:lnTo>
+                    <a:pt x="2195112" y="205643"/>
+                  </a:lnTo>
+                  <a:lnTo>
+                    <a:pt x="2208497" y="193345"/>
+                  </a:lnTo>
+                  <a:lnTo>
+                    <a:pt x="2221882" y="181419"/>
+                  </a:lnTo>
+                  <a:lnTo>
+                    <a:pt x="2235267" y="169972"/>
+                  </a:lnTo>
+                  <a:lnTo>
+                    <a:pt x="2248651" y="158824"/>
+                  </a:lnTo>
+                  <a:lnTo>
+                    <a:pt x="2262036" y="147994"/>
+                  </a:lnTo>
+                  <a:lnTo>
+                    <a:pt x="2275421" y="137691"/>
+                  </a:lnTo>
+                  <a:lnTo>
+                    <a:pt x="2288806" y="127683"/>
+                  </a:lnTo>
+                  <a:lnTo>
+                    <a:pt x="2302191" y="117971"/>
+                  </a:lnTo>
+                  <a:lnTo>
+                    <a:pt x="2315576" y="108765"/>
+                  </a:lnTo>
+                  <a:lnTo>
+                    <a:pt x="2328960" y="99885"/>
+                  </a:lnTo>
+                  <a:lnTo>
+                    <a:pt x="2342345" y="91296"/>
+                  </a:lnTo>
+                  <a:lnTo>
+                    <a:pt x="2355730" y="83159"/>
+                  </a:lnTo>
+                  <a:lnTo>
+                    <a:pt x="2369115" y="75395"/>
+                  </a:lnTo>
+                  <a:lnTo>
+                    <a:pt x="2382500" y="67921"/>
+                  </a:lnTo>
+                  <a:lnTo>
+                    <a:pt x="2395885" y="60848"/>
+                  </a:lnTo>
+                  <a:lnTo>
+                    <a:pt x="2409269" y="54199"/>
+                  </a:lnTo>
+                  <a:lnTo>
+                    <a:pt x="2422654" y="47842"/>
+                  </a:lnTo>
+                  <a:lnTo>
+                    <a:pt x="2436039" y="41840"/>
+                  </a:lnTo>
+                  <a:lnTo>
+                    <a:pt x="2449424" y="36319"/>
+                  </a:lnTo>
+                  <a:lnTo>
+                    <a:pt x="2462809" y="31097"/>
+                  </a:lnTo>
+                  <a:lnTo>
+                    <a:pt x="2476194" y="26186"/>
+                  </a:lnTo>
+                  <a:lnTo>
+                    <a:pt x="2489578" y="21824"/>
+                  </a:lnTo>
+                  <a:lnTo>
+                    <a:pt x="2502963" y="17773"/>
+                  </a:lnTo>
+                  <a:lnTo>
+                    <a:pt x="2516348" y="14035"/>
+                  </a:lnTo>
+                  <a:lnTo>
+                    <a:pt x="2529733" y="10837"/>
+                  </a:lnTo>
+                  <a:lnTo>
+                    <a:pt x="2543118" y="8012"/>
+                  </a:lnTo>
+                  <a:lnTo>
+                    <a:pt x="2556503" y="5518"/>
+                  </a:lnTo>
+                  <a:lnTo>
+                    <a:pt x="2569887" y="3536"/>
+                  </a:lnTo>
+                  <a:lnTo>
+                    <a:pt x="2583272" y="2009"/>
+                  </a:lnTo>
+                  <a:lnTo>
+                    <a:pt x="2596657" y="835"/>
+                  </a:lnTo>
+                  <a:lnTo>
+                    <a:pt x="2610042" y="144"/>
                   </a:lnTo>
                   <a:lnTo>
                     <a:pt x="2623427" y="0"/>
                   </a:lnTo>
                   <a:lnTo>
-                    <a:pt x="2636812" y="475"/>
-                  </a:lnTo>
-                  <a:lnTo>
-                    <a:pt x="2650196" y="1325"/>
-                  </a:lnTo>
-                  <a:lnTo>
-                    <a:pt x="2663581" y="2706"/>
-                  </a:lnTo>
-                  <a:lnTo>
-                    <a:pt x="2676966" y="4653"/>
-                  </a:lnTo>
-                  <a:lnTo>
-                    <a:pt x="2690351" y="6992"/>
-                  </a:lnTo>
-                  <a:lnTo>
-                    <a:pt x="2703736" y="9831"/>
-                  </a:lnTo>
-                  <a:lnTo>
-                    <a:pt x="2717121" y="13315"/>
-                  </a:lnTo>
-                  <a:lnTo>
-                    <a:pt x="2730505" y="17206"/>
-                  </a:lnTo>
-                  <a:lnTo>
-                    <a:pt x="2743890" y="21556"/>
-                  </a:lnTo>
-                  <a:lnTo>
-                    <a:pt x="2757275" y="26626"/>
-                  </a:lnTo>
-                  <a:lnTo>
-                    <a:pt x="2770660" y="32112"/>
-                  </a:lnTo>
-                  <a:lnTo>
-                    <a:pt x="2784045" y="38014"/>
-                  </a:lnTo>
-                  <a:lnTo>
-                    <a:pt x="2797430" y="44682"/>
-                  </a:lnTo>
-                  <a:lnTo>
-                    <a:pt x="2810814" y="51775"/>
-                  </a:lnTo>
-                  <a:lnTo>
-                    <a:pt x="2824199" y="59283"/>
-                  </a:lnTo>
-                  <a:lnTo>
-                    <a:pt x="2837584" y="67488"/>
-                  </a:lnTo>
-                  <a:lnTo>
-                    <a:pt x="2850969" y="76163"/>
-                  </a:lnTo>
-                  <a:lnTo>
-                    <a:pt x="2864354" y="85240"/>
-                  </a:lnTo>
-                  <a:lnTo>
-                    <a:pt x="2877739" y="94931"/>
-                  </a:lnTo>
-                  <a:lnTo>
-                    <a:pt x="2891123" y="105121"/>
-                  </a:lnTo>
-                  <a:lnTo>
-                    <a:pt x="2904508" y="115687"/>
-                  </a:lnTo>
-                  <a:lnTo>
-                    <a:pt x="2917893" y="126772"/>
-                  </a:lnTo>
-                  <a:lnTo>
-                    <a:pt x="2931278" y="138362"/>
-                  </a:lnTo>
-                  <a:lnTo>
-                    <a:pt x="2944663" y="150290"/>
-                  </a:lnTo>
-                  <a:lnTo>
-                    <a:pt x="2958048" y="162634"/>
-                  </a:lnTo>
-                  <a:lnTo>
-                    <a:pt x="2971432" y="175463"/>
-                  </a:lnTo>
-                  <a:lnTo>
-                    <a:pt x="2984817" y="188577"/>
-                  </a:lnTo>
-                  <a:lnTo>
-                    <a:pt x="2998202" y="202006"/>
-                  </a:lnTo>
-                  <a:lnTo>
-                    <a:pt x="3011587" y="215866"/>
-                  </a:lnTo>
-                  <a:lnTo>
-                    <a:pt x="3024972" y="229950"/>
-                  </a:lnTo>
-                  <a:lnTo>
-                    <a:pt x="3038357" y="244253"/>
-                  </a:lnTo>
-                  <a:lnTo>
-                    <a:pt x="3051741" y="258899"/>
-                  </a:lnTo>
-                  <a:lnTo>
-                    <a:pt x="3065126" y="273700"/>
-                  </a:lnTo>
-                  <a:lnTo>
-                    <a:pt x="3078511" y="288647"/>
-                  </a:lnTo>
-                  <a:lnTo>
-                    <a:pt x="3091896" y="303793"/>
-                  </a:lnTo>
-                  <a:lnTo>
-                    <a:pt x="3105281" y="319033"/>
-                  </a:lnTo>
-                  <a:lnTo>
-                    <a:pt x="3118666" y="334342"/>
-                  </a:lnTo>
-                  <a:lnTo>
-                    <a:pt x="3132050" y="349719"/>
-                  </a:lnTo>
-                  <a:lnTo>
-                    <a:pt x="3145435" y="365107"/>
-                  </a:lnTo>
-                  <a:lnTo>
-                    <a:pt x="3158820" y="380485"/>
-                  </a:lnTo>
-                  <a:lnTo>
-                    <a:pt x="3172205" y="395823"/>
-                  </a:lnTo>
-                  <a:lnTo>
-                    <a:pt x="3185590" y="411068"/>
-                  </a:lnTo>
-                  <a:lnTo>
-                    <a:pt x="3198975" y="426230"/>
-                  </a:lnTo>
-                  <a:lnTo>
-                    <a:pt x="3212359" y="441266"/>
-                  </a:lnTo>
-                  <a:lnTo>
-                    <a:pt x="3225744" y="456096"/>
-                  </a:lnTo>
-                  <a:lnTo>
-                    <a:pt x="3239129" y="470774"/>
-                  </a:lnTo>
-                  <a:lnTo>
-                    <a:pt x="3252514" y="485270"/>
-                  </a:lnTo>
-                  <a:lnTo>
-                    <a:pt x="3265899" y="499442"/>
-                  </a:lnTo>
-                  <a:lnTo>
-                    <a:pt x="3279284" y="513404"/>
-                  </a:lnTo>
-                  <a:lnTo>
-                    <a:pt x="3292668" y="527153"/>
-                  </a:lnTo>
-                  <a:lnTo>
-                    <a:pt x="3306053" y="540467"/>
-                  </a:lnTo>
-                  <a:lnTo>
-                    <a:pt x="3319438" y="553527"/>
-                  </a:lnTo>
-                  <a:lnTo>
-                    <a:pt x="3332823" y="566332"/>
-                  </a:lnTo>
-                  <a:lnTo>
-                    <a:pt x="3346208" y="578678"/>
-                  </a:lnTo>
-                  <a:lnTo>
-                    <a:pt x="3359593" y="590705"/>
-                  </a:lnTo>
-                  <a:lnTo>
-                    <a:pt x="3372977" y="602450"/>
-                  </a:lnTo>
-                  <a:lnTo>
-                    <a:pt x="3386362" y="613746"/>
-                  </a:lnTo>
-                  <a:lnTo>
-                    <a:pt x="3399747" y="624670"/>
-                  </a:lnTo>
-                  <a:lnTo>
-                    <a:pt x="3413132" y="635304"/>
-                  </a:lnTo>
-                  <a:lnTo>
-                    <a:pt x="3426517" y="645524"/>
-                  </a:lnTo>
-                  <a:lnTo>
-                    <a:pt x="3439902" y="655338"/>
-                  </a:lnTo>
-                  <a:lnTo>
-                    <a:pt x="3453286" y="664871"/>
-                  </a:lnTo>
-                  <a:lnTo>
-                    <a:pt x="3466671" y="674047"/>
-                  </a:lnTo>
-                  <a:lnTo>
-                    <a:pt x="3480056" y="682806"/>
-                  </a:lnTo>
-                  <a:lnTo>
-                    <a:pt x="3493441" y="691309"/>
-                  </a:lnTo>
-                  <a:lnTo>
-                    <a:pt x="3506826" y="699524"/>
-                  </a:lnTo>
-                  <a:lnTo>
-                    <a:pt x="3520211" y="707339"/>
-                  </a:lnTo>
-                  <a:lnTo>
-                    <a:pt x="3533595" y="714936"/>
-                  </a:lnTo>
-                  <a:lnTo>
-                    <a:pt x="3546980" y="722319"/>
-                  </a:lnTo>
-                  <a:lnTo>
-                    <a:pt x="3560365" y="729346"/>
-                  </a:lnTo>
-                  <a:lnTo>
-                    <a:pt x="3573750" y="736205"/>
-                  </a:lnTo>
-                  <a:lnTo>
-                    <a:pt x="3587135" y="742900"/>
-                  </a:lnTo>
-                  <a:lnTo>
-                    <a:pt x="3600520" y="749351"/>
-                  </a:lnTo>
-                  <a:lnTo>
-                    <a:pt x="3613904" y="755671"/>
-                  </a:lnTo>
-                  <a:lnTo>
-                    <a:pt x="3627289" y="761883"/>
-                  </a:lnTo>
-                  <a:lnTo>
-                    <a:pt x="3640674" y="767956"/>
-                  </a:lnTo>
-                  <a:lnTo>
-                    <a:pt x="3654059" y="773952"/>
-                  </a:lnTo>
-                  <a:lnTo>
-                    <a:pt x="3667444" y="779899"/>
-                  </a:lnTo>
-                  <a:lnTo>
-                    <a:pt x="3680829" y="785799"/>
-                  </a:lnTo>
-                  <a:lnTo>
-                    <a:pt x="3694213" y="791689"/>
-                  </a:lnTo>
-                  <a:lnTo>
-                    <a:pt x="3707598" y="797588"/>
-                  </a:lnTo>
-                  <a:lnTo>
-                    <a:pt x="3720983" y="803511"/>
-                  </a:lnTo>
-                  <a:lnTo>
-                    <a:pt x="3734368" y="809504"/>
-                  </a:lnTo>
-                  <a:lnTo>
-                    <a:pt x="3747753" y="815556"/>
-                  </a:lnTo>
-                  <a:lnTo>
-                    <a:pt x="3761138" y="821686"/>
-                  </a:lnTo>
-                  <a:lnTo>
-                    <a:pt x="3774522" y="827965"/>
-                  </a:lnTo>
-                  <a:lnTo>
-                    <a:pt x="3787907" y="834347"/>
-                  </a:lnTo>
-                  <a:lnTo>
-                    <a:pt x="3801292" y="840837"/>
-                  </a:lnTo>
-                  <a:lnTo>
-                    <a:pt x="3814677" y="847554"/>
-                  </a:lnTo>
-                  <a:lnTo>
-                    <a:pt x="3828062" y="854408"/>
-                  </a:lnTo>
-                  <a:lnTo>
-                    <a:pt x="3841447" y="861400"/>
-                  </a:lnTo>
-                  <a:lnTo>
-                    <a:pt x="3854831" y="868648"/>
-                  </a:lnTo>
-                  <a:lnTo>
-                    <a:pt x="3868216" y="876074"/>
-                  </a:lnTo>
-                  <a:lnTo>
-                    <a:pt x="3881601" y="883658"/>
-                  </a:lnTo>
-                  <a:lnTo>
-                    <a:pt x="3894986" y="891501"/>
-                  </a:lnTo>
-                  <a:lnTo>
-                    <a:pt x="3908371" y="899555"/>
-                  </a:lnTo>
-                  <a:lnTo>
-                    <a:pt x="3921756" y="907776"/>
-                  </a:lnTo>
-                  <a:lnTo>
-                    <a:pt x="3935140" y="916239"/>
-                  </a:lnTo>
-                  <a:lnTo>
-                    <a:pt x="3948525" y="924936"/>
-                  </a:lnTo>
-                  <a:lnTo>
-                    <a:pt x="3961910" y="933797"/>
-                  </a:lnTo>
-                  <a:lnTo>
-                    <a:pt x="3975295" y="942869"/>
-                  </a:lnTo>
-                  <a:lnTo>
-                    <a:pt x="3988680" y="952184"/>
-                  </a:lnTo>
-                  <a:lnTo>
-                    <a:pt x="4002065" y="961650"/>
-                  </a:lnTo>
-                  <a:lnTo>
-                    <a:pt x="4015449" y="971289"/>
-                  </a:lnTo>
-                  <a:lnTo>
-                    <a:pt x="4028834" y="981164"/>
-                  </a:lnTo>
-                  <a:lnTo>
-                    <a:pt x="4042219" y="991169"/>
-                  </a:lnTo>
-                  <a:lnTo>
-                    <a:pt x="4055604" y="1001306"/>
-                  </a:lnTo>
-                  <a:lnTo>
-                    <a:pt x="4068989" y="1011657"/>
-                  </a:lnTo>
-                  <a:lnTo>
-                    <a:pt x="4082374" y="1022113"/>
-                  </a:lnTo>
-                  <a:lnTo>
-                    <a:pt x="4095758" y="1032672"/>
-                  </a:lnTo>
-                  <a:lnTo>
-                    <a:pt x="4109143" y="1043389"/>
-                  </a:lnTo>
-                  <a:lnTo>
-                    <a:pt x="4122528" y="1054193"/>
-                  </a:lnTo>
-                  <a:lnTo>
-                    <a:pt x="4135913" y="1065071"/>
-                  </a:lnTo>
-                  <a:lnTo>
-                    <a:pt x="4149298" y="1076051"/>
-                  </a:lnTo>
-                  <a:lnTo>
-                    <a:pt x="4162683" y="1087096"/>
-                  </a:lnTo>
-                  <a:lnTo>
-                    <a:pt x="4176067" y="1098185"/>
-                  </a:lnTo>
-                  <a:lnTo>
-                    <a:pt x="4189452" y="1109329"/>
-                  </a:lnTo>
-                  <a:lnTo>
-                    <a:pt x="4202837" y="1120508"/>
-                  </a:lnTo>
-                  <a:lnTo>
-                    <a:pt x="4216222" y="1131707"/>
-                  </a:lnTo>
-                  <a:lnTo>
-                    <a:pt x="4229607" y="1142922"/>
-                  </a:lnTo>
-                  <a:lnTo>
-                    <a:pt x="4242992" y="1154142"/>
-                  </a:lnTo>
-                  <a:lnTo>
-                    <a:pt x="4256376" y="1165358"/>
-                  </a:lnTo>
-                  <a:lnTo>
-                    <a:pt x="4269761" y="1176566"/>
-                  </a:lnTo>
-                  <a:lnTo>
-                    <a:pt x="4283146" y="1187747"/>
-                  </a:lnTo>
-                  <a:lnTo>
-                    <a:pt x="4296531" y="1198906"/>
-                  </a:lnTo>
-                  <a:lnTo>
-                    <a:pt x="4309916" y="1210041"/>
-                  </a:lnTo>
-                  <a:lnTo>
-                    <a:pt x="4323301" y="1221123"/>
-                  </a:lnTo>
-                  <a:lnTo>
-                    <a:pt x="4336685" y="1232170"/>
-                  </a:lnTo>
-                  <a:lnTo>
-                    <a:pt x="4350070" y="1243183"/>
-                  </a:lnTo>
-                  <a:lnTo>
-                    <a:pt x="4363455" y="1254128"/>
-                  </a:lnTo>
-                  <a:lnTo>
-                    <a:pt x="4376840" y="1265029"/>
-                  </a:lnTo>
-                  <a:lnTo>
-                    <a:pt x="4390225" y="1275889"/>
-                  </a:lnTo>
-                  <a:lnTo>
-                    <a:pt x="4403610" y="1286681"/>
-                  </a:lnTo>
-                  <a:lnTo>
-                    <a:pt x="4416994" y="1297420"/>
-                  </a:lnTo>
-                  <a:lnTo>
-                    <a:pt x="4430379" y="1308117"/>
-                  </a:lnTo>
-                  <a:lnTo>
-                    <a:pt x="4443764" y="1318753"/>
-                  </a:lnTo>
-                  <a:lnTo>
-                    <a:pt x="4457149" y="1329333"/>
-                  </a:lnTo>
-                  <a:lnTo>
-                    <a:pt x="4470534" y="1339875"/>
-                  </a:lnTo>
-                  <a:lnTo>
-                    <a:pt x="4483919" y="1350366"/>
-                  </a:lnTo>
-                  <a:lnTo>
-                    <a:pt x="4497303" y="1360804"/>
-                  </a:lnTo>
-                  <a:lnTo>
-                    <a:pt x="4510688" y="1371210"/>
-                  </a:lnTo>
-                  <a:lnTo>
-                    <a:pt x="4524073" y="1381579"/>
-                  </a:lnTo>
-                  <a:lnTo>
-                    <a:pt x="4537458" y="1391903"/>
-                  </a:lnTo>
-                  <a:lnTo>
-                    <a:pt x="4550843" y="1402203"/>
-                  </a:lnTo>
-                  <a:lnTo>
-                    <a:pt x="4564228" y="1412479"/>
-                  </a:lnTo>
-                  <a:lnTo>
-                    <a:pt x="4577612" y="1422722"/>
-                  </a:lnTo>
-                  <a:lnTo>
-                    <a:pt x="4590997" y="1432951"/>
-                  </a:lnTo>
-                  <a:lnTo>
-                    <a:pt x="4604382" y="1443167"/>
-                  </a:lnTo>
-                  <a:lnTo>
-                    <a:pt x="4617767" y="1453366"/>
-                  </a:lnTo>
-                  <a:lnTo>
-                    <a:pt x="4631152" y="1463561"/>
-                  </a:lnTo>
-                  <a:lnTo>
-                    <a:pt x="4644537" y="1473751"/>
-                  </a:lnTo>
-                  <a:lnTo>
-                    <a:pt x="4657921" y="1483940"/>
-                  </a:lnTo>
-                  <a:lnTo>
-                    <a:pt x="4671306" y="1494134"/>
-                  </a:lnTo>
-                  <a:lnTo>
-                    <a:pt x="4684691" y="1504331"/>
-                  </a:lnTo>
-                  <a:lnTo>
-                    <a:pt x="4698076" y="1514538"/>
-                  </a:lnTo>
-                  <a:lnTo>
-                    <a:pt x="4711461" y="1524758"/>
-                  </a:lnTo>
-                  <a:lnTo>
-                    <a:pt x="4724846" y="1534989"/>
-                  </a:lnTo>
-                  <a:lnTo>
-                    <a:pt x="4738230" y="1545236"/>
-                  </a:lnTo>
-                  <a:lnTo>
-                    <a:pt x="4751615" y="1555503"/>
-                  </a:lnTo>
-                  <a:lnTo>
-                    <a:pt x="4765000" y="1565785"/>
-                  </a:lnTo>
-                  <a:lnTo>
-                    <a:pt x="4778385" y="1576085"/>
-                  </a:lnTo>
-                  <a:lnTo>
-                    <a:pt x="4791770" y="1586411"/>
-                  </a:lnTo>
-                  <a:lnTo>
-                    <a:pt x="4805155" y="1596752"/>
-                  </a:lnTo>
-                  <a:lnTo>
-                    <a:pt x="4818539" y="1607109"/>
-                  </a:lnTo>
-                  <a:lnTo>
-                    <a:pt x="4831924" y="1617494"/>
-                  </a:lnTo>
-                  <a:lnTo>
-                    <a:pt x="4845309" y="1627892"/>
-                  </a:lnTo>
-                  <a:lnTo>
-                    <a:pt x="4858694" y="1638304"/>
-                  </a:lnTo>
-                  <a:lnTo>
-                    <a:pt x="4872079" y="1648736"/>
-                  </a:lnTo>
-                  <a:lnTo>
-                    <a:pt x="4885464" y="1659179"/>
-                  </a:lnTo>
-                  <a:lnTo>
-                    <a:pt x="4898848" y="1669630"/>
-                  </a:lnTo>
-                  <a:lnTo>
-                    <a:pt x="4912233" y="1680091"/>
-                  </a:lnTo>
-                  <a:lnTo>
-                    <a:pt x="4925618" y="1690556"/>
-                  </a:lnTo>
-                  <a:lnTo>
-                    <a:pt x="4939003" y="1701021"/>
-                  </a:lnTo>
-                  <a:lnTo>
-                    <a:pt x="4952388" y="1711485"/>
-                  </a:lnTo>
-                  <a:lnTo>
-                    <a:pt x="4965773" y="1721941"/>
-                  </a:lnTo>
-                  <a:lnTo>
-                    <a:pt x="4979157" y="1732388"/>
-                  </a:lnTo>
-                  <a:lnTo>
-                    <a:pt x="4992542" y="1742822"/>
-                  </a:lnTo>
-                  <a:lnTo>
-                    <a:pt x="5005927" y="1753231"/>
-                  </a:lnTo>
-                  <a:lnTo>
-                    <a:pt x="5019312" y="1763620"/>
-                  </a:lnTo>
-                  <a:lnTo>
-                    <a:pt x="5032697" y="1773985"/>
-                  </a:lnTo>
-                  <a:lnTo>
-                    <a:pt x="5046082" y="1784305"/>
-                  </a:lnTo>
-                  <a:lnTo>
-                    <a:pt x="5059466" y="1794593"/>
-                  </a:lnTo>
-                  <a:lnTo>
-                    <a:pt x="5072851" y="1804846"/>
-                  </a:lnTo>
-                  <a:lnTo>
-                    <a:pt x="5086236" y="1815031"/>
-                  </a:lnTo>
-                  <a:lnTo>
-                    <a:pt x="5099621" y="1825171"/>
-                  </a:lnTo>
-                  <a:lnTo>
-                    <a:pt x="5113006" y="1835267"/>
-                  </a:lnTo>
-                  <a:lnTo>
-                    <a:pt x="5126391" y="1845273"/>
-                  </a:lnTo>
-                  <a:lnTo>
-                    <a:pt x="5139775" y="1855220"/>
-                  </a:lnTo>
-                  <a:lnTo>
-                    <a:pt x="5153160" y="1865109"/>
-                  </a:lnTo>
-                  <a:lnTo>
-                    <a:pt x="5166545" y="1874898"/>
-                  </a:lnTo>
-                  <a:lnTo>
-                    <a:pt x="5179930" y="1884605"/>
-                  </a:lnTo>
-                  <a:lnTo>
-                    <a:pt x="5193315" y="1894244"/>
-                  </a:lnTo>
-                  <a:lnTo>
-                    <a:pt x="5206700" y="1903777"/>
-                  </a:lnTo>
-                  <a:lnTo>
-                    <a:pt x="5220084" y="1913205"/>
-                  </a:lnTo>
-                  <a:lnTo>
-                    <a:pt x="5233469" y="1922555"/>
-                  </a:lnTo>
-                  <a:lnTo>
-                    <a:pt x="5246854" y="1931797"/>
-                  </a:lnTo>
-                  <a:lnTo>
-                    <a:pt x="5260239" y="1940911"/>
-                  </a:lnTo>
-                  <a:lnTo>
-                    <a:pt x="5273624" y="1949939"/>
-                  </a:lnTo>
-                  <a:lnTo>
-                    <a:pt x="5287009" y="1958861"/>
-                  </a:lnTo>
-                  <a:lnTo>
-                    <a:pt x="5300393" y="1967633"/>
-                  </a:lnTo>
-                  <a:lnTo>
-                    <a:pt x="5313778" y="1976313"/>
-                  </a:lnTo>
-                  <a:lnTo>
-                    <a:pt x="5327163" y="1984894"/>
-                  </a:lnTo>
-                  <a:lnTo>
-                    <a:pt x="5340548" y="1993304"/>
-                  </a:lnTo>
-                  <a:lnTo>
-                    <a:pt x="5353933" y="2001618"/>
-                  </a:lnTo>
-                  <a:lnTo>
-                    <a:pt x="5367318" y="2009836"/>
-                  </a:lnTo>
-                  <a:lnTo>
-                    <a:pt x="5380702" y="2017881"/>
-                  </a:lnTo>
-                  <a:lnTo>
-                    <a:pt x="5394087" y="2025820"/>
-                  </a:lnTo>
-                  <a:lnTo>
-                    <a:pt x="5407472" y="2033661"/>
-                  </a:lnTo>
-                  <a:lnTo>
-                    <a:pt x="5420857" y="2041343"/>
-                  </a:lnTo>
-                  <a:lnTo>
-                    <a:pt x="5434242" y="2048905"/>
-                  </a:lnTo>
-                  <a:lnTo>
-                    <a:pt x="5447627" y="2056371"/>
-                  </a:lnTo>
-                  <a:lnTo>
-                    <a:pt x="5461011" y="2063693"/>
-                  </a:lnTo>
-                  <a:lnTo>
-                    <a:pt x="5474396" y="2070885"/>
-                  </a:lnTo>
-                  <a:lnTo>
-                    <a:pt x="5487781" y="2077982"/>
-                  </a:lnTo>
-                  <a:lnTo>
-                    <a:pt x="5501166" y="2084953"/>
-                  </a:lnTo>
-                  <a:lnTo>
-                    <a:pt x="5514551" y="2091786"/>
-                  </a:lnTo>
-                  <a:lnTo>
-                    <a:pt x="5527936" y="2098529"/>
-                  </a:lnTo>
-                  <a:lnTo>
-                    <a:pt x="5541320" y="2105162"/>
-                  </a:lnTo>
-                  <a:lnTo>
-                    <a:pt x="5554705" y="2111652"/>
-                  </a:lnTo>
-                  <a:lnTo>
-                    <a:pt x="5568090" y="2118057"/>
-                  </a:lnTo>
-                  <a:lnTo>
-                    <a:pt x="5581475" y="2124370"/>
-                  </a:lnTo>
-                  <a:lnTo>
-                    <a:pt x="5594860" y="2130536"/>
-                  </a:lnTo>
-                  <a:lnTo>
-                    <a:pt x="5608245" y="2136622"/>
-                  </a:lnTo>
-                  <a:lnTo>
-                    <a:pt x="5621629" y="2142627"/>
-                  </a:lnTo>
-                  <a:lnTo>
-                    <a:pt x="5635014" y="2148494"/>
-                  </a:lnTo>
-                  <a:lnTo>
-                    <a:pt x="5648399" y="2154280"/>
-                  </a:lnTo>
-                  <a:lnTo>
-                    <a:pt x="5661784" y="2159992"/>
-                  </a:lnTo>
-                  <a:lnTo>
-                    <a:pt x="5675169" y="2165583"/>
-                  </a:lnTo>
-                  <a:lnTo>
-                    <a:pt x="5688554" y="2171088"/>
-                  </a:lnTo>
-                  <a:lnTo>
-                    <a:pt x="5701938" y="2176523"/>
-                  </a:lnTo>
-                  <a:lnTo>
-                    <a:pt x="5715323" y="2181853"/>
-                  </a:lnTo>
-                  <a:lnTo>
-                    <a:pt x="5728708" y="2187092"/>
-                  </a:lnTo>
-                  <a:lnTo>
-                    <a:pt x="5742093" y="2192265"/>
-                  </a:lnTo>
-                  <a:lnTo>
-                    <a:pt x="5755478" y="2197347"/>
-                  </a:lnTo>
-                  <a:lnTo>
-                    <a:pt x="5768863" y="2202331"/>
-                  </a:lnTo>
-                  <a:lnTo>
-                    <a:pt x="5782247" y="2207251"/>
-                  </a:lnTo>
-                  <a:lnTo>
-                    <a:pt x="5795632" y="2212092"/>
-                  </a:lnTo>
-                  <a:lnTo>
-                    <a:pt x="5809017" y="2216829"/>
-                  </a:lnTo>
-                  <a:lnTo>
-                    <a:pt x="5822402" y="2221502"/>
-                  </a:lnTo>
-                  <a:lnTo>
-                    <a:pt x="5835787" y="2226107"/>
-                  </a:lnTo>
-                  <a:lnTo>
-                    <a:pt x="5849172" y="2230597"/>
-                  </a:lnTo>
-                  <a:lnTo>
-                    <a:pt x="5862556" y="2235024"/>
-                  </a:lnTo>
-                  <a:lnTo>
-                    <a:pt x="5875941" y="2239387"/>
-                  </a:lnTo>
-                  <a:lnTo>
-                    <a:pt x="5889326" y="2243633"/>
-                  </a:lnTo>
-                  <a:lnTo>
-                    <a:pt x="5902711" y="2247810"/>
-                  </a:lnTo>
-                  <a:lnTo>
-                    <a:pt x="5916096" y="2251921"/>
-                  </a:lnTo>
-                  <a:lnTo>
-                    <a:pt x="5929481" y="2255922"/>
-                  </a:lnTo>
-                  <a:lnTo>
-                    <a:pt x="5942865" y="2259841"/>
-                  </a:lnTo>
-                  <a:lnTo>
-                    <a:pt x="5956250" y="2263693"/>
-                  </a:lnTo>
-                  <a:lnTo>
-                    <a:pt x="5969635" y="2267440"/>
-                  </a:lnTo>
-                  <a:lnTo>
-                    <a:pt x="5983020" y="2271092"/>
-                  </a:lnTo>
-                  <a:lnTo>
-                    <a:pt x="5996405" y="2274674"/>
-                  </a:lnTo>
-                  <a:lnTo>
-                    <a:pt x="6009790" y="2278158"/>
-                  </a:lnTo>
-                  <a:lnTo>
-                    <a:pt x="6023174" y="2281533"/>
-                  </a:lnTo>
-                  <a:lnTo>
-                    <a:pt x="6036559" y="2284835"/>
-                  </a:lnTo>
-                  <a:lnTo>
-                    <a:pt x="6049944" y="2288045"/>
-                  </a:lnTo>
-                  <a:lnTo>
-                    <a:pt x="6063329" y="2291133"/>
-                  </a:lnTo>
-                  <a:lnTo>
-                    <a:pt x="6076714" y="2294145"/>
-                  </a:lnTo>
-                  <a:lnTo>
-                    <a:pt x="6090099" y="2297074"/>
-                  </a:lnTo>
-                  <a:lnTo>
-                    <a:pt x="6103483" y="2299867"/>
-                  </a:lnTo>
-                  <a:lnTo>
-                    <a:pt x="6116868" y="2302582"/>
-                  </a:lnTo>
-                  <a:lnTo>
-                    <a:pt x="6130253" y="2305221"/>
-                  </a:lnTo>
-                  <a:lnTo>
-                    <a:pt x="6143638" y="2307719"/>
-                  </a:lnTo>
-                  <a:lnTo>
-                    <a:pt x="6157023" y="2310135"/>
-                  </a:lnTo>
-                  <a:lnTo>
-                    <a:pt x="6170408" y="2312474"/>
-                  </a:lnTo>
-                  <a:lnTo>
-                    <a:pt x="6183792" y="2314685"/>
-                  </a:lnTo>
-                  <a:lnTo>
-                    <a:pt x="6197177" y="2316805"/>
-                  </a:lnTo>
-                  <a:lnTo>
-                    <a:pt x="6210562" y="2318849"/>
-                  </a:lnTo>
-                  <a:lnTo>
-                    <a:pt x="6223947" y="2320778"/>
-                  </a:lnTo>
-                  <a:lnTo>
-                    <a:pt x="6237332" y="2322610"/>
-                  </a:lnTo>
-                  <a:lnTo>
-                    <a:pt x="6250717" y="2324370"/>
-                  </a:lnTo>
-                  <a:lnTo>
-                    <a:pt x="6264101" y="2326030"/>
-                  </a:lnTo>
-                  <a:lnTo>
-                    <a:pt x="6277486" y="2327589"/>
-                  </a:lnTo>
-                  <a:lnTo>
-                    <a:pt x="6290871" y="2329081"/>
-                  </a:lnTo>
-                  <a:lnTo>
-                    <a:pt x="6304256" y="2330490"/>
-                  </a:lnTo>
-                  <a:lnTo>
-                    <a:pt x="6317641" y="2331798"/>
-                  </a:lnTo>
-                  <a:lnTo>
-                    <a:pt x="6331026" y="2333045"/>
-                  </a:lnTo>
-                  <a:lnTo>
-                    <a:pt x="6344410" y="2334228"/>
-                  </a:lnTo>
-                  <a:lnTo>
-                    <a:pt x="6357795" y="2335312"/>
-                  </a:lnTo>
-                  <a:lnTo>
-                    <a:pt x="6371180" y="2336345"/>
-                  </a:lnTo>
-                  <a:lnTo>
-                    <a:pt x="6384565" y="2337326"/>
-                  </a:lnTo>
-                  <a:lnTo>
-                    <a:pt x="6397950" y="2338223"/>
-                  </a:lnTo>
-                  <a:lnTo>
-                    <a:pt x="6411335" y="2339075"/>
-                  </a:lnTo>
-                  <a:lnTo>
-                    <a:pt x="6424719" y="2339887"/>
-                  </a:lnTo>
-                  <a:lnTo>
-                    <a:pt x="6438104" y="2340636"/>
-                  </a:lnTo>
-                  <a:lnTo>
-                    <a:pt x="6451489" y="2341347"/>
-                  </a:lnTo>
-                  <a:lnTo>
-                    <a:pt x="6464874" y="2342028"/>
-                  </a:lnTo>
-                  <a:lnTo>
-                    <a:pt x="6478259" y="2342667"/>
-                  </a:lnTo>
-                  <a:lnTo>
-                    <a:pt x="6491644" y="2343278"/>
-                  </a:lnTo>
-                  <a:lnTo>
-                    <a:pt x="6505028" y="2343869"/>
-                  </a:lnTo>
-                  <a:lnTo>
-                    <a:pt x="6518413" y="2344438"/>
-                  </a:lnTo>
-                  <a:lnTo>
-                    <a:pt x="6531798" y="2344989"/>
-                  </a:lnTo>
-                  <a:lnTo>
-                    <a:pt x="6545183" y="2345533"/>
-                  </a:lnTo>
-                  <a:lnTo>
-                    <a:pt x="6558568" y="2346069"/>
-                  </a:lnTo>
-                  <a:lnTo>
-                    <a:pt x="6571953" y="2346603"/>
-                  </a:lnTo>
-                  <a:lnTo>
-                    <a:pt x="6585337" y="2347139"/>
-                  </a:lnTo>
-                  <a:lnTo>
-                    <a:pt x="6598722" y="2347679"/>
-                  </a:lnTo>
-                  <a:lnTo>
-                    <a:pt x="6612107" y="2348233"/>
-                  </a:lnTo>
-                  <a:lnTo>
-                    <a:pt x="6625492" y="2348798"/>
-                  </a:lnTo>
-                  <a:lnTo>
-                    <a:pt x="6638877" y="2349376"/>
-                  </a:lnTo>
-                  <a:lnTo>
-                    <a:pt x="6652262" y="2349984"/>
-                  </a:lnTo>
-                  <a:lnTo>
-                    <a:pt x="6665646" y="2350612"/>
-                  </a:lnTo>
-                  <a:lnTo>
-                    <a:pt x="6679031" y="2351260"/>
-                  </a:lnTo>
-                  <a:lnTo>
-                    <a:pt x="6692416" y="2351946"/>
-                  </a:lnTo>
-                  <a:lnTo>
-                    <a:pt x="6705801" y="2352663"/>
-                  </a:lnTo>
-                  <a:lnTo>
-                    <a:pt x="6719186" y="2353406"/>
-                  </a:lnTo>
-                  <a:lnTo>
-                    <a:pt x="6732571" y="2354193"/>
-                  </a:lnTo>
-                  <a:lnTo>
-                    <a:pt x="6745955" y="2355018"/>
-                  </a:lnTo>
-                  <a:lnTo>
-                    <a:pt x="6759340" y="2355875"/>
-                  </a:lnTo>
-                  <a:lnTo>
-                    <a:pt x="6772725" y="2356775"/>
-                  </a:lnTo>
-                  <a:lnTo>
-                    <a:pt x="6786110" y="2357722"/>
-                  </a:lnTo>
-                  <a:lnTo>
-                    <a:pt x="6799495" y="2358702"/>
-                  </a:lnTo>
-                  <a:lnTo>
-                    <a:pt x="6812880" y="2359724"/>
-                  </a:lnTo>
-                  <a:lnTo>
-                    <a:pt x="6826264" y="2360798"/>
-                  </a:lnTo>
-                  <a:lnTo>
-                    <a:pt x="6839649" y="2361905"/>
-                  </a:lnTo>
-                  <a:lnTo>
-                    <a:pt x="6839649" y="2441591"/>
-                  </a:lnTo>
-                  <a:lnTo>
-                    <a:pt x="6826264" y="2441591"/>
-                  </a:lnTo>
-                  <a:lnTo>
-                    <a:pt x="6812880" y="2441591"/>
-                  </a:lnTo>
-                  <a:lnTo>
-                    <a:pt x="6799495" y="2441591"/>
-                  </a:lnTo>
-                  <a:lnTo>
-                    <a:pt x="6786110" y="2441591"/>
-                  </a:lnTo>
-                  <a:lnTo>
-                    <a:pt x="6772725" y="2441591"/>
-                  </a:lnTo>
-                  <a:lnTo>
-                    <a:pt x="6759340" y="2441591"/>
-                  </a:lnTo>
-                  <a:lnTo>
-                    <a:pt x="6745955" y="2441591"/>
-                  </a:lnTo>
-                  <a:lnTo>
-                    <a:pt x="6732571" y="2441591"/>
-                  </a:lnTo>
-                  <a:lnTo>
-                    <a:pt x="6719186" y="2441591"/>
-                  </a:lnTo>
-                  <a:lnTo>
-                    <a:pt x="6705801" y="2441591"/>
-                  </a:lnTo>
-                  <a:lnTo>
-                    <a:pt x="6692416" y="2441591"/>
-                  </a:lnTo>
-                  <a:lnTo>
-                    <a:pt x="6679031" y="2441591"/>
-                  </a:lnTo>
-                  <a:lnTo>
-                    <a:pt x="6665646" y="2441591"/>
-                  </a:lnTo>
-                  <a:lnTo>
-                    <a:pt x="6652262" y="2441591"/>
-                  </a:lnTo>
-                  <a:lnTo>
-                    <a:pt x="6638877" y="2441591"/>
-                  </a:lnTo>
-                  <a:lnTo>
-                    <a:pt x="6625492" y="2441591"/>
-                  </a:lnTo>
-                  <a:lnTo>
-                    <a:pt x="6612107" y="2441591"/>
-                  </a:lnTo>
-                  <a:lnTo>
-                    <a:pt x="6598722" y="2441591"/>
-                  </a:lnTo>
-                  <a:lnTo>
-                    <a:pt x="6585337" y="2441591"/>
-                  </a:lnTo>
-                  <a:lnTo>
-                    <a:pt x="6571953" y="2441591"/>
-                  </a:lnTo>
-                  <a:lnTo>
-                    <a:pt x="6558568" y="2441591"/>
-                  </a:lnTo>
-                  <a:lnTo>
-                    <a:pt x="6545183" y="2441591"/>
-                  </a:lnTo>
-                  <a:lnTo>
-                    <a:pt x="6531798" y="2441591"/>
-                  </a:lnTo>
-                  <a:lnTo>
-                    <a:pt x="6518413" y="2441591"/>
-                  </a:lnTo>
-                  <a:lnTo>
-                    <a:pt x="6505028" y="2441591"/>
-                  </a:lnTo>
-                  <a:lnTo>
-                    <a:pt x="6491644" y="2441591"/>
-                  </a:lnTo>
-                  <a:lnTo>
-                    <a:pt x="6478259" y="2441591"/>
-                  </a:lnTo>
-                  <a:lnTo>
-                    <a:pt x="6464874" y="2441591"/>
-                  </a:lnTo>
-                  <a:lnTo>
-                    <a:pt x="6451489" y="2441591"/>
-                  </a:lnTo>
-                  <a:lnTo>
-                    <a:pt x="6438104" y="2441591"/>
-                  </a:lnTo>
-                  <a:lnTo>
-                    <a:pt x="6424719" y="2441591"/>
-                  </a:lnTo>
-                  <a:lnTo>
-                    <a:pt x="6411335" y="2441591"/>
-                  </a:lnTo>
-                  <a:lnTo>
-                    <a:pt x="6397950" y="2441591"/>
-                  </a:lnTo>
-                  <a:lnTo>
-                    <a:pt x="6384565" y="2441591"/>
-                  </a:lnTo>
-                  <a:lnTo>
-                    <a:pt x="6371180" y="2441591"/>
-                  </a:lnTo>
-                  <a:lnTo>
-                    <a:pt x="6357795" y="2441591"/>
-                  </a:lnTo>
-                  <a:lnTo>
-                    <a:pt x="6344410" y="2441591"/>
-                  </a:lnTo>
-                  <a:lnTo>
-                    <a:pt x="6331026" y="2441591"/>
-                  </a:lnTo>
-                  <a:lnTo>
-                    <a:pt x="6317641" y="2441591"/>
-                  </a:lnTo>
-                  <a:lnTo>
-                    <a:pt x="6304256" y="2441591"/>
-                  </a:lnTo>
-                  <a:lnTo>
-                    <a:pt x="6290871" y="2441591"/>
-                  </a:lnTo>
-                  <a:lnTo>
-                    <a:pt x="6277486" y="2441591"/>
-                  </a:lnTo>
-                  <a:lnTo>
-                    <a:pt x="6264101" y="2441591"/>
-                  </a:lnTo>
-                  <a:lnTo>
-                    <a:pt x="6250717" y="2441591"/>
-                  </a:lnTo>
-                  <a:lnTo>
-                    <a:pt x="6237332" y="2441591"/>
-                  </a:lnTo>
-                  <a:lnTo>
-                    <a:pt x="6223947" y="2441591"/>
-                  </a:lnTo>
-                  <a:lnTo>
-                    <a:pt x="6210562" y="2441591"/>
-                  </a:lnTo>
-                  <a:lnTo>
-                    <a:pt x="6197177" y="2441591"/>
-                  </a:lnTo>
-                  <a:lnTo>
-                    <a:pt x="6183792" y="2441591"/>
-                  </a:lnTo>
-                  <a:lnTo>
-                    <a:pt x="6170408" y="2441591"/>
-                  </a:lnTo>
-                  <a:lnTo>
-                    <a:pt x="6157023" y="2441591"/>
-                  </a:lnTo>
-                  <a:lnTo>
-                    <a:pt x="6143638" y="2441591"/>
-                  </a:lnTo>
-                  <a:lnTo>
-                    <a:pt x="6130253" y="2441591"/>
-                  </a:lnTo>
-                  <a:lnTo>
-                    <a:pt x="6116868" y="2441591"/>
-                  </a:lnTo>
-                  <a:lnTo>
-                    <a:pt x="6103483" y="2441591"/>
-                  </a:lnTo>
-                  <a:lnTo>
-                    <a:pt x="6090099" y="2441591"/>
-                  </a:lnTo>
-                  <a:lnTo>
-                    <a:pt x="6076714" y="2441591"/>
-                  </a:lnTo>
-                  <a:lnTo>
-                    <a:pt x="6063329" y="2441591"/>
-                  </a:lnTo>
-                  <a:lnTo>
-                    <a:pt x="6049944" y="2441591"/>
-                  </a:lnTo>
-                  <a:lnTo>
-                    <a:pt x="6036559" y="2441591"/>
-                  </a:lnTo>
-                  <a:lnTo>
-                    <a:pt x="6023174" y="2441591"/>
-                  </a:lnTo>
-                  <a:lnTo>
-                    <a:pt x="6009790" y="2441591"/>
-                  </a:lnTo>
-                  <a:lnTo>
-                    <a:pt x="5996405" y="2441591"/>
-                  </a:lnTo>
-                  <a:lnTo>
-                    <a:pt x="5983020" y="2441591"/>
-                  </a:lnTo>
-                  <a:lnTo>
-                    <a:pt x="5969635" y="2441591"/>
-                  </a:lnTo>
-                  <a:lnTo>
-                    <a:pt x="5956250" y="2441591"/>
-                  </a:lnTo>
-                  <a:lnTo>
-                    <a:pt x="5942865" y="2441591"/>
-                  </a:lnTo>
-                  <a:lnTo>
-                    <a:pt x="5929481" y="2441591"/>
-                  </a:lnTo>
-                  <a:lnTo>
-                    <a:pt x="5916096" y="2441591"/>
-                  </a:lnTo>
-                  <a:lnTo>
-                    <a:pt x="5902711" y="2441591"/>
-                  </a:lnTo>
-                  <a:lnTo>
-                    <a:pt x="5889326" y="2441591"/>
-                  </a:lnTo>
-                  <a:lnTo>
-                    <a:pt x="5875941" y="2441591"/>
-                  </a:lnTo>
-                  <a:lnTo>
-                    <a:pt x="5862556" y="2441591"/>
-                  </a:lnTo>
-                  <a:lnTo>
-                    <a:pt x="5849172" y="2441591"/>
-                  </a:lnTo>
-                  <a:lnTo>
-                    <a:pt x="5835787" y="2441591"/>
-                  </a:lnTo>
-                  <a:lnTo>
-                    <a:pt x="5822402" y="2441591"/>
-                  </a:lnTo>
-                  <a:lnTo>
-                    <a:pt x="5809017" y="2441591"/>
-                  </a:lnTo>
-                  <a:lnTo>
-                    <a:pt x="5795632" y="2441591"/>
-                  </a:lnTo>
-                  <a:lnTo>
-                    <a:pt x="5782247" y="2441591"/>
-                  </a:lnTo>
-                  <a:lnTo>
-                    <a:pt x="5768863" y="2441591"/>
-                  </a:lnTo>
-                  <a:lnTo>
-                    <a:pt x="5755478" y="2441591"/>
-                  </a:lnTo>
-                  <a:lnTo>
-                    <a:pt x="5742093" y="2441591"/>
-                  </a:lnTo>
-                  <a:lnTo>
-                    <a:pt x="5728708" y="2441591"/>
-                  </a:lnTo>
-                  <a:lnTo>
-                    <a:pt x="5715323" y="2441591"/>
-                  </a:lnTo>
-                  <a:lnTo>
-                    <a:pt x="5701938" y="2441591"/>
-                  </a:lnTo>
-                  <a:lnTo>
-                    <a:pt x="5688554" y="2441591"/>
-                  </a:lnTo>
-                  <a:lnTo>
-                    <a:pt x="5675169" y="2441591"/>
-                  </a:lnTo>
-                  <a:lnTo>
-                    <a:pt x="5661784" y="2441591"/>
-                  </a:lnTo>
-                  <a:lnTo>
-                    <a:pt x="5648399" y="2441591"/>
-                  </a:lnTo>
-                  <a:lnTo>
-                    <a:pt x="5635014" y="2441591"/>
-                  </a:lnTo>
-                  <a:lnTo>
-                    <a:pt x="5621629" y="2441591"/>
-                  </a:lnTo>
-                  <a:lnTo>
-                    <a:pt x="5608245" y="2441591"/>
-                  </a:lnTo>
-                  <a:lnTo>
-                    <a:pt x="5594860" y="2441591"/>
-                  </a:lnTo>
-                  <a:lnTo>
-                    <a:pt x="5581475" y="2441591"/>
-                  </a:lnTo>
-                  <a:lnTo>
-                    <a:pt x="5568090" y="2441591"/>
-                  </a:lnTo>
-                  <a:lnTo>
-                    <a:pt x="5554705" y="2441591"/>
-                  </a:lnTo>
-                  <a:lnTo>
-                    <a:pt x="5541320" y="2441591"/>
-                  </a:lnTo>
-                  <a:lnTo>
-                    <a:pt x="5527936" y="2441591"/>
-                  </a:lnTo>
-                  <a:lnTo>
-                    <a:pt x="5514551" y="2441591"/>
-                  </a:lnTo>
-                  <a:lnTo>
-                    <a:pt x="5501166" y="2441591"/>
-                  </a:lnTo>
-                  <a:lnTo>
-                    <a:pt x="5487781" y="2441591"/>
-                  </a:lnTo>
-                  <a:lnTo>
-                    <a:pt x="5474396" y="2441591"/>
-                  </a:lnTo>
-                  <a:lnTo>
-                    <a:pt x="5461011" y="2441591"/>
-                  </a:lnTo>
-                  <a:lnTo>
-                    <a:pt x="5447627" y="2441591"/>
-                  </a:lnTo>
-                  <a:lnTo>
-                    <a:pt x="5434242" y="2441591"/>
-                  </a:lnTo>
-                  <a:lnTo>
-                    <a:pt x="5420857" y="2441591"/>
-                  </a:lnTo>
-                  <a:lnTo>
-                    <a:pt x="5407472" y="2441591"/>
-                  </a:lnTo>
-                  <a:lnTo>
-                    <a:pt x="5394087" y="2441591"/>
-                  </a:lnTo>
-                  <a:lnTo>
-                    <a:pt x="5380702" y="2441591"/>
-                  </a:lnTo>
-                  <a:lnTo>
-                    <a:pt x="5367318" y="2441591"/>
-                  </a:lnTo>
-                  <a:lnTo>
-                    <a:pt x="5353933" y="2441591"/>
-                  </a:lnTo>
-                  <a:lnTo>
-                    <a:pt x="5340548" y="2441591"/>
-                  </a:lnTo>
-                  <a:lnTo>
-                    <a:pt x="5327163" y="2441591"/>
-                  </a:lnTo>
-                  <a:lnTo>
-                    <a:pt x="5313778" y="2441591"/>
-                  </a:lnTo>
-                  <a:lnTo>
-                    <a:pt x="5300393" y="2441591"/>
-                  </a:lnTo>
-                  <a:lnTo>
-                    <a:pt x="5287009" y="2441591"/>
-                  </a:lnTo>
-                  <a:lnTo>
-                    <a:pt x="5273624" y="2441591"/>
-                  </a:lnTo>
-                  <a:lnTo>
-                    <a:pt x="5260239" y="2441591"/>
-                  </a:lnTo>
-                  <a:lnTo>
-                    <a:pt x="5246854" y="2441591"/>
-                  </a:lnTo>
-                  <a:lnTo>
-                    <a:pt x="5233469" y="2441591"/>
-                  </a:lnTo>
-                  <a:lnTo>
-                    <a:pt x="5220084" y="2441591"/>
-                  </a:lnTo>
-                  <a:lnTo>
-                    <a:pt x="5206700" y="2441591"/>
-                  </a:lnTo>
-                  <a:lnTo>
-                    <a:pt x="5193315" y="2441591"/>
-                  </a:lnTo>
-                  <a:lnTo>
-                    <a:pt x="5179930" y="2441591"/>
-                  </a:lnTo>
-                  <a:lnTo>
-                    <a:pt x="5166545" y="2441591"/>
-                  </a:lnTo>
-                  <a:lnTo>
-                    <a:pt x="5153160" y="2441591"/>
-                  </a:lnTo>
-                  <a:lnTo>
-                    <a:pt x="5139775" y="2441591"/>
-                  </a:lnTo>
-                  <a:lnTo>
-                    <a:pt x="5126391" y="2441591"/>
-                  </a:lnTo>
-                  <a:lnTo>
-                    <a:pt x="5113006" y="2441591"/>
-                  </a:lnTo>
-                  <a:lnTo>
-                    <a:pt x="5099621" y="2441591"/>
-                  </a:lnTo>
-                  <a:lnTo>
-                    <a:pt x="5086236" y="2441591"/>
-                  </a:lnTo>
-                  <a:lnTo>
-                    <a:pt x="5072851" y="2441591"/>
-                  </a:lnTo>
-                  <a:lnTo>
-                    <a:pt x="5059466" y="2441591"/>
-                  </a:lnTo>
-                  <a:lnTo>
-                    <a:pt x="5046082" y="2441591"/>
-                  </a:lnTo>
-                  <a:lnTo>
-                    <a:pt x="5032697" y="2441591"/>
-                  </a:lnTo>
-                  <a:lnTo>
-                    <a:pt x="5019312" y="2441591"/>
-                  </a:lnTo>
-                  <a:lnTo>
-                    <a:pt x="5005927" y="2441591"/>
-                  </a:lnTo>
-                  <a:lnTo>
-                    <a:pt x="4992542" y="2441591"/>
-                  </a:lnTo>
-                  <a:lnTo>
-                    <a:pt x="4979157" y="2441591"/>
-                  </a:lnTo>
-                  <a:lnTo>
-                    <a:pt x="4965773" y="2441591"/>
-                  </a:lnTo>
-                  <a:lnTo>
-                    <a:pt x="4952388" y="2441591"/>
-                  </a:lnTo>
-                  <a:lnTo>
-                    <a:pt x="4939003" y="2441591"/>
-                  </a:lnTo>
-                  <a:lnTo>
-                    <a:pt x="4925618" y="2441591"/>
-                  </a:lnTo>
-                  <a:lnTo>
-                    <a:pt x="4912233" y="2441591"/>
-                  </a:lnTo>
-                  <a:lnTo>
-                    <a:pt x="4898848" y="2441591"/>
-                  </a:lnTo>
-                  <a:lnTo>
-                    <a:pt x="4885464" y="2441591"/>
-                  </a:lnTo>
-                  <a:lnTo>
-                    <a:pt x="4872079" y="2441591"/>
-                  </a:lnTo>
-                  <a:lnTo>
-                    <a:pt x="4858694" y="2441591"/>
-                  </a:lnTo>
-                  <a:lnTo>
-                    <a:pt x="4845309" y="2441591"/>
-                  </a:lnTo>
-                  <a:lnTo>
-                    <a:pt x="4831924" y="2441591"/>
-                  </a:lnTo>
-                  <a:lnTo>
-                    <a:pt x="4818539" y="2441591"/>
-                  </a:lnTo>
-                  <a:lnTo>
-                    <a:pt x="4805155" y="2441591"/>
-                  </a:lnTo>
-                  <a:lnTo>
-                    <a:pt x="4791770" y="2441591"/>
-                  </a:lnTo>
-                  <a:lnTo>
-                    <a:pt x="4778385" y="2441591"/>
-                  </a:lnTo>
-                  <a:lnTo>
-                    <a:pt x="4765000" y="2441591"/>
-                  </a:lnTo>
-                  <a:lnTo>
-                    <a:pt x="4751615" y="2441591"/>
-                  </a:lnTo>
-                  <a:lnTo>
-                    <a:pt x="4738230" y="2441591"/>
-                  </a:lnTo>
-                  <a:lnTo>
-                    <a:pt x="4724846" y="2441591"/>
-                  </a:lnTo>
-                  <a:lnTo>
-                    <a:pt x="4711461" y="2441591"/>
-                  </a:lnTo>
-                  <a:lnTo>
-                    <a:pt x="4698076" y="2441591"/>
-                  </a:lnTo>
-                  <a:lnTo>
-                    <a:pt x="4684691" y="2441591"/>
-                  </a:lnTo>
-                  <a:lnTo>
-                    <a:pt x="4671306" y="2441591"/>
-                  </a:lnTo>
-                  <a:lnTo>
-                    <a:pt x="4657921" y="2441591"/>
-                  </a:lnTo>
-                  <a:lnTo>
-                    <a:pt x="4644537" y="2441591"/>
-                  </a:lnTo>
-                  <a:lnTo>
-                    <a:pt x="4631152" y="2441591"/>
-                  </a:lnTo>
-                  <a:lnTo>
-                    <a:pt x="4617767" y="2441591"/>
-                  </a:lnTo>
-                  <a:lnTo>
-                    <a:pt x="4604382" y="2441591"/>
-                  </a:lnTo>
-                  <a:lnTo>
-                    <a:pt x="4590997" y="2441591"/>
-                  </a:lnTo>
-                  <a:lnTo>
-                    <a:pt x="4577612" y="2441591"/>
-                  </a:lnTo>
-                  <a:lnTo>
-                    <a:pt x="4564228" y="2441591"/>
-                  </a:lnTo>
-                  <a:lnTo>
-                    <a:pt x="4550843" y="2441591"/>
-                  </a:lnTo>
-                  <a:lnTo>
-                    <a:pt x="4537458" y="2441591"/>
-                  </a:lnTo>
-                  <a:lnTo>
-                    <a:pt x="4524073" y="2441591"/>
-                  </a:lnTo>
-                  <a:lnTo>
-                    <a:pt x="4510688" y="2441591"/>
-                  </a:lnTo>
-                  <a:lnTo>
-                    <a:pt x="4497303" y="2441591"/>
-                  </a:lnTo>
-                  <a:lnTo>
-                    <a:pt x="4483919" y="2441591"/>
-                  </a:lnTo>
-                  <a:lnTo>
-                    <a:pt x="4470534" y="2441591"/>
-                  </a:lnTo>
-                  <a:lnTo>
-                    <a:pt x="4457149" y="2441591"/>
-                  </a:lnTo>
-                  <a:lnTo>
-                    <a:pt x="4443764" y="2441591"/>
-                  </a:lnTo>
-                  <a:lnTo>
-                    <a:pt x="4430379" y="2441591"/>
-                  </a:lnTo>
-                  <a:lnTo>
-                    <a:pt x="4416994" y="2441591"/>
-                  </a:lnTo>
-                  <a:lnTo>
-                    <a:pt x="4403610" y="2441591"/>
-                  </a:lnTo>
-                  <a:lnTo>
-                    <a:pt x="4390225" y="2441591"/>
-                  </a:lnTo>
-                  <a:lnTo>
-                    <a:pt x="4376840" y="2441591"/>
-                  </a:lnTo>
-                  <a:lnTo>
-                    <a:pt x="4363455" y="2441591"/>
-                  </a:lnTo>
-                  <a:lnTo>
-                    <a:pt x="4350070" y="2441591"/>
-                  </a:lnTo>
-                  <a:lnTo>
-                    <a:pt x="4336685" y="2441591"/>
-                  </a:lnTo>
-                  <a:lnTo>
-                    <a:pt x="4323301" y="2441591"/>
-                  </a:lnTo>
-                  <a:lnTo>
-                    <a:pt x="4309916" y="2441591"/>
-                  </a:lnTo>
-                  <a:lnTo>
-                    <a:pt x="4296531" y="2441591"/>
-                  </a:lnTo>
-                  <a:lnTo>
-                    <a:pt x="4283146" y="2441591"/>
-                  </a:lnTo>
-                  <a:lnTo>
-                    <a:pt x="4269761" y="2441591"/>
-                  </a:lnTo>
-                  <a:lnTo>
-                    <a:pt x="4256376" y="2441591"/>
-                  </a:lnTo>
-                  <a:lnTo>
-                    <a:pt x="4242992" y="2441591"/>
-                  </a:lnTo>
-                  <a:lnTo>
-                    <a:pt x="4229607" y="2441591"/>
-                  </a:lnTo>
-                  <a:lnTo>
-                    <a:pt x="4216222" y="2441591"/>
-                  </a:lnTo>
-                  <a:lnTo>
-                    <a:pt x="4202837" y="2441591"/>
-                  </a:lnTo>
-                  <a:lnTo>
-                    <a:pt x="4189452" y="2441591"/>
-                  </a:lnTo>
-                  <a:lnTo>
-                    <a:pt x="4176067" y="2441591"/>
-                  </a:lnTo>
-                  <a:lnTo>
-                    <a:pt x="4162683" y="2441591"/>
-                  </a:lnTo>
-                  <a:lnTo>
-                    <a:pt x="4149298" y="2441591"/>
-                  </a:lnTo>
-                  <a:lnTo>
-                    <a:pt x="4135913" y="2441591"/>
-                  </a:lnTo>
-                  <a:lnTo>
-                    <a:pt x="4122528" y="2441591"/>
-                  </a:lnTo>
-                  <a:lnTo>
-                    <a:pt x="4109143" y="2441591"/>
-                  </a:lnTo>
-                  <a:lnTo>
-                    <a:pt x="4095758" y="2441591"/>
-                  </a:lnTo>
-                  <a:lnTo>
-                    <a:pt x="4082374" y="2441591"/>
-                  </a:lnTo>
-                  <a:lnTo>
-                    <a:pt x="4068989" y="2441591"/>
-                  </a:lnTo>
-                  <a:lnTo>
-                    <a:pt x="4055604" y="2441591"/>
-                  </a:lnTo>
-                  <a:lnTo>
-                    <a:pt x="4042219" y="2441591"/>
-                  </a:lnTo>
-                  <a:lnTo>
-                    <a:pt x="4028834" y="2441591"/>
-                  </a:lnTo>
-                  <a:lnTo>
-                    <a:pt x="4015449" y="2441591"/>
-                  </a:lnTo>
-                  <a:lnTo>
-                    <a:pt x="4002065" y="2441591"/>
-                  </a:lnTo>
-                  <a:lnTo>
-                    <a:pt x="3988680" y="2441591"/>
-                  </a:lnTo>
-                  <a:lnTo>
-                    <a:pt x="3975295" y="2441591"/>
-                  </a:lnTo>
-                  <a:lnTo>
-                    <a:pt x="3961910" y="2441591"/>
-                  </a:lnTo>
-                  <a:lnTo>
-                    <a:pt x="3948525" y="2441591"/>
-                  </a:lnTo>
-                  <a:lnTo>
-                    <a:pt x="3935140" y="2441591"/>
-                  </a:lnTo>
-                  <a:lnTo>
-                    <a:pt x="3921756" y="2441591"/>
-                  </a:lnTo>
-                  <a:lnTo>
-                    <a:pt x="3908371" y="2441591"/>
-                  </a:lnTo>
-                  <a:lnTo>
-                    <a:pt x="3894986" y="2441591"/>
-                  </a:lnTo>
-                  <a:lnTo>
-                    <a:pt x="3881601" y="2441591"/>
-                  </a:lnTo>
-                  <a:lnTo>
-                    <a:pt x="3868216" y="2441591"/>
-                  </a:lnTo>
-                  <a:lnTo>
-                    <a:pt x="3854831" y="2441591"/>
-                  </a:lnTo>
-                  <a:lnTo>
-                    <a:pt x="3841447" y="2441591"/>
-                  </a:lnTo>
-                  <a:lnTo>
-                    <a:pt x="3828062" y="2441591"/>
-                  </a:lnTo>
-                  <a:lnTo>
-                    <a:pt x="3814677" y="2441591"/>
-                  </a:lnTo>
-                  <a:lnTo>
-                    <a:pt x="3801292" y="2441591"/>
-                  </a:lnTo>
-                  <a:lnTo>
-                    <a:pt x="3787907" y="2441591"/>
-                  </a:lnTo>
-                  <a:lnTo>
-                    <a:pt x="3774522" y="2441591"/>
-                  </a:lnTo>
-                  <a:lnTo>
-                    <a:pt x="3761138" y="2441591"/>
-                  </a:lnTo>
-                  <a:lnTo>
-                    <a:pt x="3747753" y="2441591"/>
-                  </a:lnTo>
-                  <a:lnTo>
-                    <a:pt x="3734368" y="2441591"/>
-                  </a:lnTo>
-                  <a:lnTo>
-                    <a:pt x="3720983" y="2441591"/>
-                  </a:lnTo>
-                  <a:lnTo>
-                    <a:pt x="3707598" y="2441591"/>
-                  </a:lnTo>
-                  <a:lnTo>
-                    <a:pt x="3694213" y="2441591"/>
-                  </a:lnTo>
-                  <a:lnTo>
-                    <a:pt x="3680829" y="2441591"/>
-                  </a:lnTo>
-                  <a:lnTo>
-                    <a:pt x="3667444" y="2441591"/>
-                  </a:lnTo>
-                  <a:lnTo>
-                    <a:pt x="3654059" y="2441591"/>
-                  </a:lnTo>
-                  <a:lnTo>
-                    <a:pt x="3640674" y="2441591"/>
-                  </a:lnTo>
-                  <a:lnTo>
-                    <a:pt x="3627289" y="2441591"/>
-                  </a:lnTo>
-                  <a:lnTo>
-                    <a:pt x="3613904" y="2441591"/>
-                  </a:lnTo>
-                  <a:lnTo>
-                    <a:pt x="3600520" y="2441591"/>
-                  </a:lnTo>
-                  <a:lnTo>
-                    <a:pt x="3587135" y="2441591"/>
-                  </a:lnTo>
-                  <a:lnTo>
-                    <a:pt x="3573750" y="2441591"/>
-                  </a:lnTo>
-                  <a:lnTo>
-                    <a:pt x="3560365" y="2441591"/>
-                  </a:lnTo>
-                  <a:lnTo>
-                    <a:pt x="3546980" y="2441591"/>
-                  </a:lnTo>
-                  <a:lnTo>
-                    <a:pt x="3533595" y="2441591"/>
-                  </a:lnTo>
-                  <a:lnTo>
-                    <a:pt x="3520211" y="2441591"/>
-                  </a:lnTo>
-                  <a:lnTo>
-                    <a:pt x="3506826" y="2441591"/>
-                  </a:lnTo>
-                  <a:lnTo>
-                    <a:pt x="3493441" y="2441591"/>
-                  </a:lnTo>
-                  <a:lnTo>
-                    <a:pt x="3480056" y="2441591"/>
-                  </a:lnTo>
-                  <a:lnTo>
-                    <a:pt x="3466671" y="2441591"/>
-                  </a:lnTo>
-                  <a:lnTo>
-                    <a:pt x="3453286" y="2441591"/>
-                  </a:lnTo>
-                  <a:lnTo>
-                    <a:pt x="3439902" y="2441591"/>
-                  </a:lnTo>
-                  <a:lnTo>
-                    <a:pt x="3426517" y="2441591"/>
-                  </a:lnTo>
-                  <a:lnTo>
-                    <a:pt x="3413132" y="2441591"/>
-                  </a:lnTo>
-                  <a:lnTo>
-                    <a:pt x="3399747" y="2441591"/>
-                  </a:lnTo>
-                  <a:lnTo>
-                    <a:pt x="3386362" y="2441591"/>
-                  </a:lnTo>
-                  <a:lnTo>
-                    <a:pt x="3372977" y="2441591"/>
-                  </a:lnTo>
-                  <a:lnTo>
-                    <a:pt x="3359593" y="2441591"/>
-                  </a:lnTo>
-                  <a:lnTo>
-                    <a:pt x="3346208" y="2441591"/>
-                  </a:lnTo>
-                  <a:lnTo>
-                    <a:pt x="3332823" y="2441591"/>
-                  </a:lnTo>
-                  <a:lnTo>
-                    <a:pt x="3319438" y="2441591"/>
-                  </a:lnTo>
-                  <a:lnTo>
-                    <a:pt x="3306053" y="2441591"/>
-                  </a:lnTo>
-                  <a:lnTo>
-                    <a:pt x="3292668" y="2441591"/>
-                  </a:lnTo>
-                  <a:lnTo>
-                    <a:pt x="3279284" y="2441591"/>
-                  </a:lnTo>
-                  <a:lnTo>
-                    <a:pt x="3265899" y="2441591"/>
-                  </a:lnTo>
-                  <a:lnTo>
-                    <a:pt x="3252514" y="2441591"/>
-                  </a:lnTo>
-                  <a:lnTo>
-                    <a:pt x="3239129" y="2441591"/>
-                  </a:lnTo>
-                  <a:lnTo>
-                    <a:pt x="3225744" y="2441591"/>
-                  </a:lnTo>
-                  <a:lnTo>
-                    <a:pt x="3212359" y="2441591"/>
-                  </a:lnTo>
-                  <a:lnTo>
-                    <a:pt x="3198975" y="2441591"/>
-                  </a:lnTo>
-                  <a:lnTo>
-                    <a:pt x="3185590" y="2441591"/>
-                  </a:lnTo>
-                  <a:lnTo>
-                    <a:pt x="3172205" y="2441591"/>
-                  </a:lnTo>
-                  <a:lnTo>
-                    <a:pt x="3158820" y="2441591"/>
-                  </a:lnTo>
-                  <a:lnTo>
-                    <a:pt x="3145435" y="2441591"/>
-                  </a:lnTo>
-                  <a:lnTo>
-                    <a:pt x="3132050" y="2441591"/>
-                  </a:lnTo>
-                  <a:lnTo>
-                    <a:pt x="3118666" y="2441591"/>
-                  </a:lnTo>
-                  <a:lnTo>
-                    <a:pt x="3105281" y="2441591"/>
-                  </a:lnTo>
-                  <a:lnTo>
-                    <a:pt x="3091896" y="2441591"/>
-                  </a:lnTo>
-                  <a:lnTo>
-                    <a:pt x="3078511" y="2441591"/>
-                  </a:lnTo>
-                  <a:lnTo>
-                    <a:pt x="3065126" y="2441591"/>
-                  </a:lnTo>
-                  <a:lnTo>
-                    <a:pt x="3051741" y="2441591"/>
-                  </a:lnTo>
-                  <a:lnTo>
-                    <a:pt x="3038357" y="2441591"/>
-                  </a:lnTo>
-                  <a:lnTo>
-                    <a:pt x="3024972" y="2441591"/>
-                  </a:lnTo>
-                  <a:lnTo>
-                    <a:pt x="3011587" y="2441591"/>
-                  </a:lnTo>
-                  <a:lnTo>
-                    <a:pt x="2998202" y="2441591"/>
-                  </a:lnTo>
-                  <a:lnTo>
-                    <a:pt x="2984817" y="2441591"/>
-                  </a:lnTo>
-                  <a:lnTo>
-                    <a:pt x="2971432" y="2441591"/>
-                  </a:lnTo>
-                  <a:lnTo>
-                    <a:pt x="2958048" y="2441591"/>
-                  </a:lnTo>
-                  <a:lnTo>
-                    <a:pt x="2944663" y="2441591"/>
-                  </a:lnTo>
-                  <a:lnTo>
-                    <a:pt x="2931278" y="2441591"/>
-                  </a:lnTo>
-                  <a:lnTo>
-                    <a:pt x="2917893" y="2441591"/>
-                  </a:lnTo>
-                  <a:lnTo>
-                    <a:pt x="2904508" y="2441591"/>
-                  </a:lnTo>
-                  <a:lnTo>
-                    <a:pt x="2891123" y="2441591"/>
-                  </a:lnTo>
-                  <a:lnTo>
-                    <a:pt x="2877739" y="2441591"/>
-                  </a:lnTo>
-                  <a:lnTo>
-                    <a:pt x="2864354" y="2441591"/>
-                  </a:lnTo>
-                  <a:lnTo>
-                    <a:pt x="2850969" y="2441591"/>
-                  </a:lnTo>
-                  <a:lnTo>
-                    <a:pt x="2837584" y="2441591"/>
-                  </a:lnTo>
-                  <a:lnTo>
-                    <a:pt x="2824199" y="2441591"/>
-                  </a:lnTo>
-                  <a:lnTo>
-                    <a:pt x="2810814" y="2441591"/>
-                  </a:lnTo>
-                  <a:lnTo>
-                    <a:pt x="2797430" y="2441591"/>
-                  </a:lnTo>
-                  <a:lnTo>
-                    <a:pt x="2784045" y="2441591"/>
-                  </a:lnTo>
-                  <a:lnTo>
-                    <a:pt x="2770660" y="2441591"/>
-                  </a:lnTo>
-                  <a:lnTo>
-                    <a:pt x="2757275" y="2441591"/>
-                  </a:lnTo>
-                  <a:lnTo>
-                    <a:pt x="2743890" y="2441591"/>
-                  </a:lnTo>
-                  <a:lnTo>
-                    <a:pt x="2730505" y="2441591"/>
-                  </a:lnTo>
-                  <a:lnTo>
-                    <a:pt x="2717121" y="2441591"/>
-                  </a:lnTo>
-                  <a:lnTo>
-                    <a:pt x="2703736" y="2441591"/>
-                  </a:lnTo>
-                  <a:lnTo>
-                    <a:pt x="2690351" y="2441591"/>
-                  </a:lnTo>
-                  <a:lnTo>
-                    <a:pt x="2676966" y="2441591"/>
-                  </a:lnTo>
-                  <a:lnTo>
-                    <a:pt x="2663581" y="2441591"/>
-                  </a:lnTo>
-                  <a:lnTo>
-                    <a:pt x="2650196" y="2441591"/>
-                  </a:lnTo>
-                  <a:lnTo>
-                    <a:pt x="2636812" y="2441591"/>
-                  </a:lnTo>
-                  <a:lnTo>
-                    <a:pt x="2623427" y="2441591"/>
-                  </a:lnTo>
-                  <a:lnTo>
-                    <a:pt x="2610042" y="2441591"/>
-                  </a:lnTo>
-                  <a:lnTo>
-                    <a:pt x="2596657" y="2441591"/>
-                  </a:lnTo>
-                  <a:lnTo>
-                    <a:pt x="2583272" y="2441591"/>
-                  </a:lnTo>
-                  <a:lnTo>
-                    <a:pt x="2569887" y="2441591"/>
-                  </a:lnTo>
-                  <a:lnTo>
-                    <a:pt x="2556503" y="2441591"/>
-                  </a:lnTo>
-                  <a:lnTo>
-                    <a:pt x="2543118" y="2441591"/>
-                  </a:lnTo>
-                  <a:lnTo>
-                    <a:pt x="2529733" y="2441591"/>
-                  </a:lnTo>
-                  <a:lnTo>
-                    <a:pt x="2516348" y="2441591"/>
-                  </a:lnTo>
-                  <a:lnTo>
-                    <a:pt x="2502963" y="2441591"/>
-                  </a:lnTo>
-                  <a:lnTo>
-                    <a:pt x="2489578" y="2441591"/>
-                  </a:lnTo>
-                  <a:lnTo>
-                    <a:pt x="2476194" y="2441591"/>
-                  </a:lnTo>
-                  <a:lnTo>
-                    <a:pt x="2462809" y="2441591"/>
-                  </a:lnTo>
-                  <a:lnTo>
-                    <a:pt x="2449424" y="2441591"/>
-                  </a:lnTo>
-                  <a:lnTo>
-                    <a:pt x="2436039" y="2441591"/>
-                  </a:lnTo>
-                  <a:lnTo>
-                    <a:pt x="2422654" y="2441591"/>
-                  </a:lnTo>
-                  <a:lnTo>
-                    <a:pt x="2409269" y="2441591"/>
-                  </a:lnTo>
-                  <a:lnTo>
-                    <a:pt x="2395885" y="2441591"/>
-                  </a:lnTo>
-                  <a:lnTo>
-                    <a:pt x="2382500" y="2441591"/>
-                  </a:lnTo>
-                  <a:lnTo>
-                    <a:pt x="2369115" y="2441591"/>
-                  </a:lnTo>
-                  <a:lnTo>
-                    <a:pt x="2355730" y="2441591"/>
-                  </a:lnTo>
-                  <a:lnTo>
-                    <a:pt x="2342345" y="2441591"/>
-                  </a:lnTo>
-                  <a:lnTo>
-                    <a:pt x="2328960" y="2441591"/>
-                  </a:lnTo>
-                  <a:lnTo>
-                    <a:pt x="2315576" y="2441591"/>
-                  </a:lnTo>
-                  <a:lnTo>
-                    <a:pt x="2302191" y="2441591"/>
-                  </a:lnTo>
-                  <a:lnTo>
-                    <a:pt x="2288806" y="2441591"/>
-                  </a:lnTo>
-                  <a:lnTo>
-                    <a:pt x="2275421" y="2441591"/>
-                  </a:lnTo>
-                  <a:lnTo>
-                    <a:pt x="2262036" y="2441591"/>
-                  </a:lnTo>
-                  <a:lnTo>
-                    <a:pt x="2248651" y="2441591"/>
-                  </a:lnTo>
-                  <a:lnTo>
-                    <a:pt x="2235267" y="2441591"/>
-                  </a:lnTo>
-                  <a:lnTo>
-                    <a:pt x="2221882" y="2441591"/>
-                  </a:lnTo>
-                  <a:lnTo>
-                    <a:pt x="2208497" y="2441591"/>
-                  </a:lnTo>
-                  <a:lnTo>
-                    <a:pt x="2195112" y="2441591"/>
-                  </a:lnTo>
-                  <a:lnTo>
-                    <a:pt x="2181727" y="2441591"/>
-                  </a:lnTo>
-                  <a:lnTo>
-                    <a:pt x="2168342" y="2441591"/>
-                  </a:lnTo>
-                  <a:lnTo>
-                    <a:pt x="2154958" y="2441591"/>
-                  </a:lnTo>
-                  <a:lnTo>
-                    <a:pt x="2141573" y="2441591"/>
-                  </a:lnTo>
-                  <a:lnTo>
-                    <a:pt x="2128188" y="2441591"/>
-                  </a:lnTo>
-                  <a:lnTo>
-                    <a:pt x="2114803" y="2441591"/>
-                  </a:lnTo>
-                  <a:lnTo>
-                    <a:pt x="2101418" y="2441591"/>
-                  </a:lnTo>
-                  <a:lnTo>
-                    <a:pt x="2088033" y="2441591"/>
-                  </a:lnTo>
-                  <a:lnTo>
-                    <a:pt x="2074649" y="2441591"/>
-                  </a:lnTo>
-                  <a:lnTo>
-                    <a:pt x="2061264" y="2441591"/>
-                  </a:lnTo>
-                  <a:lnTo>
-                    <a:pt x="2047879" y="2441591"/>
-                  </a:lnTo>
-                  <a:lnTo>
-                    <a:pt x="2034494" y="2441591"/>
-                  </a:lnTo>
-                  <a:lnTo>
-                    <a:pt x="2021109" y="2441591"/>
-                  </a:lnTo>
-                  <a:lnTo>
-                    <a:pt x="2007724" y="2441591"/>
-                  </a:lnTo>
-                  <a:lnTo>
-                    <a:pt x="1994340" y="2441591"/>
-                  </a:lnTo>
-                  <a:lnTo>
-                    <a:pt x="1980955" y="2441591"/>
-                  </a:lnTo>
-                  <a:lnTo>
-                    <a:pt x="1967570" y="2441591"/>
-                  </a:lnTo>
-                  <a:lnTo>
-                    <a:pt x="1954185" y="2441591"/>
-                  </a:lnTo>
-                  <a:lnTo>
-                    <a:pt x="1940800" y="2441591"/>
-                  </a:lnTo>
-                  <a:lnTo>
-                    <a:pt x="1927415" y="2441591"/>
-                  </a:lnTo>
-                  <a:lnTo>
-                    <a:pt x="1914031" y="2441591"/>
-                  </a:lnTo>
-                  <a:lnTo>
-                    <a:pt x="1900646" y="2441591"/>
-                  </a:lnTo>
-                  <a:lnTo>
-                    <a:pt x="1887261" y="2441591"/>
-                  </a:lnTo>
-                  <a:lnTo>
-                    <a:pt x="1873876" y="2441591"/>
-                  </a:lnTo>
-                  <a:lnTo>
-                    <a:pt x="1860491" y="2441591"/>
-                  </a:lnTo>
-                  <a:lnTo>
-                    <a:pt x="1847106" y="2441591"/>
-                  </a:lnTo>
-                  <a:lnTo>
-                    <a:pt x="1833722" y="2441591"/>
-                  </a:lnTo>
-                  <a:lnTo>
-                    <a:pt x="1820337" y="2441591"/>
-                  </a:lnTo>
-                  <a:lnTo>
-                    <a:pt x="1806952" y="2441591"/>
-                  </a:lnTo>
-                  <a:lnTo>
-                    <a:pt x="1793567" y="2441591"/>
-                  </a:lnTo>
-                  <a:lnTo>
-                    <a:pt x="1780182" y="2441591"/>
-                  </a:lnTo>
-                  <a:lnTo>
-                    <a:pt x="1766797" y="2441591"/>
-                  </a:lnTo>
-                  <a:lnTo>
-                    <a:pt x="1753413" y="2441591"/>
-                  </a:lnTo>
-                  <a:lnTo>
-                    <a:pt x="1740028" y="2441591"/>
-                  </a:lnTo>
-                  <a:lnTo>
-                    <a:pt x="1726643" y="2441591"/>
-                  </a:lnTo>
-                  <a:lnTo>
-                    <a:pt x="1713258" y="2441591"/>
-                  </a:lnTo>
-                  <a:lnTo>
-                    <a:pt x="1699873" y="2441591"/>
-                  </a:lnTo>
-                  <a:lnTo>
-                    <a:pt x="1686488" y="2441591"/>
-                  </a:lnTo>
-                  <a:lnTo>
-                    <a:pt x="1673104" y="2441591"/>
-                  </a:lnTo>
-                  <a:lnTo>
-                    <a:pt x="1659719" y="2441591"/>
-                  </a:lnTo>
-                  <a:lnTo>
-                    <a:pt x="1646334" y="2441591"/>
-                  </a:lnTo>
-                  <a:lnTo>
-                    <a:pt x="1632949" y="2441591"/>
-                  </a:lnTo>
-                  <a:lnTo>
-                    <a:pt x="1619564" y="2441591"/>
-                  </a:lnTo>
-                  <a:lnTo>
-                    <a:pt x="1606179" y="2441591"/>
-                  </a:lnTo>
-                  <a:lnTo>
-                    <a:pt x="1592795" y="2441591"/>
-                  </a:lnTo>
-                  <a:lnTo>
-                    <a:pt x="1579410" y="2441591"/>
-                  </a:lnTo>
-                  <a:lnTo>
-                    <a:pt x="1566025" y="2441591"/>
-                  </a:lnTo>
-                  <a:lnTo>
-                    <a:pt x="1552640" y="2441591"/>
-                  </a:lnTo>
-                  <a:lnTo>
-                    <a:pt x="1539255" y="2441591"/>
-                  </a:lnTo>
-                  <a:lnTo>
-                    <a:pt x="1525870" y="2441591"/>
-                  </a:lnTo>
-                  <a:lnTo>
-                    <a:pt x="1512486" y="2441591"/>
-                  </a:lnTo>
-                  <a:lnTo>
-                    <a:pt x="1499101" y="2441591"/>
-                  </a:lnTo>
-                  <a:lnTo>
-                    <a:pt x="1485716" y="2441591"/>
-                  </a:lnTo>
-                  <a:lnTo>
-                    <a:pt x="1472331" y="2441591"/>
-                  </a:lnTo>
-                  <a:lnTo>
-                    <a:pt x="1458946" y="2441591"/>
-                  </a:lnTo>
-                  <a:lnTo>
-                    <a:pt x="1445561" y="2441591"/>
-                  </a:lnTo>
-                  <a:lnTo>
-                    <a:pt x="1432177" y="2441591"/>
-                  </a:lnTo>
-                  <a:lnTo>
-                    <a:pt x="1418792" y="2441591"/>
-                  </a:lnTo>
-                  <a:lnTo>
-                    <a:pt x="1405407" y="2441591"/>
-                  </a:lnTo>
-                  <a:lnTo>
-                    <a:pt x="1392022" y="2441591"/>
-                  </a:lnTo>
-                  <a:lnTo>
-                    <a:pt x="1378637" y="2441591"/>
-                  </a:lnTo>
-                  <a:lnTo>
-                    <a:pt x="1365252" y="2441591"/>
-                  </a:lnTo>
-                  <a:lnTo>
-                    <a:pt x="1351868" y="2441591"/>
-                  </a:lnTo>
-                  <a:lnTo>
-                    <a:pt x="1338483" y="2441591"/>
-                  </a:lnTo>
-                  <a:lnTo>
-                    <a:pt x="1325098" y="2441591"/>
-                  </a:lnTo>
-                  <a:lnTo>
-                    <a:pt x="1311713" y="2441591"/>
-                  </a:lnTo>
-                  <a:lnTo>
-                    <a:pt x="1298328" y="2441591"/>
-                  </a:lnTo>
-                  <a:lnTo>
-                    <a:pt x="1284943" y="2441591"/>
-                  </a:lnTo>
-                  <a:lnTo>
-                    <a:pt x="1271559" y="2441591"/>
-                  </a:lnTo>
-                  <a:lnTo>
-                    <a:pt x="1258174" y="2441591"/>
-                  </a:lnTo>
-                  <a:lnTo>
-                    <a:pt x="1244789" y="2441591"/>
-                  </a:lnTo>
-                  <a:lnTo>
-                    <a:pt x="1231404" y="2441591"/>
-                  </a:lnTo>
-                  <a:lnTo>
-                    <a:pt x="1218019" y="2441591"/>
-                  </a:lnTo>
-                  <a:lnTo>
-                    <a:pt x="1204634" y="2441591"/>
-                  </a:lnTo>
-                  <a:lnTo>
-                    <a:pt x="1191250" y="2441591"/>
-                  </a:lnTo>
-                  <a:lnTo>
-                    <a:pt x="1177865" y="2441591"/>
-                  </a:lnTo>
-                  <a:lnTo>
-                    <a:pt x="1164480" y="2441591"/>
-                  </a:lnTo>
-                  <a:lnTo>
-                    <a:pt x="1151095" y="2441591"/>
-                  </a:lnTo>
-                  <a:lnTo>
-                    <a:pt x="1137710" y="2441591"/>
-                  </a:lnTo>
-                  <a:lnTo>
-                    <a:pt x="1124325" y="2441591"/>
-                  </a:lnTo>
-                  <a:lnTo>
-                    <a:pt x="1110941" y="2441591"/>
-                  </a:lnTo>
-                  <a:lnTo>
-                    <a:pt x="1097556" y="2441591"/>
-                  </a:lnTo>
-                  <a:lnTo>
-                    <a:pt x="1084171" y="2441591"/>
-                  </a:lnTo>
-                  <a:lnTo>
-                    <a:pt x="1070786" y="2441591"/>
-                  </a:lnTo>
-                  <a:lnTo>
-                    <a:pt x="1057401" y="2441591"/>
-                  </a:lnTo>
-                  <a:lnTo>
-                    <a:pt x="1044016" y="2441591"/>
-                  </a:lnTo>
-                  <a:lnTo>
-                    <a:pt x="1030632" y="2441591"/>
-                  </a:lnTo>
-                  <a:lnTo>
-                    <a:pt x="1017247" y="2441591"/>
-                  </a:lnTo>
-                  <a:lnTo>
-                    <a:pt x="1003862" y="2441591"/>
-                  </a:lnTo>
-                  <a:lnTo>
-                    <a:pt x="990477" y="2441591"/>
-                  </a:lnTo>
-                  <a:lnTo>
-                    <a:pt x="977092" y="2441591"/>
-                  </a:lnTo>
-                  <a:lnTo>
-                    <a:pt x="963707" y="2441591"/>
-                  </a:lnTo>
-                  <a:lnTo>
-                    <a:pt x="950323" y="2441591"/>
-                  </a:lnTo>
-                  <a:lnTo>
-                    <a:pt x="936938" y="2441591"/>
-                  </a:lnTo>
-                  <a:lnTo>
-                    <a:pt x="923553" y="2441591"/>
-                  </a:lnTo>
-                  <a:lnTo>
-                    <a:pt x="910168" y="2441591"/>
-                  </a:lnTo>
-                  <a:lnTo>
-                    <a:pt x="896783" y="2441591"/>
-                  </a:lnTo>
-                  <a:lnTo>
-                    <a:pt x="883398" y="2441591"/>
-                  </a:lnTo>
-                  <a:lnTo>
-                    <a:pt x="870014" y="2441591"/>
-                  </a:lnTo>
-                  <a:lnTo>
-                    <a:pt x="856629" y="2441591"/>
-                  </a:lnTo>
-                  <a:lnTo>
-                    <a:pt x="843244" y="2441591"/>
-                  </a:lnTo>
-                  <a:lnTo>
-                    <a:pt x="829859" y="2441591"/>
-                  </a:lnTo>
-                  <a:lnTo>
-                    <a:pt x="816474" y="2441591"/>
-                  </a:lnTo>
-                  <a:lnTo>
-                    <a:pt x="803089" y="2441591"/>
-                  </a:lnTo>
-                  <a:lnTo>
-                    <a:pt x="789705" y="2441591"/>
-                  </a:lnTo>
-                  <a:lnTo>
-                    <a:pt x="776320" y="2441591"/>
-                  </a:lnTo>
-                  <a:lnTo>
-                    <a:pt x="762935" y="2441591"/>
-                  </a:lnTo>
-                  <a:lnTo>
-                    <a:pt x="749550" y="2441591"/>
-                  </a:lnTo>
-                  <a:lnTo>
-                    <a:pt x="736165" y="2441591"/>
-                  </a:lnTo>
-                  <a:lnTo>
-                    <a:pt x="722780" y="2441591"/>
-                  </a:lnTo>
-                  <a:lnTo>
-                    <a:pt x="709396" y="2441591"/>
-                  </a:lnTo>
-                  <a:lnTo>
-                    <a:pt x="696011" y="2441591"/>
-                  </a:lnTo>
-                  <a:lnTo>
-                    <a:pt x="682626" y="2441591"/>
-                  </a:lnTo>
-                  <a:lnTo>
-                    <a:pt x="669241" y="2441591"/>
-                  </a:lnTo>
-                  <a:lnTo>
-                    <a:pt x="655856" y="2441591"/>
-                  </a:lnTo>
-                  <a:lnTo>
-                    <a:pt x="642471" y="2441591"/>
-                  </a:lnTo>
-                  <a:lnTo>
-                    <a:pt x="629087" y="2441591"/>
-                  </a:lnTo>
-                  <a:lnTo>
-                    <a:pt x="615702" y="2441591"/>
-                  </a:lnTo>
-                  <a:lnTo>
-                    <a:pt x="602317" y="2441591"/>
-                  </a:lnTo>
-                  <a:lnTo>
-                    <a:pt x="588932" y="2441591"/>
-                  </a:lnTo>
-                  <a:lnTo>
-                    <a:pt x="575547" y="2441591"/>
-                  </a:lnTo>
-                  <a:lnTo>
-                    <a:pt x="562162" y="2441591"/>
-                  </a:lnTo>
-                  <a:lnTo>
-                    <a:pt x="548778" y="2441591"/>
-                  </a:lnTo>
-                  <a:lnTo>
-                    <a:pt x="535393" y="2441591"/>
-                  </a:lnTo>
-                  <a:lnTo>
-                    <a:pt x="522008" y="2441591"/>
-                  </a:lnTo>
-                  <a:lnTo>
-                    <a:pt x="508623" y="2441591"/>
-                  </a:lnTo>
-                  <a:lnTo>
-                    <a:pt x="495238" y="2441591"/>
-                  </a:lnTo>
-                  <a:lnTo>
-                    <a:pt x="481853" y="2441591"/>
-                  </a:lnTo>
-                  <a:lnTo>
-                    <a:pt x="468469" y="2441591"/>
-                  </a:lnTo>
-                  <a:lnTo>
-                    <a:pt x="455084" y="2441591"/>
-                  </a:lnTo>
-                  <a:lnTo>
-                    <a:pt x="441699" y="2441591"/>
-                  </a:lnTo>
-                  <a:lnTo>
-                    <a:pt x="428314" y="2441591"/>
-                  </a:lnTo>
-                  <a:lnTo>
-                    <a:pt x="414929" y="2441591"/>
-                  </a:lnTo>
-                  <a:lnTo>
-                    <a:pt x="401544" y="2441591"/>
-                  </a:lnTo>
-                  <a:lnTo>
-                    <a:pt x="388160" y="2441591"/>
-                  </a:lnTo>
-                  <a:lnTo>
-                    <a:pt x="374775" y="2441591"/>
-                  </a:lnTo>
-                  <a:lnTo>
-                    <a:pt x="361390" y="2441591"/>
-                  </a:lnTo>
-                  <a:lnTo>
-                    <a:pt x="348005" y="2441591"/>
-                  </a:lnTo>
-                  <a:lnTo>
-                    <a:pt x="334620" y="2441591"/>
-                  </a:lnTo>
-                  <a:lnTo>
-                    <a:pt x="321235" y="2441591"/>
-                  </a:lnTo>
-                  <a:lnTo>
-                    <a:pt x="307851" y="2441591"/>
-                  </a:lnTo>
-                  <a:lnTo>
-                    <a:pt x="294466" y="2441591"/>
-                  </a:lnTo>
-                  <a:lnTo>
-                    <a:pt x="281081" y="2441591"/>
-                  </a:lnTo>
-                  <a:lnTo>
-                    <a:pt x="267696" y="2441591"/>
-                  </a:lnTo>
-                  <a:lnTo>
-                    <a:pt x="254311" y="2441591"/>
-                  </a:lnTo>
-                  <a:lnTo>
-                    <a:pt x="240926" y="2441591"/>
-                  </a:lnTo>
-                  <a:lnTo>
-                    <a:pt x="227542" y="2441591"/>
-                  </a:lnTo>
-                  <a:lnTo>
-                    <a:pt x="214157" y="2441591"/>
-                  </a:lnTo>
-                  <a:lnTo>
-                    <a:pt x="200772" y="2441591"/>
-                  </a:lnTo>
-                  <a:lnTo>
-                    <a:pt x="187387" y="2441591"/>
-                  </a:lnTo>
-                  <a:lnTo>
-                    <a:pt x="174002" y="2441591"/>
-                  </a:lnTo>
-                  <a:lnTo>
-                    <a:pt x="160617" y="2441591"/>
-                  </a:lnTo>
-                  <a:lnTo>
-                    <a:pt x="147233" y="2441591"/>
-                  </a:lnTo>
-                  <a:lnTo>
-                    <a:pt x="133848" y="2441591"/>
-                  </a:lnTo>
-                  <a:lnTo>
-                    <a:pt x="120463" y="2441591"/>
-                  </a:lnTo>
-                  <a:lnTo>
-                    <a:pt x="107078" y="2441591"/>
-                  </a:lnTo>
-                  <a:lnTo>
-                    <a:pt x="93693" y="2441591"/>
-                  </a:lnTo>
-                  <a:lnTo>
-                    <a:pt x="80308" y="2441591"/>
-                  </a:lnTo>
-                  <a:lnTo>
-                    <a:pt x="66924" y="2441591"/>
-                  </a:lnTo>
-                  <a:lnTo>
-                    <a:pt x="53539" y="2441591"/>
-                  </a:lnTo>
-                  <a:lnTo>
-                    <a:pt x="40154" y="2441591"/>
-                  </a:lnTo>
-                  <a:lnTo>
-                    <a:pt x="26769" y="2441591"/>
-                  </a:lnTo>
-                  <a:lnTo>
-                    <a:pt x="13384" y="2441591"/>
-                  </a:lnTo>
-                  <a:lnTo>
-                    <a:pt x="0" y="2441591"/>
+                    <a:pt x="2636812" y="232"/>
+                  </a:lnTo>
+                  <a:lnTo>
+                    <a:pt x="2650196" y="914"/>
+                  </a:lnTo>
+                  <a:lnTo>
+                    <a:pt x="2663581" y="2243"/>
+                  </a:lnTo>
+                  <a:lnTo>
+                    <a:pt x="2676966" y="3973"/>
+                  </a:lnTo>
+                  <a:lnTo>
+                    <a:pt x="2690351" y="6109"/>
+                  </a:lnTo>
+                  <a:lnTo>
+                    <a:pt x="2703736" y="8998"/>
+                  </a:lnTo>
+                  <a:lnTo>
+                    <a:pt x="2717121" y="12310"/>
+                  </a:lnTo>
+                  <a:lnTo>
+                    <a:pt x="2730505" y="16045"/>
+                  </a:lnTo>
+                  <a:lnTo>
+                    <a:pt x="2743890" y="20497"/>
+                  </a:lnTo>
+                  <a:lnTo>
+                    <a:pt x="2757275" y="25456"/>
+                  </a:lnTo>
+                  <a:lnTo>
+                    <a:pt x="2770660" y="30854"/>
+                  </a:lnTo>
+                  <a:lnTo>
+                    <a:pt x="2784045" y="36909"/>
+                  </a:lnTo>
+                  <a:lnTo>
+                    <a:pt x="2797430" y="43556"/>
+                  </a:lnTo>
+                  <a:lnTo>
+                    <a:pt x="2810814" y="50644"/>
+                  </a:lnTo>
+                  <a:lnTo>
+                    <a:pt x="2824199" y="58317"/>
+                  </a:lnTo>
+                  <a:lnTo>
+                    <a:pt x="2837584" y="66651"/>
+                  </a:lnTo>
+                  <a:lnTo>
+                    <a:pt x="2850969" y="75418"/>
+                  </a:lnTo>
+                  <a:lnTo>
+                    <a:pt x="2864354" y="84684"/>
+                  </a:lnTo>
+                  <a:lnTo>
+                    <a:pt x="2877739" y="94659"/>
+                  </a:lnTo>
+                  <a:lnTo>
+                    <a:pt x="2891123" y="105046"/>
+                  </a:lnTo>
+                  <a:lnTo>
+                    <a:pt x="2904508" y="115843"/>
+                  </a:lnTo>
+                  <a:lnTo>
+                    <a:pt x="2917893" y="127353"/>
+                  </a:lnTo>
+                  <a:lnTo>
+                    <a:pt x="2931278" y="139246"/>
+                  </a:lnTo>
+                  <a:lnTo>
+                    <a:pt x="2944663" y="151510"/>
+                  </a:lnTo>
+                  <a:lnTo>
+                    <a:pt x="2958048" y="164352"/>
+                  </a:lnTo>
+                  <a:lnTo>
+                    <a:pt x="2971432" y="177583"/>
+                  </a:lnTo>
+                  <a:lnTo>
+                    <a:pt x="2984817" y="191132"/>
+                  </a:lnTo>
+                  <a:lnTo>
+                    <a:pt x="2998202" y="205119"/>
+                  </a:lnTo>
+                  <a:lnTo>
+                    <a:pt x="3011587" y="219470"/>
+                  </a:lnTo>
+                  <a:lnTo>
+                    <a:pt x="3024972" y="234071"/>
+                  </a:lnTo>
+                  <a:lnTo>
+                    <a:pt x="3038357" y="248975"/>
+                  </a:lnTo>
+                  <a:lnTo>
+                    <a:pt x="3051741" y="264183"/>
+                  </a:lnTo>
+                  <a:lnTo>
+                    <a:pt x="3065126" y="279562"/>
+                  </a:lnTo>
+                  <a:lnTo>
+                    <a:pt x="3078511" y="295123"/>
+                  </a:lnTo>
+                  <a:lnTo>
+                    <a:pt x="3091896" y="310890"/>
+                  </a:lnTo>
+                  <a:lnTo>
+                    <a:pt x="3105281" y="326743"/>
+                  </a:lnTo>
+                  <a:lnTo>
+                    <a:pt x="3118666" y="342677"/>
+                  </a:lnTo>
+                  <a:lnTo>
+                    <a:pt x="3132050" y="358683"/>
+                  </a:lnTo>
+                  <a:lnTo>
+                    <a:pt x="3145435" y="374690"/>
+                  </a:lnTo>
+                  <a:lnTo>
+                    <a:pt x="3158820" y="390689"/>
+                  </a:lnTo>
+                  <a:lnTo>
+                    <a:pt x="3172205" y="406625"/>
+                  </a:lnTo>
+                  <a:lnTo>
+                    <a:pt x="3185590" y="422465"/>
+                  </a:lnTo>
+                  <a:lnTo>
+                    <a:pt x="3198975" y="438212"/>
+                  </a:lnTo>
+                  <a:lnTo>
+                    <a:pt x="3212359" y="453792"/>
+                  </a:lnTo>
+                  <a:lnTo>
+                    <a:pt x="3225744" y="469161"/>
+                  </a:lnTo>
+                  <a:lnTo>
+                    <a:pt x="3239129" y="484361"/>
+                  </a:lnTo>
+                  <a:lnTo>
+                    <a:pt x="3252514" y="499325"/>
+                  </a:lnTo>
+                  <a:lnTo>
+                    <a:pt x="3265899" y="513953"/>
+                  </a:lnTo>
+                  <a:lnTo>
+                    <a:pt x="3279284" y="528346"/>
+                  </a:lnTo>
+                  <a:lnTo>
+                    <a:pt x="3292668" y="542473"/>
+                  </a:lnTo>
+                  <a:lnTo>
+                    <a:pt x="3306053" y="556138"/>
+                  </a:lnTo>
+                  <a:lnTo>
+                    <a:pt x="3319438" y="569518"/>
+                  </a:lnTo>
+                  <a:lnTo>
+                    <a:pt x="3332823" y="582610"/>
+                  </a:lnTo>
+                  <a:lnTo>
+                    <a:pt x="3346208" y="595171"/>
+                  </a:lnTo>
+                  <a:lnTo>
+                    <a:pt x="3359593" y="607395"/>
+                  </a:lnTo>
+                  <a:lnTo>
+                    <a:pt x="3372977" y="619302"/>
+                  </a:lnTo>
+                  <a:lnTo>
+                    <a:pt x="3386362" y="630698"/>
+                  </a:lnTo>
+                  <a:lnTo>
+                    <a:pt x="3399747" y="641690"/>
+                  </a:lnTo>
+                  <a:lnTo>
+                    <a:pt x="3413132" y="652357"/>
+                  </a:lnTo>
+                  <a:lnTo>
+                    <a:pt x="3426517" y="662565"/>
+                  </a:lnTo>
+                  <a:lnTo>
+                    <a:pt x="3439902" y="672323"/>
+                  </a:lnTo>
+                  <a:lnTo>
+                    <a:pt x="3453286" y="681766"/>
+                  </a:lnTo>
+                  <a:lnTo>
+                    <a:pt x="3466671" y="690825"/>
+                  </a:lnTo>
+                  <a:lnTo>
+                    <a:pt x="3480056" y="699415"/>
+                  </a:lnTo>
+                  <a:lnTo>
+                    <a:pt x="3493441" y="707720"/>
+                  </a:lnTo>
+                  <a:lnTo>
+                    <a:pt x="3506826" y="715726"/>
+                  </a:lnTo>
+                  <a:lnTo>
+                    <a:pt x="3520211" y="723276"/>
+                  </a:lnTo>
+                  <a:lnTo>
+                    <a:pt x="3533595" y="730588"/>
+                  </a:lnTo>
+                  <a:lnTo>
+                    <a:pt x="3546980" y="737667"/>
+                  </a:lnTo>
+                  <a:lnTo>
+                    <a:pt x="3560365" y="744380"/>
+                  </a:lnTo>
+                  <a:lnTo>
+                    <a:pt x="3573750" y="750892"/>
+                  </a:lnTo>
+                  <a:lnTo>
+                    <a:pt x="3587135" y="757229"/>
+                  </a:lnTo>
+                  <a:lnTo>
+                    <a:pt x="3600520" y="763326"/>
+                  </a:lnTo>
+                  <a:lnTo>
+                    <a:pt x="3613904" y="769265"/>
+                  </a:lnTo>
+                  <a:lnTo>
+                    <a:pt x="3627289" y="775095"/>
+                  </a:lnTo>
+                  <a:lnTo>
+                    <a:pt x="3640674" y="780795"/>
+                  </a:lnTo>
+                  <a:lnTo>
+                    <a:pt x="3654059" y="786407"/>
+                  </a:lnTo>
+                  <a:lnTo>
+                    <a:pt x="3667444" y="791977"/>
+                  </a:lnTo>
+                  <a:lnTo>
+                    <a:pt x="3680829" y="797509"/>
+                  </a:lnTo>
+                  <a:lnTo>
+                    <a:pt x="3694213" y="803040"/>
+                  </a:lnTo>
+                  <a:lnTo>
+                    <a:pt x="3707598" y="808594"/>
+                  </a:lnTo>
+                  <a:lnTo>
+                    <a:pt x="3720983" y="814177"/>
+                  </a:lnTo>
+                  <a:lnTo>
+                    <a:pt x="3734368" y="819860"/>
+                  </a:lnTo>
+                  <a:lnTo>
+                    <a:pt x="3747753" y="825624"/>
+                  </a:lnTo>
+                  <a:lnTo>
+                    <a:pt x="3761138" y="831472"/>
+                  </a:lnTo>
+                  <a:lnTo>
+                    <a:pt x="3774522" y="837498"/>
+                  </a:lnTo>
+                  <a:lnTo>
+                    <a:pt x="3787907" y="843665"/>
+                  </a:lnTo>
+                  <a:lnTo>
+                    <a:pt x="3801292" y="849963"/>
+                  </a:lnTo>
+                  <a:lnTo>
+                    <a:pt x="3814677" y="856481"/>
+                  </a:lnTo>
+                  <a:lnTo>
+                    <a:pt x="3828062" y="863205"/>
+                  </a:lnTo>
+                  <a:lnTo>
+                    <a:pt x="3841447" y="870094"/>
+                  </a:lnTo>
+                  <a:lnTo>
+                    <a:pt x="3854831" y="877215"/>
+                  </a:lnTo>
+                  <a:lnTo>
+                    <a:pt x="3868216" y="884601"/>
+                  </a:lnTo>
+                  <a:lnTo>
+                    <a:pt x="3881601" y="892171"/>
+                  </a:lnTo>
+                  <a:lnTo>
+                    <a:pt x="3894986" y="899962"/>
+                  </a:lnTo>
+                  <a:lnTo>
+                    <a:pt x="3908371" y="908064"/>
+                  </a:lnTo>
+                  <a:lnTo>
+                    <a:pt x="3921756" y="916356"/>
+                  </a:lnTo>
+                  <a:lnTo>
+                    <a:pt x="3935140" y="924841"/>
+                  </a:lnTo>
+                  <a:lnTo>
+                    <a:pt x="3948525" y="933665"/>
+                  </a:lnTo>
+                  <a:lnTo>
+                    <a:pt x="3961910" y="942671"/>
+                  </a:lnTo>
+                  <a:lnTo>
+                    <a:pt x="3975295" y="951859"/>
+                  </a:lnTo>
+                  <a:lnTo>
+                    <a:pt x="3988680" y="961340"/>
+                  </a:lnTo>
+                  <a:lnTo>
+                    <a:pt x="4002065" y="971012"/>
+                  </a:lnTo>
+                  <a:lnTo>
+                    <a:pt x="4015449" y="980847"/>
+                  </a:lnTo>
+                  <a:lnTo>
+                    <a:pt x="4028834" y="990914"/>
+                  </a:lnTo>
+                  <a:lnTo>
+                    <a:pt x="4042219" y="1001168"/>
+                  </a:lnTo>
+                  <a:lnTo>
+                    <a:pt x="4055604" y="1011558"/>
+                  </a:lnTo>
+                  <a:lnTo>
+                    <a:pt x="4068989" y="1022118"/>
+                  </a:lnTo>
+                  <a:lnTo>
+                    <a:pt x="4082374" y="1032847"/>
+                  </a:lnTo>
+                  <a:lnTo>
+                    <a:pt x="4095758" y="1043680"/>
+                  </a:lnTo>
+                  <a:lnTo>
+                    <a:pt x="4109143" y="1054626"/>
+                  </a:lnTo>
+                  <a:lnTo>
+                    <a:pt x="4122528" y="1065709"/>
+                  </a:lnTo>
+                  <a:lnTo>
+                    <a:pt x="4135913" y="1076861"/>
+                  </a:lnTo>
+                  <a:lnTo>
+                    <a:pt x="4149298" y="1088079"/>
+                  </a:lnTo>
+                  <a:lnTo>
+                    <a:pt x="4162683" y="1099391"/>
+                  </a:lnTo>
+                  <a:lnTo>
+                    <a:pt x="4176067" y="1110739"/>
+                  </a:lnTo>
+                  <a:lnTo>
+                    <a:pt x="4189452" y="1122121"/>
+                  </a:lnTo>
+                  <a:lnTo>
+                    <a:pt x="4202837" y="1133539"/>
+                  </a:lnTo>
+                  <a:lnTo>
+                    <a:pt x="4216222" y="1144968"/>
+                  </a:lnTo>
+                  <a:lnTo>
+                    <a:pt x="4229607" y="1156401"/>
+                  </a:lnTo>
+                  <a:lnTo>
+                    <a:pt x="4242992" y="1167829"/>
+                  </a:lnTo>
+                  <a:lnTo>
+                    <a:pt x="4256376" y="1179239"/>
+                  </a:lnTo>
+                  <a:lnTo>
+                    <a:pt x="4269761" y="1190629"/>
+                  </a:lnTo>
+                  <a:lnTo>
+                    <a:pt x="4283146" y="1201988"/>
+                  </a:lnTo>
+                  <a:lnTo>
+                    <a:pt x="4296531" y="1213298"/>
+                  </a:lnTo>
+                  <a:lnTo>
+                    <a:pt x="4309916" y="1224572"/>
+                  </a:lnTo>
+                  <a:lnTo>
+                    <a:pt x="4323301" y="1235803"/>
+                  </a:lnTo>
+                  <a:lnTo>
+                    <a:pt x="4336685" y="1246958"/>
+                  </a:lnTo>
+                  <a:lnTo>
+                    <a:pt x="4350070" y="1258067"/>
+                  </a:lnTo>
+                  <a:lnTo>
+                    <a:pt x="4363455" y="1269128"/>
+                  </a:lnTo>
+                  <a:lnTo>
+                    <a:pt x="4376840" y="1280098"/>
+                  </a:lnTo>
+                  <a:lnTo>
+                    <a:pt x="4390225" y="1291015"/>
+                  </a:lnTo>
+                  <a:lnTo>
+                    <a:pt x="4403610" y="1301881"/>
+                  </a:lnTo>
+                  <a:lnTo>
+                    <a:pt x="4416994" y="1312664"/>
+                  </a:lnTo>
+                  <a:lnTo>
+                    <a:pt x="4430379" y="1323387"/>
+                  </a:lnTo>
+                  <a:lnTo>
+                    <a:pt x="4443764" y="1334060"/>
+                  </a:lnTo>
+                  <a:lnTo>
+                    <a:pt x="4457149" y="1344663"/>
+                  </a:lnTo>
+                  <a:lnTo>
+                    <a:pt x="4470534" y="1355205"/>
+                  </a:lnTo>
+                  <a:lnTo>
+                    <a:pt x="4483919" y="1365705"/>
+                  </a:lnTo>
+                  <a:lnTo>
+                    <a:pt x="4497303" y="1376152"/>
+                  </a:lnTo>
+                  <a:lnTo>
+                    <a:pt x="4510688" y="1386543"/>
+                  </a:lnTo>
+                  <a:lnTo>
+                    <a:pt x="4524073" y="1396900"/>
+                  </a:lnTo>
+                  <a:lnTo>
+                    <a:pt x="4537458" y="1407223"/>
+                  </a:lnTo>
+                  <a:lnTo>
+                    <a:pt x="4550843" y="1417501"/>
+                  </a:lnTo>
+                  <a:lnTo>
+                    <a:pt x="4564228" y="1427758"/>
+                  </a:lnTo>
+                  <a:lnTo>
+                    <a:pt x="4577612" y="1437994"/>
+                  </a:lnTo>
+                  <a:lnTo>
+                    <a:pt x="4590997" y="1448203"/>
+                  </a:lnTo>
+                  <a:lnTo>
+                    <a:pt x="4604382" y="1458402"/>
+                  </a:lnTo>
+                  <a:lnTo>
+                    <a:pt x="4617767" y="1468592"/>
+                  </a:lnTo>
+                  <a:lnTo>
+                    <a:pt x="4631152" y="1478775"/>
+                  </a:lnTo>
+                  <a:lnTo>
+                    <a:pt x="4644537" y="1488959"/>
+                  </a:lnTo>
+                  <a:lnTo>
+                    <a:pt x="4657921" y="1499145"/>
+                  </a:lnTo>
+                  <a:lnTo>
+                    <a:pt x="4671306" y="1509338"/>
+                  </a:lnTo>
+                  <a:lnTo>
+                    <a:pt x="4684691" y="1519543"/>
+                  </a:lnTo>
+                  <a:lnTo>
+                    <a:pt x="4698076" y="1529760"/>
+                  </a:lnTo>
+                  <a:lnTo>
+                    <a:pt x="4711461" y="1539994"/>
+                  </a:lnTo>
+                  <a:lnTo>
+                    <a:pt x="4724846" y="1550252"/>
+                  </a:lnTo>
+                  <a:lnTo>
+                    <a:pt x="4738230" y="1560527"/>
+                  </a:lnTo>
+                  <a:lnTo>
+                    <a:pt x="4751615" y="1570822"/>
+                  </a:lnTo>
+                  <a:lnTo>
+                    <a:pt x="4765000" y="1581152"/>
+                  </a:lnTo>
+                  <a:lnTo>
+                    <a:pt x="4778385" y="1591502"/>
+                  </a:lnTo>
+                  <a:lnTo>
+                    <a:pt x="4791770" y="1601874"/>
+                  </a:lnTo>
+                  <a:lnTo>
+                    <a:pt x="4805155" y="1612282"/>
+                  </a:lnTo>
+                  <a:lnTo>
+                    <a:pt x="4818539" y="1622712"/>
+                  </a:lnTo>
+                  <a:lnTo>
+                    <a:pt x="4831924" y="1633163"/>
+                  </a:lnTo>
+                  <a:lnTo>
+                    <a:pt x="4845309" y="1643645"/>
+                  </a:lnTo>
+                  <a:lnTo>
+                    <a:pt x="4858694" y="1654149"/>
+                  </a:lnTo>
+                  <a:lnTo>
+                    <a:pt x="4872079" y="1664670"/>
+                  </a:lnTo>
+                  <a:lnTo>
+                    <a:pt x="4885464" y="1675212"/>
+                  </a:lnTo>
+                  <a:lnTo>
+                    <a:pt x="4898848" y="1685771"/>
+                  </a:lnTo>
+                  <a:lnTo>
+                    <a:pt x="4912233" y="1696341"/>
+                  </a:lnTo>
+                  <a:lnTo>
+                    <a:pt x="4925618" y="1706921"/>
+                  </a:lnTo>
+                  <a:lnTo>
+                    <a:pt x="4939003" y="1717507"/>
+                  </a:lnTo>
+                  <a:lnTo>
+                    <a:pt x="4952388" y="1728094"/>
+                  </a:lnTo>
+                  <a:lnTo>
+                    <a:pt x="4965773" y="1738681"/>
+                  </a:lnTo>
+                  <a:lnTo>
+                    <a:pt x="4979157" y="1749257"/>
+                  </a:lnTo>
+                  <a:lnTo>
+                    <a:pt x="4992542" y="1759823"/>
+                  </a:lnTo>
+                  <a:lnTo>
+                    <a:pt x="5005927" y="1770377"/>
+                  </a:lnTo>
+                  <a:lnTo>
+                    <a:pt x="5019312" y="1780901"/>
+                  </a:lnTo>
+                  <a:lnTo>
+                    <a:pt x="5032697" y="1791400"/>
+                  </a:lnTo>
+                  <a:lnTo>
+                    <a:pt x="5046082" y="1801873"/>
+                  </a:lnTo>
+                  <a:lnTo>
+                    <a:pt x="5059466" y="1812301"/>
+                  </a:lnTo>
+                  <a:lnTo>
+                    <a:pt x="5072851" y="1822683"/>
+                  </a:lnTo>
+                  <a:lnTo>
+                    <a:pt x="5086236" y="1833026"/>
+                  </a:lnTo>
+                  <a:lnTo>
+                    <a:pt x="5099621" y="1843311"/>
+                  </a:lnTo>
+                  <a:lnTo>
+                    <a:pt x="5113006" y="1853525"/>
+                  </a:lnTo>
+                  <a:lnTo>
+                    <a:pt x="5126391" y="1863687"/>
+                  </a:lnTo>
+                  <a:lnTo>
+                    <a:pt x="5139775" y="1873782"/>
+                  </a:lnTo>
+                  <a:lnTo>
+                    <a:pt x="5153160" y="1883778"/>
+                  </a:lnTo>
+                  <a:lnTo>
+                    <a:pt x="5166545" y="1893708"/>
+                  </a:lnTo>
+                  <a:lnTo>
+                    <a:pt x="5179930" y="1903569"/>
+                  </a:lnTo>
+                  <a:lnTo>
+                    <a:pt x="5193315" y="1913299"/>
+                  </a:lnTo>
+                  <a:lnTo>
+                    <a:pt x="5206700" y="1922952"/>
+                  </a:lnTo>
+                  <a:lnTo>
+                    <a:pt x="5220084" y="1932526"/>
+                  </a:lnTo>
+                  <a:lnTo>
+                    <a:pt x="5233469" y="1941961"/>
+                  </a:lnTo>
+                  <a:lnTo>
+                    <a:pt x="5246854" y="1951296"/>
+                  </a:lnTo>
+                  <a:lnTo>
+                    <a:pt x="5260239" y="1960543"/>
+                  </a:lnTo>
+                  <a:lnTo>
+                    <a:pt x="5273624" y="1969652"/>
+                  </a:lnTo>
+                  <a:lnTo>
+                    <a:pt x="5287009" y="1978637"/>
+                  </a:lnTo>
+                  <a:lnTo>
+                    <a:pt x="5300393" y="1987526"/>
+                  </a:lnTo>
+                  <a:lnTo>
+                    <a:pt x="5313778" y="1996285"/>
+                  </a:lnTo>
+                  <a:lnTo>
+                    <a:pt x="5327163" y="2004895"/>
+                  </a:lnTo>
+                  <a:lnTo>
+                    <a:pt x="5340548" y="2013406"/>
+                  </a:lnTo>
+                  <a:lnTo>
+                    <a:pt x="5353933" y="2021797"/>
+                  </a:lnTo>
+                  <a:lnTo>
+                    <a:pt x="5367318" y="2030019"/>
+                  </a:lnTo>
+                  <a:lnTo>
+                    <a:pt x="5380702" y="2038138"/>
+                  </a:lnTo>
+                  <a:lnTo>
+                    <a:pt x="5394087" y="2046154"/>
+                  </a:lnTo>
+                  <a:lnTo>
+                    <a:pt x="5407472" y="2053981"/>
+                  </a:lnTo>
+                  <a:lnTo>
+                    <a:pt x="5420857" y="2061706"/>
+                  </a:lnTo>
+                  <a:lnTo>
+                    <a:pt x="5434242" y="2069328"/>
+                  </a:lnTo>
+                  <a:lnTo>
+                    <a:pt x="5447627" y="2076782"/>
+                  </a:lnTo>
+                  <a:lnTo>
+                    <a:pt x="5461011" y="2084118"/>
+                  </a:lnTo>
+                  <a:lnTo>
+                    <a:pt x="5474396" y="2091355"/>
+                  </a:lnTo>
+                  <a:lnTo>
+                    <a:pt x="5487781" y="2098445"/>
+                  </a:lnTo>
+                  <a:lnTo>
+                    <a:pt x="5501166" y="2105405"/>
+                  </a:lnTo>
+                  <a:lnTo>
+                    <a:pt x="5514551" y="2112270"/>
+                  </a:lnTo>
+                  <a:lnTo>
+                    <a:pt x="5527936" y="2119012"/>
+                  </a:lnTo>
+                  <a:lnTo>
+                    <a:pt x="5541320" y="2125615"/>
+                  </a:lnTo>
+                  <a:lnTo>
+                    <a:pt x="5554705" y="2132128"/>
+                  </a:lnTo>
+                  <a:lnTo>
+                    <a:pt x="5568090" y="2138540"/>
+                  </a:lnTo>
+                  <a:lnTo>
+                    <a:pt x="5581475" y="2144807"/>
+                  </a:lnTo>
+                  <a:lnTo>
+                    <a:pt x="5594860" y="2150991"/>
+                  </a:lnTo>
+                  <a:lnTo>
+                    <a:pt x="5608245" y="2157093"/>
+                  </a:lnTo>
+                  <a:lnTo>
+                    <a:pt x="5621629" y="2163049"/>
+                  </a:lnTo>
+                  <a:lnTo>
+                    <a:pt x="5635014" y="2168927"/>
+                  </a:lnTo>
+                  <a:lnTo>
+                    <a:pt x="5648399" y="2174729"/>
+                  </a:lnTo>
+                  <a:lnTo>
+                    <a:pt x="5661784" y="2180408"/>
+                  </a:lnTo>
+                  <a:lnTo>
+                    <a:pt x="5675169" y="2186002"/>
+                  </a:lnTo>
+                  <a:lnTo>
+                    <a:pt x="5688554" y="2191524"/>
+                  </a:lnTo>
+                  <a:lnTo>
+                    <a:pt x="5701938" y="2196945"/>
+                  </a:lnTo>
+                  <a:lnTo>
+                    <a:pt x="5715323" y="2202273"/>
+                  </a:lnTo>
+                  <a:lnTo>
+                    <a:pt x="5728708" y="2207535"/>
+                  </a:lnTo>
+                  <a:lnTo>
+                    <a:pt x="5742093" y="2212711"/>
+                  </a:lnTo>
+                  <a:lnTo>
+                    <a:pt x="5755478" y="2217789"/>
+                  </a:lnTo>
+                  <a:lnTo>
+                    <a:pt x="5768863" y="2222803"/>
+                  </a:lnTo>
+                  <a:lnTo>
+                    <a:pt x="5782247" y="2227745"/>
+                  </a:lnTo>
+                  <a:lnTo>
+                    <a:pt x="5795632" y="2232581"/>
+                  </a:lnTo>
+                  <a:lnTo>
+                    <a:pt x="5809017" y="2237354"/>
+                  </a:lnTo>
+                  <a:lnTo>
+                    <a:pt x="5822402" y="2242065"/>
+                  </a:lnTo>
+                  <a:lnTo>
+                    <a:pt x="5835787" y="2246665"/>
+                  </a:lnTo>
+                  <a:lnTo>
+                    <a:pt x="5849172" y="2251199"/>
+                  </a:lnTo>
+                  <a:lnTo>
+                    <a:pt x="5862556" y="2255671"/>
+                  </a:lnTo>
+                  <a:lnTo>
+                    <a:pt x="5875941" y="2260041"/>
+                  </a:lnTo>
+                  <a:lnTo>
+                    <a:pt x="5889326" y="2264332"/>
+                  </a:lnTo>
+                  <a:lnTo>
+                    <a:pt x="5902711" y="2268559"/>
+                  </a:lnTo>
+                  <a:lnTo>
+                    <a:pt x="5916096" y="2272693"/>
+                  </a:lnTo>
+                  <a:lnTo>
+                    <a:pt x="5929481" y="2276733"/>
+                  </a:lnTo>
+                  <a:lnTo>
+                    <a:pt x="5942865" y="2280706"/>
+                  </a:lnTo>
+                  <a:lnTo>
+                    <a:pt x="5956250" y="2284593"/>
+                  </a:lnTo>
+                  <a:lnTo>
+                    <a:pt x="5969635" y="2288371"/>
+                  </a:lnTo>
+                  <a:lnTo>
+                    <a:pt x="5983020" y="2292078"/>
+                  </a:lnTo>
+                  <a:lnTo>
+                    <a:pt x="5996405" y="2295706"/>
+                  </a:lnTo>
+                  <a:lnTo>
+                    <a:pt x="6009790" y="2299207"/>
+                  </a:lnTo>
+                  <a:lnTo>
+                    <a:pt x="6023174" y="2302634"/>
+                  </a:lnTo>
+                  <a:lnTo>
+                    <a:pt x="6036559" y="2305985"/>
+                  </a:lnTo>
+                  <a:lnTo>
+                    <a:pt x="6049944" y="2309203"/>
+                  </a:lnTo>
+                  <a:lnTo>
+                    <a:pt x="6063329" y="2312336"/>
+                  </a:lnTo>
+                  <a:lnTo>
+                    <a:pt x="6076714" y="2315391"/>
+                  </a:lnTo>
+                  <a:lnTo>
+                    <a:pt x="6090099" y="2318321"/>
+                  </a:lnTo>
+                  <a:lnTo>
+                    <a:pt x="6103483" y="2321151"/>
+                  </a:lnTo>
+                  <a:lnTo>
+                    <a:pt x="6116868" y="2323900"/>
+                  </a:lnTo>
+                  <a:lnTo>
+                    <a:pt x="6130253" y="2326535"/>
+                  </a:lnTo>
+                  <a:lnTo>
+                    <a:pt x="6143638" y="2329054"/>
+                  </a:lnTo>
+                  <a:lnTo>
+                    <a:pt x="6157023" y="2331492"/>
+                  </a:lnTo>
+                  <a:lnTo>
+                    <a:pt x="6170408" y="2333829"/>
+                  </a:lnTo>
+                  <a:lnTo>
+                    <a:pt x="6183792" y="2336036"/>
+                  </a:lnTo>
+                  <a:lnTo>
+                    <a:pt x="6197177" y="2338164"/>
+                  </a:lnTo>
+                  <a:lnTo>
+                    <a:pt x="6210562" y="2340205"/>
+                  </a:lnTo>
+                  <a:lnTo>
+                    <a:pt x="6223947" y="2342107"/>
+                  </a:lnTo>
+                  <a:lnTo>
+                    <a:pt x="6237332" y="2343931"/>
+                  </a:lnTo>
+                  <a:lnTo>
+                    <a:pt x="6250717" y="2345678"/>
+                  </a:lnTo>
+                  <a:lnTo>
+                    <a:pt x="6264101" y="2347295"/>
+                  </a:lnTo>
+                  <a:lnTo>
+                    <a:pt x="6277486" y="2348831"/>
+                  </a:lnTo>
+                  <a:lnTo>
+                    <a:pt x="6290871" y="2350296"/>
+                  </a:lnTo>
+                  <a:lnTo>
+                    <a:pt x="6304256" y="2351651"/>
+                  </a:lnTo>
+                  <a:lnTo>
+                    <a:pt x="6317641" y="2352922"/>
+                  </a:lnTo>
+                  <a:lnTo>
+                    <a:pt x="6331026" y="2354128"/>
+                  </a:lnTo>
+                  <a:lnTo>
+                    <a:pt x="6344410" y="2355248"/>
+                  </a:lnTo>
+                  <a:lnTo>
+                    <a:pt x="6357795" y="2356283"/>
+                  </a:lnTo>
+                  <a:lnTo>
+                    <a:pt x="6371180" y="2357262"/>
+                  </a:lnTo>
+                  <a:lnTo>
+                    <a:pt x="6384565" y="2358176"/>
+                  </a:lnTo>
+                  <a:lnTo>
+                    <a:pt x="6397950" y="2359011"/>
+                  </a:lnTo>
+                  <a:lnTo>
+                    <a:pt x="6411335" y="2359800"/>
+                  </a:lnTo>
+                  <a:lnTo>
+                    <a:pt x="6424719" y="2360544"/>
+                  </a:lnTo>
+                  <a:lnTo>
+                    <a:pt x="6438104" y="2361219"/>
+                  </a:lnTo>
+                  <a:lnTo>
+                    <a:pt x="6451489" y="2361861"/>
+                  </a:lnTo>
+                  <a:lnTo>
+                    <a:pt x="6464874" y="2362471"/>
+                  </a:lnTo>
+                  <a:lnTo>
+                    <a:pt x="6478259" y="2363034"/>
+                  </a:lnTo>
+                  <a:lnTo>
+                    <a:pt x="6491644" y="2363572"/>
+                  </a:lnTo>
+                  <a:lnTo>
+                    <a:pt x="6505028" y="2364091"/>
+                  </a:lnTo>
+                  <a:lnTo>
+                    <a:pt x="6518413" y="2364584"/>
+                  </a:lnTo>
+                  <a:lnTo>
+                    <a:pt x="6531798" y="2365065"/>
+                  </a:lnTo>
+                  <a:lnTo>
+                    <a:pt x="6545183" y="2365537"/>
+                  </a:lnTo>
+                  <a:lnTo>
+                    <a:pt x="6558568" y="2366003"/>
+                  </a:lnTo>
+                  <a:lnTo>
+                    <a:pt x="6571953" y="2366470"/>
+                  </a:lnTo>
+                  <a:lnTo>
+                    <a:pt x="6585337" y="2366941"/>
+                  </a:lnTo>
+                  <a:lnTo>
+                    <a:pt x="6598722" y="2367418"/>
+                  </a:lnTo>
+                  <a:lnTo>
+                    <a:pt x="6612107" y="2367913"/>
+                  </a:lnTo>
+                  <a:lnTo>
+                    <a:pt x="6625492" y="2368421"/>
+                  </a:lnTo>
+                  <a:lnTo>
+                    <a:pt x="6638877" y="2368945"/>
+                  </a:lnTo>
+                  <a:lnTo>
+                    <a:pt x="6652262" y="2369505"/>
+                  </a:lnTo>
+                  <a:lnTo>
+                    <a:pt x="6665646" y="2370087"/>
+                  </a:lnTo>
+                  <a:lnTo>
+                    <a:pt x="6679031" y="2370693"/>
+                  </a:lnTo>
+                  <a:lnTo>
+                    <a:pt x="6692416" y="2371343"/>
+                  </a:lnTo>
+                  <a:lnTo>
+                    <a:pt x="6705801" y="2372028"/>
+                  </a:lnTo>
+                  <a:lnTo>
+                    <a:pt x="6719186" y="2372742"/>
+                  </a:lnTo>
+                  <a:lnTo>
+                    <a:pt x="6732571" y="2373505"/>
+                  </a:lnTo>
+                  <a:lnTo>
+                    <a:pt x="6745955" y="2374313"/>
+                  </a:lnTo>
+                  <a:lnTo>
+                    <a:pt x="6759340" y="2375156"/>
+                  </a:lnTo>
+                  <a:lnTo>
+                    <a:pt x="6772725" y="2376045"/>
+                  </a:lnTo>
+                  <a:lnTo>
+                    <a:pt x="6786110" y="2376990"/>
+                  </a:lnTo>
+                  <a:lnTo>
+                    <a:pt x="6799495" y="2377971"/>
+                  </a:lnTo>
+                  <a:lnTo>
+                    <a:pt x="6812880" y="2378995"/>
+                  </a:lnTo>
+                  <a:lnTo>
+                    <a:pt x="6826264" y="2380081"/>
+                  </a:lnTo>
+                  <a:lnTo>
+                    <a:pt x="6839649" y="2381203"/>
+                  </a:lnTo>
+                  <a:lnTo>
+                    <a:pt x="6839649" y="2462022"/>
+                  </a:lnTo>
+                  <a:lnTo>
+                    <a:pt x="6826264" y="2462022"/>
+                  </a:lnTo>
+                  <a:lnTo>
+                    <a:pt x="6812880" y="2462022"/>
+                  </a:lnTo>
+                  <a:lnTo>
+                    <a:pt x="6799495" y="2462022"/>
+                  </a:lnTo>
+                  <a:lnTo>
+                    <a:pt x="6786110" y="2462022"/>
+                  </a:lnTo>
+                  <a:lnTo>
+                    <a:pt x="6772725" y="2462022"/>
+                  </a:lnTo>
+                  <a:lnTo>
+                    <a:pt x="6759340" y="2462022"/>
+                  </a:lnTo>
+                  <a:lnTo>
+                    <a:pt x="6745955" y="2462022"/>
+                  </a:lnTo>
+                  <a:lnTo>
+                    <a:pt x="6732571" y="2462022"/>
+                  </a:lnTo>
+                  <a:lnTo>
+                    <a:pt x="6719186" y="2462022"/>
+                  </a:lnTo>
+                  <a:lnTo>
+                    <a:pt x="6705801" y="2462022"/>
+                  </a:lnTo>
+                  <a:lnTo>
+                    <a:pt x="6692416" y="2462022"/>
+                  </a:lnTo>
+                  <a:lnTo>
+                    <a:pt x="6679031" y="2462022"/>
+                  </a:lnTo>
+                  <a:lnTo>
+                    <a:pt x="6665646" y="2462022"/>
+                  </a:lnTo>
+                  <a:lnTo>
+                    <a:pt x="6652262" y="2462022"/>
+                  </a:lnTo>
+                  <a:lnTo>
+                    <a:pt x="6638877" y="2462022"/>
+                  </a:lnTo>
+                  <a:lnTo>
+                    <a:pt x="6625492" y="2462022"/>
+                  </a:lnTo>
+                  <a:lnTo>
+                    <a:pt x="6612107" y="2462022"/>
+                  </a:lnTo>
+                  <a:lnTo>
+                    <a:pt x="6598722" y="2462022"/>
+                  </a:lnTo>
+                  <a:lnTo>
+                    <a:pt x="6585337" y="2462022"/>
+                  </a:lnTo>
+                  <a:lnTo>
+                    <a:pt x="6571953" y="2462022"/>
+                  </a:lnTo>
+                  <a:lnTo>
+                    <a:pt x="6558568" y="2462022"/>
+                  </a:lnTo>
+                  <a:lnTo>
+                    <a:pt x="6545183" y="2462022"/>
+                  </a:lnTo>
+                  <a:lnTo>
+                    <a:pt x="6531798" y="2462022"/>
+                  </a:lnTo>
+                  <a:lnTo>
+                    <a:pt x="6518413" y="2462022"/>
+                  </a:lnTo>
+                  <a:lnTo>
+                    <a:pt x="6505028" y="2462022"/>
+                  </a:lnTo>
+                  <a:lnTo>
+                    <a:pt x="6491644" y="2462022"/>
+                  </a:lnTo>
+                  <a:lnTo>
+                    <a:pt x="6478259" y="2462022"/>
+                  </a:lnTo>
+                  <a:lnTo>
+                    <a:pt x="6464874" y="2462022"/>
+                  </a:lnTo>
+                  <a:lnTo>
+                    <a:pt x="6451489" y="2462022"/>
+                  </a:lnTo>
+                  <a:lnTo>
+                    <a:pt x="6438104" y="2462022"/>
+                  </a:lnTo>
+                  <a:lnTo>
+                    <a:pt x="6424719" y="2462022"/>
+                  </a:lnTo>
+                  <a:lnTo>
+                    <a:pt x="6411335" y="2462022"/>
+                  </a:lnTo>
+                  <a:lnTo>
+                    <a:pt x="6397950" y="2462022"/>
+                  </a:lnTo>
+                  <a:lnTo>
+                    <a:pt x="6384565" y="2462022"/>
+                  </a:lnTo>
+                  <a:lnTo>
+                    <a:pt x="6371180" y="2462022"/>
+                  </a:lnTo>
+                  <a:lnTo>
+                    <a:pt x="6357795" y="2462022"/>
+                  </a:lnTo>
+                  <a:lnTo>
+                    <a:pt x="6344410" y="2462022"/>
+                  </a:lnTo>
+                  <a:lnTo>
+                    <a:pt x="6331026" y="2462022"/>
+                  </a:lnTo>
+                  <a:lnTo>
+                    <a:pt x="6317641" y="2462022"/>
+                  </a:lnTo>
+                  <a:lnTo>
+                    <a:pt x="6304256" y="2462022"/>
+                  </a:lnTo>
+                  <a:lnTo>
+                    <a:pt x="6290871" y="2462022"/>
+                  </a:lnTo>
+                  <a:lnTo>
+                    <a:pt x="6277486" y="2462022"/>
+                  </a:lnTo>
+                  <a:lnTo>
+                    <a:pt x="6264101" y="2462022"/>
+                  </a:lnTo>
+                  <a:lnTo>
+                    <a:pt x="6250717" y="2462022"/>
+                  </a:lnTo>
+                  <a:lnTo>
+                    <a:pt x="6237332" y="2462022"/>
+                  </a:lnTo>
+                  <a:lnTo>
+                    <a:pt x="6223947" y="2462022"/>
+                  </a:lnTo>
+                  <a:lnTo>
+                    <a:pt x="6210562" y="2462022"/>
+                  </a:lnTo>
+                  <a:lnTo>
+                    <a:pt x="6197177" y="2462022"/>
+                  </a:lnTo>
+                  <a:lnTo>
+                    <a:pt x="6183792" y="2462022"/>
+                  </a:lnTo>
+                  <a:lnTo>
+                    <a:pt x="6170408" y="2462022"/>
+                  </a:lnTo>
+                  <a:lnTo>
+                    <a:pt x="6157023" y="2462022"/>
+                  </a:lnTo>
+                  <a:lnTo>
+                    <a:pt x="6143638" y="2462022"/>
+                  </a:lnTo>
+                  <a:lnTo>
+                    <a:pt x="6130253" y="2462022"/>
+                  </a:lnTo>
+                  <a:lnTo>
+                    <a:pt x="6116868" y="2462022"/>
+                  </a:lnTo>
+                  <a:lnTo>
+                    <a:pt x="6103483" y="2462022"/>
+                  </a:lnTo>
+                  <a:lnTo>
+                    <a:pt x="6090099" y="2462022"/>
+                  </a:lnTo>
+                  <a:lnTo>
+                    <a:pt x="6076714" y="2462022"/>
+                  </a:lnTo>
+                  <a:lnTo>
+                    <a:pt x="6063329" y="2462022"/>
+                  </a:lnTo>
+                  <a:lnTo>
+                    <a:pt x="6049944" y="2462022"/>
+                  </a:lnTo>
+                  <a:lnTo>
+                    <a:pt x="6036559" y="2462022"/>
+                  </a:lnTo>
+                  <a:lnTo>
+                    <a:pt x="6023174" y="2462022"/>
+                  </a:lnTo>
+                  <a:lnTo>
+                    <a:pt x="6009790" y="2462022"/>
+                  </a:lnTo>
+                  <a:lnTo>
+                    <a:pt x="5996405" y="2462022"/>
+                  </a:lnTo>
+                  <a:lnTo>
+                    <a:pt x="5983020" y="2462022"/>
+                  </a:lnTo>
+                  <a:lnTo>
+                    <a:pt x="5969635" y="2462022"/>
+                  </a:lnTo>
+                  <a:lnTo>
+                    <a:pt x="5956250" y="2462022"/>
+                  </a:lnTo>
+                  <a:lnTo>
+                    <a:pt x="5942865" y="2462022"/>
+                  </a:lnTo>
+                  <a:lnTo>
+                    <a:pt x="5929481" y="2462022"/>
+                  </a:lnTo>
+                  <a:lnTo>
+                    <a:pt x="5916096" y="2462022"/>
+                  </a:lnTo>
+                  <a:lnTo>
+                    <a:pt x="5902711" y="2462022"/>
+                  </a:lnTo>
+                  <a:lnTo>
+                    <a:pt x="5889326" y="2462022"/>
+                  </a:lnTo>
+                  <a:lnTo>
+                    <a:pt x="5875941" y="2462022"/>
+                  </a:lnTo>
+                  <a:lnTo>
+                    <a:pt x="5862556" y="2462022"/>
+                  </a:lnTo>
+                  <a:lnTo>
+                    <a:pt x="5849172" y="2462022"/>
+                  </a:lnTo>
+                  <a:lnTo>
+                    <a:pt x="5835787" y="2462022"/>
+                  </a:lnTo>
+                  <a:lnTo>
+                    <a:pt x="5822402" y="2462022"/>
+                  </a:lnTo>
+                  <a:lnTo>
+                    <a:pt x="5809017" y="2462022"/>
+                  </a:lnTo>
+                  <a:lnTo>
+                    <a:pt x="5795632" y="2462022"/>
+                  </a:lnTo>
+                  <a:lnTo>
+                    <a:pt x="5782247" y="2462022"/>
+                  </a:lnTo>
+                  <a:lnTo>
+                    <a:pt x="5768863" y="2462022"/>
+                  </a:lnTo>
+                  <a:lnTo>
+                    <a:pt x="5755478" y="2462022"/>
+                  </a:lnTo>
+                  <a:lnTo>
+                    <a:pt x="5742093" y="2462022"/>
+                  </a:lnTo>
+                  <a:lnTo>
+                    <a:pt x="5728708" y="2462022"/>
+                  </a:lnTo>
+                  <a:lnTo>
+                    <a:pt x="5715323" y="2462022"/>
+                  </a:lnTo>
+                  <a:lnTo>
+                    <a:pt x="5701938" y="2462022"/>
+                  </a:lnTo>
+                  <a:lnTo>
+                    <a:pt x="5688554" y="2462022"/>
+                  </a:lnTo>
+                  <a:lnTo>
+                    <a:pt x="5675169" y="2462022"/>
+                  </a:lnTo>
+                  <a:lnTo>
+                    <a:pt x="5661784" y="2462022"/>
+                  </a:lnTo>
+                  <a:lnTo>
+                    <a:pt x="5648399" y="2462022"/>
+                  </a:lnTo>
+                  <a:lnTo>
+                    <a:pt x="5635014" y="2462022"/>
+                  </a:lnTo>
+                  <a:lnTo>
+                    <a:pt x="5621629" y="2462022"/>
+                  </a:lnTo>
+                  <a:lnTo>
+                    <a:pt x="5608245" y="2462022"/>
+                  </a:lnTo>
+                  <a:lnTo>
+                    <a:pt x="5594860" y="2462022"/>
+                  </a:lnTo>
+                  <a:lnTo>
+                    <a:pt x="5581475" y="2462022"/>
+                  </a:lnTo>
+                  <a:lnTo>
+                    <a:pt x="5568090" y="2462022"/>
+                  </a:lnTo>
+                  <a:lnTo>
+                    <a:pt x="5554705" y="2462022"/>
+                  </a:lnTo>
+                  <a:lnTo>
+                    <a:pt x="5541320" y="2462022"/>
+                  </a:lnTo>
+                  <a:lnTo>
+                    <a:pt x="5527936" y="2462022"/>
+                  </a:lnTo>
+                  <a:lnTo>
+                    <a:pt x="5514551" y="2462022"/>
+                  </a:lnTo>
+                  <a:lnTo>
+                    <a:pt x="5501166" y="2462022"/>
+                  </a:lnTo>
+                  <a:lnTo>
+                    <a:pt x="5487781" y="2462022"/>
+                  </a:lnTo>
+                  <a:lnTo>
+                    <a:pt x="5474396" y="2462022"/>
+                  </a:lnTo>
+                  <a:lnTo>
+                    <a:pt x="5461011" y="2462022"/>
+                  </a:lnTo>
+                  <a:lnTo>
+                    <a:pt x="5447627" y="2462022"/>
+                  </a:lnTo>
+                  <a:lnTo>
+                    <a:pt x="5434242" y="2462022"/>
+                  </a:lnTo>
+                  <a:lnTo>
+                    <a:pt x="5420857" y="2462022"/>
+                  </a:lnTo>
+                  <a:lnTo>
+                    <a:pt x="5407472" y="2462022"/>
+                  </a:lnTo>
+                  <a:lnTo>
+                    <a:pt x="5394087" y="2462022"/>
+                  </a:lnTo>
+                  <a:lnTo>
+                    <a:pt x="5380702" y="2462022"/>
+                  </a:lnTo>
+                  <a:lnTo>
+                    <a:pt x="5367318" y="2462022"/>
+                  </a:lnTo>
+                  <a:lnTo>
+                    <a:pt x="5353933" y="2462022"/>
+                  </a:lnTo>
+                  <a:lnTo>
+                    <a:pt x="5340548" y="2462022"/>
+                  </a:lnTo>
+                  <a:lnTo>
+                    <a:pt x="5327163" y="2462022"/>
+                  </a:lnTo>
+                  <a:lnTo>
+                    <a:pt x="5313778" y="2462022"/>
+                  </a:lnTo>
+                  <a:lnTo>
+                    <a:pt x="5300393" y="2462022"/>
+                  </a:lnTo>
+                  <a:lnTo>
+                    <a:pt x="5287009" y="2462022"/>
+                  </a:lnTo>
+                  <a:lnTo>
+                    <a:pt x="5273624" y="2462022"/>
+                  </a:lnTo>
+                  <a:lnTo>
+                    <a:pt x="5260239" y="2462022"/>
+                  </a:lnTo>
+                  <a:lnTo>
+                    <a:pt x="5246854" y="2462022"/>
+                  </a:lnTo>
+                  <a:lnTo>
+                    <a:pt x="5233469" y="2462022"/>
+                  </a:lnTo>
+                  <a:lnTo>
+                    <a:pt x="5220084" y="2462022"/>
+                  </a:lnTo>
+                  <a:lnTo>
+                    <a:pt x="5206700" y="2462022"/>
+                  </a:lnTo>
+                  <a:lnTo>
+                    <a:pt x="5193315" y="2462022"/>
+                  </a:lnTo>
+                  <a:lnTo>
+                    <a:pt x="5179930" y="2462022"/>
+                  </a:lnTo>
+                  <a:lnTo>
+                    <a:pt x="5166545" y="2462022"/>
+                  </a:lnTo>
+                  <a:lnTo>
+                    <a:pt x="5153160" y="2462022"/>
+                  </a:lnTo>
+                  <a:lnTo>
+                    <a:pt x="5139775" y="2462022"/>
+                  </a:lnTo>
+                  <a:lnTo>
+                    <a:pt x="5126391" y="2462022"/>
+                  </a:lnTo>
+                  <a:lnTo>
+                    <a:pt x="5113006" y="2462022"/>
+                  </a:lnTo>
+                  <a:lnTo>
+                    <a:pt x="5099621" y="2462022"/>
+                  </a:lnTo>
+                  <a:lnTo>
+                    <a:pt x="5086236" y="2462022"/>
+                  </a:lnTo>
+                  <a:lnTo>
+                    <a:pt x="5072851" y="2462022"/>
+                  </a:lnTo>
+                  <a:lnTo>
+                    <a:pt x="5059466" y="2462022"/>
+                  </a:lnTo>
+                  <a:lnTo>
+                    <a:pt x="5046082" y="2462022"/>
+                  </a:lnTo>
+                  <a:lnTo>
+                    <a:pt x="5032697" y="2462022"/>
+                  </a:lnTo>
+                  <a:lnTo>
+                    <a:pt x="5019312" y="2462022"/>
+                  </a:lnTo>
+                  <a:lnTo>
+                    <a:pt x="5005927" y="2462022"/>
+                  </a:lnTo>
+                  <a:lnTo>
+                    <a:pt x="4992542" y="2462022"/>
+                  </a:lnTo>
+                  <a:lnTo>
+                    <a:pt x="4979157" y="2462022"/>
+                  </a:lnTo>
+                  <a:lnTo>
+                    <a:pt x="4965773" y="2462022"/>
+                  </a:lnTo>
+                  <a:lnTo>
+                    <a:pt x="4952388" y="2462022"/>
+                  </a:lnTo>
+                  <a:lnTo>
+                    <a:pt x="4939003" y="2462022"/>
+                  </a:lnTo>
+                  <a:lnTo>
+                    <a:pt x="4925618" y="2462022"/>
+                  </a:lnTo>
+                  <a:lnTo>
+                    <a:pt x="4912233" y="2462022"/>
+                  </a:lnTo>
+                  <a:lnTo>
+                    <a:pt x="4898848" y="2462022"/>
+                  </a:lnTo>
+                  <a:lnTo>
+                    <a:pt x="4885464" y="2462022"/>
+                  </a:lnTo>
+                  <a:lnTo>
+                    <a:pt x="4872079" y="2462022"/>
+                  </a:lnTo>
+                  <a:lnTo>
+                    <a:pt x="4858694" y="2462022"/>
+                  </a:lnTo>
+                  <a:lnTo>
+                    <a:pt x="4845309" y="2462022"/>
+                  </a:lnTo>
+                  <a:lnTo>
+                    <a:pt x="4831924" y="2462022"/>
+                  </a:lnTo>
+                  <a:lnTo>
+                    <a:pt x="4818539" y="2462022"/>
+                  </a:lnTo>
+                  <a:lnTo>
+                    <a:pt x="4805155" y="2462022"/>
+                  </a:lnTo>
+                  <a:lnTo>
+                    <a:pt x="4791770" y="2462022"/>
+                  </a:lnTo>
+                  <a:lnTo>
+                    <a:pt x="4778385" y="2462022"/>
+                  </a:lnTo>
+                  <a:lnTo>
+                    <a:pt x="4765000" y="2462022"/>
+                  </a:lnTo>
+                  <a:lnTo>
+                    <a:pt x="4751615" y="2462022"/>
+                  </a:lnTo>
+                  <a:lnTo>
+                    <a:pt x="4738230" y="2462022"/>
+                  </a:lnTo>
+                  <a:lnTo>
+                    <a:pt x="4724846" y="2462022"/>
+                  </a:lnTo>
+                  <a:lnTo>
+                    <a:pt x="4711461" y="2462022"/>
+                  </a:lnTo>
+                  <a:lnTo>
+                    <a:pt x="4698076" y="2462022"/>
+                  </a:lnTo>
+                  <a:lnTo>
+                    <a:pt x="4684691" y="2462022"/>
+                  </a:lnTo>
+                  <a:lnTo>
+                    <a:pt x="4671306" y="2462022"/>
+                  </a:lnTo>
+                  <a:lnTo>
+                    <a:pt x="4657921" y="2462022"/>
+                  </a:lnTo>
+                  <a:lnTo>
+                    <a:pt x="4644537" y="2462022"/>
+                  </a:lnTo>
+                  <a:lnTo>
+                    <a:pt x="4631152" y="2462022"/>
+                  </a:lnTo>
+                  <a:lnTo>
+                    <a:pt x="4617767" y="2462022"/>
+                  </a:lnTo>
+                  <a:lnTo>
+                    <a:pt x="4604382" y="2462022"/>
+                  </a:lnTo>
+                  <a:lnTo>
+                    <a:pt x="4590997" y="2462022"/>
+                  </a:lnTo>
+                  <a:lnTo>
+                    <a:pt x="4577612" y="2462022"/>
+                  </a:lnTo>
+                  <a:lnTo>
+                    <a:pt x="4564228" y="2462022"/>
+                  </a:lnTo>
+                  <a:lnTo>
+                    <a:pt x="4550843" y="2462022"/>
+                  </a:lnTo>
+                  <a:lnTo>
+                    <a:pt x="4537458" y="2462022"/>
+                  </a:lnTo>
+                  <a:lnTo>
+                    <a:pt x="4524073" y="2462022"/>
+                  </a:lnTo>
+                  <a:lnTo>
+                    <a:pt x="4510688" y="2462022"/>
+                  </a:lnTo>
+                  <a:lnTo>
+                    <a:pt x="4497303" y="2462022"/>
+                  </a:lnTo>
+                  <a:lnTo>
+                    <a:pt x="4483919" y="2462022"/>
+                  </a:lnTo>
+                  <a:lnTo>
+                    <a:pt x="4470534" y="2462022"/>
+                  </a:lnTo>
+                  <a:lnTo>
+                    <a:pt x="4457149" y="2462022"/>
+                  </a:lnTo>
+                  <a:lnTo>
+                    <a:pt x="4443764" y="2462022"/>
+                  </a:lnTo>
+                  <a:lnTo>
+                    <a:pt x="4430379" y="2462022"/>
+                  </a:lnTo>
+                  <a:lnTo>
+                    <a:pt x="4416994" y="2462022"/>
+                  </a:lnTo>
+                  <a:lnTo>
+                    <a:pt x="4403610" y="2462022"/>
+                  </a:lnTo>
+                  <a:lnTo>
+                    <a:pt x="4390225" y="2462022"/>
+                  </a:lnTo>
+                  <a:lnTo>
+                    <a:pt x="4376840" y="2462022"/>
+                  </a:lnTo>
+                  <a:lnTo>
+                    <a:pt x="4363455" y="2462022"/>
+                  </a:lnTo>
+                  <a:lnTo>
+                    <a:pt x="4350070" y="2462022"/>
+                  </a:lnTo>
+                  <a:lnTo>
+                    <a:pt x="4336685" y="2462022"/>
+                  </a:lnTo>
+                  <a:lnTo>
+                    <a:pt x="4323301" y="2462022"/>
+                  </a:lnTo>
+                  <a:lnTo>
+                    <a:pt x="4309916" y="2462022"/>
+                  </a:lnTo>
+                  <a:lnTo>
+                    <a:pt x="4296531" y="2462022"/>
+                  </a:lnTo>
+                  <a:lnTo>
+                    <a:pt x="4283146" y="2462022"/>
+                  </a:lnTo>
+                  <a:lnTo>
+                    <a:pt x="4269761" y="2462022"/>
+                  </a:lnTo>
+                  <a:lnTo>
+                    <a:pt x="4256376" y="2462022"/>
+                  </a:lnTo>
+                  <a:lnTo>
+                    <a:pt x="4242992" y="2462022"/>
+                  </a:lnTo>
+                  <a:lnTo>
+                    <a:pt x="4229607" y="2462022"/>
+                  </a:lnTo>
+                  <a:lnTo>
+                    <a:pt x="4216222" y="2462022"/>
+                  </a:lnTo>
+                  <a:lnTo>
+                    <a:pt x="4202837" y="2462022"/>
+                  </a:lnTo>
+                  <a:lnTo>
+                    <a:pt x="4189452" y="2462022"/>
+                  </a:lnTo>
+                  <a:lnTo>
+                    <a:pt x="4176067" y="2462022"/>
+                  </a:lnTo>
+                  <a:lnTo>
+                    <a:pt x="4162683" y="2462022"/>
+                  </a:lnTo>
+                  <a:lnTo>
+                    <a:pt x="4149298" y="2462022"/>
+                  </a:lnTo>
+                  <a:lnTo>
+                    <a:pt x="4135913" y="2462022"/>
+                  </a:lnTo>
+                  <a:lnTo>
+                    <a:pt x="4122528" y="2462022"/>
+                  </a:lnTo>
+                  <a:lnTo>
+                    <a:pt x="4109143" y="2462022"/>
+                  </a:lnTo>
+                  <a:lnTo>
+                    <a:pt x="4095758" y="2462022"/>
+                  </a:lnTo>
+                  <a:lnTo>
+                    <a:pt x="4082374" y="2462022"/>
+                  </a:lnTo>
+                  <a:lnTo>
+                    <a:pt x="4068989" y="2462022"/>
+                  </a:lnTo>
+                  <a:lnTo>
+                    <a:pt x="4055604" y="2462022"/>
+                  </a:lnTo>
+                  <a:lnTo>
+                    <a:pt x="4042219" y="2462022"/>
+                  </a:lnTo>
+                  <a:lnTo>
+                    <a:pt x="4028834" y="2462022"/>
+                  </a:lnTo>
+                  <a:lnTo>
+                    <a:pt x="4015449" y="2462022"/>
+                  </a:lnTo>
+                  <a:lnTo>
+                    <a:pt x="4002065" y="2462022"/>
+                  </a:lnTo>
+                  <a:lnTo>
+                    <a:pt x="3988680" y="2462022"/>
+                  </a:lnTo>
+                  <a:lnTo>
+                    <a:pt x="3975295" y="2462022"/>
+                  </a:lnTo>
+                  <a:lnTo>
+                    <a:pt x="3961910" y="2462022"/>
+                  </a:lnTo>
+                  <a:lnTo>
+                    <a:pt x="3948525" y="2462022"/>
+                  </a:lnTo>
+                  <a:lnTo>
+                    <a:pt x="3935140" y="2462022"/>
+                  </a:lnTo>
+                  <a:lnTo>
+                    <a:pt x="3921756" y="2462022"/>
+                  </a:lnTo>
+                  <a:lnTo>
+                    <a:pt x="3908371" y="2462022"/>
+                  </a:lnTo>
+                  <a:lnTo>
+                    <a:pt x="3894986" y="2462022"/>
+                  </a:lnTo>
+                  <a:lnTo>
+                    <a:pt x="3881601" y="2462022"/>
+                  </a:lnTo>
+                  <a:lnTo>
+                    <a:pt x="3868216" y="2462022"/>
+                  </a:lnTo>
+                  <a:lnTo>
+                    <a:pt x="3854831" y="2462022"/>
+                  </a:lnTo>
+                  <a:lnTo>
+                    <a:pt x="3841447" y="2462022"/>
+                  </a:lnTo>
+                  <a:lnTo>
+                    <a:pt x="3828062" y="2462022"/>
+                  </a:lnTo>
+                  <a:lnTo>
+                    <a:pt x="3814677" y="2462022"/>
+                  </a:lnTo>
+                  <a:lnTo>
+                    <a:pt x="3801292" y="2462022"/>
+                  </a:lnTo>
+                  <a:lnTo>
+                    <a:pt x="3787907" y="2462022"/>
+                  </a:lnTo>
+                  <a:lnTo>
+                    <a:pt x="3774522" y="2462022"/>
+                  </a:lnTo>
+                  <a:lnTo>
+                    <a:pt x="3761138" y="2462022"/>
+                  </a:lnTo>
+                  <a:lnTo>
+                    <a:pt x="3747753" y="2462022"/>
+                  </a:lnTo>
+                  <a:lnTo>
+                    <a:pt x="3734368" y="2462022"/>
+                  </a:lnTo>
+                  <a:lnTo>
+                    <a:pt x="3720983" y="2462022"/>
+                  </a:lnTo>
+                  <a:lnTo>
+                    <a:pt x="3707598" y="2462022"/>
+                  </a:lnTo>
+                  <a:lnTo>
+                    <a:pt x="3694213" y="2462022"/>
+                  </a:lnTo>
+                  <a:lnTo>
+                    <a:pt x="3680829" y="2462022"/>
+                  </a:lnTo>
+                  <a:lnTo>
+                    <a:pt x="3667444" y="2462022"/>
+                  </a:lnTo>
+                  <a:lnTo>
+                    <a:pt x="3654059" y="2462022"/>
+                  </a:lnTo>
+                  <a:lnTo>
+                    <a:pt x="3640674" y="2462022"/>
+                  </a:lnTo>
+                  <a:lnTo>
+                    <a:pt x="3627289" y="2462022"/>
+                  </a:lnTo>
+                  <a:lnTo>
+                    <a:pt x="3613904" y="2462022"/>
+                  </a:lnTo>
+                  <a:lnTo>
+                    <a:pt x="3600520" y="2462022"/>
+                  </a:lnTo>
+                  <a:lnTo>
+                    <a:pt x="3587135" y="2462022"/>
+                  </a:lnTo>
+                  <a:lnTo>
+                    <a:pt x="3573750" y="2462022"/>
+                  </a:lnTo>
+                  <a:lnTo>
+                    <a:pt x="3560365" y="2462022"/>
+                  </a:lnTo>
+                  <a:lnTo>
+                    <a:pt x="3546980" y="2462022"/>
+                  </a:lnTo>
+                  <a:lnTo>
+                    <a:pt x="3533595" y="2462022"/>
+                  </a:lnTo>
+                  <a:lnTo>
+                    <a:pt x="3520211" y="2462022"/>
+                  </a:lnTo>
+                  <a:lnTo>
+                    <a:pt x="3506826" y="2462022"/>
+                  </a:lnTo>
+                  <a:lnTo>
+                    <a:pt x="3493441" y="2462022"/>
+                  </a:lnTo>
+                  <a:lnTo>
+                    <a:pt x="3480056" y="2462022"/>
+                  </a:lnTo>
+                  <a:lnTo>
+                    <a:pt x="3466671" y="2462022"/>
+                  </a:lnTo>
+                  <a:lnTo>
+                    <a:pt x="3453286" y="2462022"/>
+                  </a:lnTo>
+                  <a:lnTo>
+                    <a:pt x="3439902" y="2462022"/>
+                  </a:lnTo>
+                  <a:lnTo>
+                    <a:pt x="3426517" y="2462022"/>
+                  </a:lnTo>
+                  <a:lnTo>
+                    <a:pt x="3413132" y="2462022"/>
+                  </a:lnTo>
+                  <a:lnTo>
+                    <a:pt x="3399747" y="2462022"/>
+                  </a:lnTo>
+                  <a:lnTo>
+                    <a:pt x="3386362" y="2462022"/>
+                  </a:lnTo>
+                  <a:lnTo>
+                    <a:pt x="3372977" y="2462022"/>
+                  </a:lnTo>
+                  <a:lnTo>
+                    <a:pt x="3359593" y="2462022"/>
+                  </a:lnTo>
+                  <a:lnTo>
+                    <a:pt x="3346208" y="2462022"/>
+                  </a:lnTo>
+                  <a:lnTo>
+                    <a:pt x="3332823" y="2462022"/>
+                  </a:lnTo>
+                  <a:lnTo>
+                    <a:pt x="3319438" y="2462022"/>
+                  </a:lnTo>
+                  <a:lnTo>
+                    <a:pt x="3306053" y="2462022"/>
+                  </a:lnTo>
+                  <a:lnTo>
+                    <a:pt x="3292668" y="2462022"/>
+                  </a:lnTo>
+                  <a:lnTo>
+                    <a:pt x="3279284" y="2462022"/>
+                  </a:lnTo>
+                  <a:lnTo>
+                    <a:pt x="3265899" y="2462022"/>
+                  </a:lnTo>
+                  <a:lnTo>
+                    <a:pt x="3252514" y="2462022"/>
+                  </a:lnTo>
+                  <a:lnTo>
+                    <a:pt x="3239129" y="2462022"/>
+                  </a:lnTo>
+                  <a:lnTo>
+                    <a:pt x="3225744" y="2462022"/>
+                  </a:lnTo>
+                  <a:lnTo>
+                    <a:pt x="3212359" y="2462022"/>
+                  </a:lnTo>
+                  <a:lnTo>
+                    <a:pt x="3198975" y="2462022"/>
+                  </a:lnTo>
+                  <a:lnTo>
+                    <a:pt x="3185590" y="2462022"/>
+                  </a:lnTo>
+                  <a:lnTo>
+                    <a:pt x="3172205" y="2462022"/>
+                  </a:lnTo>
+                  <a:lnTo>
+                    <a:pt x="3158820" y="2462022"/>
+                  </a:lnTo>
+                  <a:lnTo>
+                    <a:pt x="3145435" y="2462022"/>
+                  </a:lnTo>
+                  <a:lnTo>
+                    <a:pt x="3132050" y="2462022"/>
+                  </a:lnTo>
+                  <a:lnTo>
+                    <a:pt x="3118666" y="2462022"/>
+                  </a:lnTo>
+                  <a:lnTo>
+                    <a:pt x="3105281" y="2462022"/>
+                  </a:lnTo>
+                  <a:lnTo>
+                    <a:pt x="3091896" y="2462022"/>
+                  </a:lnTo>
+                  <a:lnTo>
+                    <a:pt x="3078511" y="2462022"/>
+                  </a:lnTo>
+                  <a:lnTo>
+                    <a:pt x="3065126" y="2462022"/>
+                  </a:lnTo>
+                  <a:lnTo>
+                    <a:pt x="3051741" y="2462022"/>
+                  </a:lnTo>
+                  <a:lnTo>
+                    <a:pt x="3038357" y="2462022"/>
+                  </a:lnTo>
+                  <a:lnTo>
+                    <a:pt x="3024972" y="2462022"/>
+                  </a:lnTo>
+                  <a:lnTo>
+                    <a:pt x="3011587" y="2462022"/>
+                  </a:lnTo>
+                  <a:lnTo>
+                    <a:pt x="2998202" y="2462022"/>
+                  </a:lnTo>
+                  <a:lnTo>
+                    <a:pt x="2984817" y="2462022"/>
+                  </a:lnTo>
+                  <a:lnTo>
+                    <a:pt x="2971432" y="2462022"/>
+                  </a:lnTo>
+                  <a:lnTo>
+                    <a:pt x="2958048" y="2462022"/>
+                  </a:lnTo>
+                  <a:lnTo>
+                    <a:pt x="2944663" y="2462022"/>
+                  </a:lnTo>
+                  <a:lnTo>
+                    <a:pt x="2931278" y="2462022"/>
+                  </a:lnTo>
+                  <a:lnTo>
+                    <a:pt x="2917893" y="2462022"/>
+                  </a:lnTo>
+                  <a:lnTo>
+                    <a:pt x="2904508" y="2462022"/>
+                  </a:lnTo>
+                  <a:lnTo>
+                    <a:pt x="2891123" y="2462022"/>
+                  </a:lnTo>
+                  <a:lnTo>
+                    <a:pt x="2877739" y="2462022"/>
+                  </a:lnTo>
+                  <a:lnTo>
+                    <a:pt x="2864354" y="2462022"/>
+                  </a:lnTo>
+                  <a:lnTo>
+                    <a:pt x="2850969" y="2462022"/>
+                  </a:lnTo>
+                  <a:lnTo>
+                    <a:pt x="2837584" y="2462022"/>
+                  </a:lnTo>
+                  <a:lnTo>
+                    <a:pt x="2824199" y="2462022"/>
+                  </a:lnTo>
+                  <a:lnTo>
+                    <a:pt x="2810814" y="2462022"/>
+                  </a:lnTo>
+                  <a:lnTo>
+                    <a:pt x="2797430" y="2462022"/>
+                  </a:lnTo>
+                  <a:lnTo>
+                    <a:pt x="2784045" y="2462022"/>
+                  </a:lnTo>
+                  <a:lnTo>
+                    <a:pt x="2770660" y="2462022"/>
+                  </a:lnTo>
+                  <a:lnTo>
+                    <a:pt x="2757275" y="2462022"/>
+                  </a:lnTo>
+                  <a:lnTo>
+                    <a:pt x="2743890" y="2462022"/>
+                  </a:lnTo>
+                  <a:lnTo>
+                    <a:pt x="2730505" y="2462022"/>
+                  </a:lnTo>
+                  <a:lnTo>
+                    <a:pt x="2717121" y="2462022"/>
+                  </a:lnTo>
+                  <a:lnTo>
+                    <a:pt x="2703736" y="2462022"/>
+                  </a:lnTo>
+                  <a:lnTo>
+                    <a:pt x="2690351" y="2462022"/>
+                  </a:lnTo>
+                  <a:lnTo>
+                    <a:pt x="2676966" y="2462022"/>
+                  </a:lnTo>
+                  <a:lnTo>
+                    <a:pt x="2663581" y="2462022"/>
+                  </a:lnTo>
+                  <a:lnTo>
+                    <a:pt x="2650196" y="2462022"/>
+                  </a:lnTo>
+                  <a:lnTo>
+                    <a:pt x="2636812" y="2462022"/>
+                  </a:lnTo>
+                  <a:lnTo>
+                    <a:pt x="2623427" y="2462022"/>
+                  </a:lnTo>
+                  <a:lnTo>
+                    <a:pt x="2610042" y="2462022"/>
+                  </a:lnTo>
+                  <a:lnTo>
+                    <a:pt x="2596657" y="2462022"/>
+                  </a:lnTo>
+                  <a:lnTo>
+                    <a:pt x="2583272" y="2462022"/>
+                  </a:lnTo>
+                  <a:lnTo>
+                    <a:pt x="2569887" y="2462022"/>
+                  </a:lnTo>
+                  <a:lnTo>
+                    <a:pt x="2556503" y="2462022"/>
+                  </a:lnTo>
+                  <a:lnTo>
+                    <a:pt x="2543118" y="2462022"/>
+                  </a:lnTo>
+                  <a:lnTo>
+                    <a:pt x="2529733" y="2462022"/>
+                  </a:lnTo>
+                  <a:lnTo>
+                    <a:pt x="2516348" y="2462022"/>
+                  </a:lnTo>
+                  <a:lnTo>
+                    <a:pt x="2502963" y="2462022"/>
+                  </a:lnTo>
+                  <a:lnTo>
+                    <a:pt x="2489578" y="2462022"/>
+                  </a:lnTo>
+                  <a:lnTo>
+                    <a:pt x="2476194" y="2462022"/>
+                  </a:lnTo>
+                  <a:lnTo>
+                    <a:pt x="2462809" y="2462022"/>
+                  </a:lnTo>
+                  <a:lnTo>
+                    <a:pt x="2449424" y="2462022"/>
+                  </a:lnTo>
+                  <a:lnTo>
+                    <a:pt x="2436039" y="2462022"/>
+                  </a:lnTo>
+                  <a:lnTo>
+                    <a:pt x="2422654" y="2462022"/>
+                  </a:lnTo>
+                  <a:lnTo>
+                    <a:pt x="2409269" y="2462022"/>
+                  </a:lnTo>
+                  <a:lnTo>
+                    <a:pt x="2395885" y="2462022"/>
+                  </a:lnTo>
+                  <a:lnTo>
+                    <a:pt x="2382500" y="2462022"/>
+                  </a:lnTo>
+                  <a:lnTo>
+                    <a:pt x="2369115" y="2462022"/>
+                  </a:lnTo>
+                  <a:lnTo>
+                    <a:pt x="2355730" y="2462022"/>
+                  </a:lnTo>
+                  <a:lnTo>
+                    <a:pt x="2342345" y="2462022"/>
+                  </a:lnTo>
+                  <a:lnTo>
+                    <a:pt x="2328960" y="2462022"/>
+                  </a:lnTo>
+                  <a:lnTo>
+                    <a:pt x="2315576" y="2462022"/>
+                  </a:lnTo>
+                  <a:lnTo>
+                    <a:pt x="2302191" y="2462022"/>
+                  </a:lnTo>
+                  <a:lnTo>
+                    <a:pt x="2288806" y="2462022"/>
+                  </a:lnTo>
+                  <a:lnTo>
+                    <a:pt x="2275421" y="2462022"/>
+                  </a:lnTo>
+                  <a:lnTo>
+                    <a:pt x="2262036" y="2462022"/>
+                  </a:lnTo>
+                  <a:lnTo>
+                    <a:pt x="2248651" y="2462022"/>
+                  </a:lnTo>
+                  <a:lnTo>
+                    <a:pt x="2235267" y="2462022"/>
+                  </a:lnTo>
+                  <a:lnTo>
+                    <a:pt x="2221882" y="2462022"/>
+                  </a:lnTo>
+                  <a:lnTo>
+                    <a:pt x="2208497" y="2462022"/>
+                  </a:lnTo>
+                  <a:lnTo>
+                    <a:pt x="2195112" y="2462022"/>
+                  </a:lnTo>
+                  <a:lnTo>
+                    <a:pt x="2181727" y="2462022"/>
+                  </a:lnTo>
+                  <a:lnTo>
+                    <a:pt x="2168342" y="2462022"/>
+                  </a:lnTo>
+                  <a:lnTo>
+                    <a:pt x="2154958" y="2462022"/>
+                  </a:lnTo>
+                  <a:lnTo>
+                    <a:pt x="2141573" y="2462022"/>
+                  </a:lnTo>
+                  <a:lnTo>
+                    <a:pt x="2128188" y="2462022"/>
+                  </a:lnTo>
+                  <a:lnTo>
+                    <a:pt x="2114803" y="2462022"/>
+                  </a:lnTo>
+                  <a:lnTo>
+                    <a:pt x="2101418" y="2462022"/>
+                  </a:lnTo>
+                  <a:lnTo>
+                    <a:pt x="2088033" y="2462022"/>
+                  </a:lnTo>
+                  <a:lnTo>
+                    <a:pt x="2074649" y="2462022"/>
+                  </a:lnTo>
+                  <a:lnTo>
+                    <a:pt x="2061264" y="2462022"/>
+                  </a:lnTo>
+                  <a:lnTo>
+                    <a:pt x="2047879" y="2462022"/>
+                  </a:lnTo>
+                  <a:lnTo>
+                    <a:pt x="2034494" y="2462022"/>
+                  </a:lnTo>
+                  <a:lnTo>
+                    <a:pt x="2021109" y="2462022"/>
+                  </a:lnTo>
+                  <a:lnTo>
+                    <a:pt x="2007724" y="2462022"/>
+                  </a:lnTo>
+                  <a:lnTo>
+                    <a:pt x="1994340" y="2462022"/>
+                  </a:lnTo>
+                  <a:lnTo>
+                    <a:pt x="1980955" y="2462022"/>
+                  </a:lnTo>
+                  <a:lnTo>
+                    <a:pt x="1967570" y="2462022"/>
+                  </a:lnTo>
+                  <a:lnTo>
+                    <a:pt x="1954185" y="2462022"/>
+                  </a:lnTo>
+                  <a:lnTo>
+                    <a:pt x="1940800" y="2462022"/>
+                  </a:lnTo>
+                  <a:lnTo>
+                    <a:pt x="1927415" y="2462022"/>
+                  </a:lnTo>
+                  <a:lnTo>
+                    <a:pt x="1914031" y="2462022"/>
+                  </a:lnTo>
+                  <a:lnTo>
+                    <a:pt x="1900646" y="2462022"/>
+                  </a:lnTo>
+                  <a:lnTo>
+                    <a:pt x="1887261" y="2462022"/>
+                  </a:lnTo>
+                  <a:lnTo>
+                    <a:pt x="1873876" y="2462022"/>
+                  </a:lnTo>
+                  <a:lnTo>
+                    <a:pt x="1860491" y="2462022"/>
+                  </a:lnTo>
+                  <a:lnTo>
+                    <a:pt x="1847106" y="2462022"/>
+                  </a:lnTo>
+                  <a:lnTo>
+                    <a:pt x="1833722" y="2462022"/>
+                  </a:lnTo>
+                  <a:lnTo>
+                    <a:pt x="1820337" y="2462022"/>
+                  </a:lnTo>
+                  <a:lnTo>
+                    <a:pt x="1806952" y="2462022"/>
+                  </a:lnTo>
+                  <a:lnTo>
+                    <a:pt x="1793567" y="2462022"/>
+                  </a:lnTo>
+                  <a:lnTo>
+                    <a:pt x="1780182" y="2462022"/>
+                  </a:lnTo>
+                  <a:lnTo>
+                    <a:pt x="1766797" y="2462022"/>
+                  </a:lnTo>
+                  <a:lnTo>
+                    <a:pt x="1753413" y="2462022"/>
+                  </a:lnTo>
+                  <a:lnTo>
+                    <a:pt x="1740028" y="2462022"/>
+                  </a:lnTo>
+                  <a:lnTo>
+                    <a:pt x="1726643" y="2462022"/>
+                  </a:lnTo>
+                  <a:lnTo>
+                    <a:pt x="1713258" y="2462022"/>
+                  </a:lnTo>
+                  <a:lnTo>
+                    <a:pt x="1699873" y="2462022"/>
+                  </a:lnTo>
+                  <a:lnTo>
+                    <a:pt x="1686488" y="2462022"/>
+                  </a:lnTo>
+                  <a:lnTo>
+                    <a:pt x="1673104" y="2462022"/>
+                  </a:lnTo>
+                  <a:lnTo>
+                    <a:pt x="1659719" y="2462022"/>
+                  </a:lnTo>
+                  <a:lnTo>
+                    <a:pt x="1646334" y="2462022"/>
+                  </a:lnTo>
+                  <a:lnTo>
+                    <a:pt x="1632949" y="2462022"/>
+                  </a:lnTo>
+                  <a:lnTo>
+                    <a:pt x="1619564" y="2462022"/>
+                  </a:lnTo>
+                  <a:lnTo>
+                    <a:pt x="1606179" y="2462022"/>
+                  </a:lnTo>
+                  <a:lnTo>
+                    <a:pt x="1592795" y="2462022"/>
+                  </a:lnTo>
+                  <a:lnTo>
+                    <a:pt x="1579410" y="2462022"/>
+                  </a:lnTo>
+                  <a:lnTo>
+                    <a:pt x="1566025" y="2462022"/>
+                  </a:lnTo>
+                  <a:lnTo>
+                    <a:pt x="1552640" y="2462022"/>
+                  </a:lnTo>
+                  <a:lnTo>
+                    <a:pt x="1539255" y="2462022"/>
+                  </a:lnTo>
+                  <a:lnTo>
+                    <a:pt x="1525870" y="2462022"/>
+                  </a:lnTo>
+                  <a:lnTo>
+                    <a:pt x="1512486" y="2462022"/>
+                  </a:lnTo>
+                  <a:lnTo>
+                    <a:pt x="1499101" y="2462022"/>
+                  </a:lnTo>
+                  <a:lnTo>
+                    <a:pt x="1485716" y="2462022"/>
+                  </a:lnTo>
+                  <a:lnTo>
+                    <a:pt x="1472331" y="2462022"/>
+                  </a:lnTo>
+                  <a:lnTo>
+                    <a:pt x="1458946" y="2462022"/>
+                  </a:lnTo>
+                  <a:lnTo>
+                    <a:pt x="1445561" y="2462022"/>
+                  </a:lnTo>
+                  <a:lnTo>
+                    <a:pt x="1432177" y="2462022"/>
+                  </a:lnTo>
+                  <a:lnTo>
+                    <a:pt x="1418792" y="2462022"/>
+                  </a:lnTo>
+                  <a:lnTo>
+                    <a:pt x="1405407" y="2462022"/>
+                  </a:lnTo>
+                  <a:lnTo>
+                    <a:pt x="1392022" y="2462022"/>
+                  </a:lnTo>
+                  <a:lnTo>
+                    <a:pt x="1378637" y="2462022"/>
+                  </a:lnTo>
+                  <a:lnTo>
+                    <a:pt x="1365252" y="2462022"/>
+                  </a:lnTo>
+                  <a:lnTo>
+                    <a:pt x="1351868" y="2462022"/>
+                  </a:lnTo>
+                  <a:lnTo>
+                    <a:pt x="1338483" y="2462022"/>
+                  </a:lnTo>
+                  <a:lnTo>
+                    <a:pt x="1325098" y="2462022"/>
+                  </a:lnTo>
+                  <a:lnTo>
+                    <a:pt x="1311713" y="2462022"/>
+                  </a:lnTo>
+                  <a:lnTo>
+                    <a:pt x="1298328" y="2462022"/>
+                  </a:lnTo>
+                  <a:lnTo>
+                    <a:pt x="1284943" y="2462022"/>
+                  </a:lnTo>
+                  <a:lnTo>
+                    <a:pt x="1271559" y="2462022"/>
+                  </a:lnTo>
+                  <a:lnTo>
+                    <a:pt x="1258174" y="2462022"/>
+                  </a:lnTo>
+                  <a:lnTo>
+                    <a:pt x="1244789" y="2462022"/>
+                  </a:lnTo>
+                  <a:lnTo>
+                    <a:pt x="1231404" y="2462022"/>
+                  </a:lnTo>
+                  <a:lnTo>
+                    <a:pt x="1218019" y="2462022"/>
+                  </a:lnTo>
+                  <a:lnTo>
+                    <a:pt x="1204634" y="2462022"/>
+                  </a:lnTo>
+                  <a:lnTo>
+                    <a:pt x="1191250" y="2462022"/>
+                  </a:lnTo>
+                  <a:lnTo>
+                    <a:pt x="1177865" y="2462022"/>
+                  </a:lnTo>
+                  <a:lnTo>
+                    <a:pt x="1164480" y="2462022"/>
+                  </a:lnTo>
+                  <a:lnTo>
+                    <a:pt x="1151095" y="2462022"/>
+                  </a:lnTo>
+                  <a:lnTo>
+                    <a:pt x="1137710" y="2462022"/>
+                  </a:lnTo>
+                  <a:lnTo>
+                    <a:pt x="1124325" y="2462022"/>
+                  </a:lnTo>
+                  <a:lnTo>
+                    <a:pt x="1110941" y="2462022"/>
+                  </a:lnTo>
+                  <a:lnTo>
+                    <a:pt x="1097556" y="2462022"/>
+                  </a:lnTo>
+                  <a:lnTo>
+                    <a:pt x="1084171" y="2462022"/>
+                  </a:lnTo>
+                  <a:lnTo>
+                    <a:pt x="1070786" y="2462022"/>
+                  </a:lnTo>
+                  <a:lnTo>
+                    <a:pt x="1057401" y="2462022"/>
+                  </a:lnTo>
+                  <a:lnTo>
+                    <a:pt x="1044016" y="2462022"/>
+                  </a:lnTo>
+                  <a:lnTo>
+                    <a:pt x="1030632" y="2462022"/>
+                  </a:lnTo>
+                  <a:lnTo>
+                    <a:pt x="1017247" y="2462022"/>
+                  </a:lnTo>
+                  <a:lnTo>
+                    <a:pt x="1003862" y="2462022"/>
+                  </a:lnTo>
+                  <a:lnTo>
+                    <a:pt x="990477" y="2462022"/>
+                  </a:lnTo>
+                  <a:lnTo>
+                    <a:pt x="977092" y="2462022"/>
+                  </a:lnTo>
+                  <a:lnTo>
+                    <a:pt x="963707" y="2462022"/>
+                  </a:lnTo>
+                  <a:lnTo>
+                    <a:pt x="950323" y="2462022"/>
+                  </a:lnTo>
+                  <a:lnTo>
+                    <a:pt x="936938" y="2462022"/>
+                  </a:lnTo>
+                  <a:lnTo>
+                    <a:pt x="923553" y="2462022"/>
+                  </a:lnTo>
+                  <a:lnTo>
+                    <a:pt x="910168" y="2462022"/>
+                  </a:lnTo>
+                  <a:lnTo>
+                    <a:pt x="896783" y="2462022"/>
+                  </a:lnTo>
+                  <a:lnTo>
+                    <a:pt x="883398" y="2462022"/>
+                  </a:lnTo>
+                  <a:lnTo>
+                    <a:pt x="870014" y="2462022"/>
+                  </a:lnTo>
+                  <a:lnTo>
+                    <a:pt x="856629" y="2462022"/>
+                  </a:lnTo>
+                  <a:lnTo>
+                    <a:pt x="843244" y="2462022"/>
+                  </a:lnTo>
+                  <a:lnTo>
+                    <a:pt x="829859" y="2462022"/>
+                  </a:lnTo>
+                  <a:lnTo>
+                    <a:pt x="816474" y="2462022"/>
+                  </a:lnTo>
+                  <a:lnTo>
+                    <a:pt x="803089" y="2462022"/>
+                  </a:lnTo>
+                  <a:lnTo>
+                    <a:pt x="789705" y="2462022"/>
+                  </a:lnTo>
+                  <a:lnTo>
+                    <a:pt x="776320" y="2462022"/>
+                  </a:lnTo>
+                  <a:lnTo>
+                    <a:pt x="762935" y="2462022"/>
+                  </a:lnTo>
+                  <a:lnTo>
+                    <a:pt x="749550" y="2462022"/>
+                  </a:lnTo>
+                  <a:lnTo>
+                    <a:pt x="736165" y="2462022"/>
+                  </a:lnTo>
+                  <a:lnTo>
+                    <a:pt x="722780" y="2462022"/>
+                  </a:lnTo>
+                  <a:lnTo>
+                    <a:pt x="709396" y="2462022"/>
+                  </a:lnTo>
+                  <a:lnTo>
+                    <a:pt x="696011" y="2462022"/>
+                  </a:lnTo>
+                  <a:lnTo>
+                    <a:pt x="682626" y="2462022"/>
+                  </a:lnTo>
+                  <a:lnTo>
+                    <a:pt x="669241" y="2462022"/>
+                  </a:lnTo>
+                  <a:lnTo>
+                    <a:pt x="655856" y="2462022"/>
+                  </a:lnTo>
+                  <a:lnTo>
+                    <a:pt x="642471" y="2462022"/>
+                  </a:lnTo>
+                  <a:lnTo>
+                    <a:pt x="629087" y="2462022"/>
+                  </a:lnTo>
+                  <a:lnTo>
+                    <a:pt x="615702" y="2462022"/>
+                  </a:lnTo>
+                  <a:lnTo>
+                    <a:pt x="602317" y="2462022"/>
+                  </a:lnTo>
+                  <a:lnTo>
+                    <a:pt x="588932" y="2462022"/>
+                  </a:lnTo>
+                  <a:lnTo>
+                    <a:pt x="575547" y="2462022"/>
+                  </a:lnTo>
+                  <a:lnTo>
+                    <a:pt x="562162" y="2462022"/>
+                  </a:lnTo>
+                  <a:lnTo>
+                    <a:pt x="548778" y="2462022"/>
+                  </a:lnTo>
+                  <a:lnTo>
+                    <a:pt x="535393" y="2462022"/>
+                  </a:lnTo>
+                  <a:lnTo>
+                    <a:pt x="522008" y="2462022"/>
+                  </a:lnTo>
+                  <a:lnTo>
+                    <a:pt x="508623" y="2462022"/>
+                  </a:lnTo>
+                  <a:lnTo>
+                    <a:pt x="495238" y="2462022"/>
+                  </a:lnTo>
+                  <a:lnTo>
+                    <a:pt x="481853" y="2462022"/>
+                  </a:lnTo>
+                  <a:lnTo>
+                    <a:pt x="468469" y="2462022"/>
+                  </a:lnTo>
+                  <a:lnTo>
+                    <a:pt x="455084" y="2462022"/>
+                  </a:lnTo>
+                  <a:lnTo>
+                    <a:pt x="441699" y="2462022"/>
+                  </a:lnTo>
+                  <a:lnTo>
+                    <a:pt x="428314" y="2462022"/>
+                  </a:lnTo>
+                  <a:lnTo>
+                    <a:pt x="414929" y="2462022"/>
+                  </a:lnTo>
+                  <a:lnTo>
+                    <a:pt x="401544" y="2462022"/>
+                  </a:lnTo>
+                  <a:lnTo>
+                    <a:pt x="388160" y="2462022"/>
+                  </a:lnTo>
+                  <a:lnTo>
+                    <a:pt x="374775" y="2462022"/>
+                  </a:lnTo>
+                  <a:lnTo>
+                    <a:pt x="361390" y="2462022"/>
+                  </a:lnTo>
+                  <a:lnTo>
+                    <a:pt x="348005" y="2462022"/>
+                  </a:lnTo>
+                  <a:lnTo>
+                    <a:pt x="334620" y="2462022"/>
+                  </a:lnTo>
+                  <a:lnTo>
+                    <a:pt x="321235" y="2462022"/>
+                  </a:lnTo>
+                  <a:lnTo>
+                    <a:pt x="307851" y="2462022"/>
+                  </a:lnTo>
+                  <a:lnTo>
+                    <a:pt x="294466" y="2462022"/>
+                  </a:lnTo>
+                  <a:lnTo>
+                    <a:pt x="281081" y="2462022"/>
+                  </a:lnTo>
+                  <a:lnTo>
+                    <a:pt x="267696" y="2462022"/>
+                  </a:lnTo>
+                  <a:lnTo>
+                    <a:pt x="254311" y="2462022"/>
+                  </a:lnTo>
+                  <a:lnTo>
+                    <a:pt x="240926" y="2462022"/>
+                  </a:lnTo>
+                  <a:lnTo>
+                    <a:pt x="227542" y="2462022"/>
+                  </a:lnTo>
+                  <a:lnTo>
+                    <a:pt x="214157" y="2462022"/>
+                  </a:lnTo>
+                  <a:lnTo>
+                    <a:pt x="200772" y="2462022"/>
+                  </a:lnTo>
+                  <a:lnTo>
+                    <a:pt x="187387" y="2462022"/>
+                  </a:lnTo>
+                  <a:lnTo>
+                    <a:pt x="174002" y="2462022"/>
+                  </a:lnTo>
+                  <a:lnTo>
+                    <a:pt x="160617" y="2462022"/>
+                  </a:lnTo>
+                  <a:lnTo>
+                    <a:pt x="147233" y="2462022"/>
+                  </a:lnTo>
+                  <a:lnTo>
+                    <a:pt x="133848" y="2462022"/>
+                  </a:lnTo>
+                  <a:lnTo>
+                    <a:pt x="120463" y="2462022"/>
+                  </a:lnTo>
+                  <a:lnTo>
+                    <a:pt x="107078" y="2462022"/>
+                  </a:lnTo>
+                  <a:lnTo>
+                    <a:pt x="93693" y="2462022"/>
+                  </a:lnTo>
+                  <a:lnTo>
+                    <a:pt x="80308" y="2462022"/>
+                  </a:lnTo>
+                  <a:lnTo>
+                    <a:pt x="66924" y="2462022"/>
+                  </a:lnTo>
+                  <a:lnTo>
+                    <a:pt x="53539" y="2462022"/>
+                  </a:lnTo>
+                  <a:lnTo>
+                    <a:pt x="40154" y="2462022"/>
+                  </a:lnTo>
+                  <a:lnTo>
+                    <a:pt x="26769" y="2462022"/>
+                  </a:lnTo>
+                  <a:lnTo>
+                    <a:pt x="13384" y="2462022"/>
+                  </a:lnTo>
+                  <a:lnTo>
+                    <a:pt x="0" y="2462022"/>
                   </a:lnTo>
                   <a:close/>
                 </a:path>
@@ -6234,1548 +6234,1548 @@
           </p:nvSpPr>
           <p:spPr>
             <a:xfrm>
-              <a:off x="1429252" y="3106034"/>
-              <a:ext cx="6839649" cy="2361905"/>
+              <a:off x="1429252" y="3085603"/>
+              <a:ext cx="6839649" cy="2381203"/>
             </a:xfrm>
             <a:custGeom>
               <a:avLst/>
               <a:pathLst>
-                <a:path w="6839649" h="2361905">
+                <a:path w="6839649" h="2381203">
                   <a:moveTo>
-                    <a:pt x="0" y="2267597"/>
+                    <a:pt x="0" y="2286839"/>
                   </a:moveTo>
                   <a:lnTo>
-                    <a:pt x="13384" y="2264072"/>
-                  </a:lnTo>
-                  <a:lnTo>
-                    <a:pt x="26769" y="2260559"/>
-                  </a:lnTo>
-                  <a:lnTo>
-                    <a:pt x="40154" y="2257065"/>
-                  </a:lnTo>
-                  <a:lnTo>
-                    <a:pt x="53539" y="2253582"/>
-                  </a:lnTo>
-                  <a:lnTo>
-                    <a:pt x="66924" y="2250107"/>
-                  </a:lnTo>
-                  <a:lnTo>
-                    <a:pt x="80308" y="2246641"/>
-                  </a:lnTo>
-                  <a:lnTo>
-                    <a:pt x="93693" y="2243176"/>
-                  </a:lnTo>
-                  <a:lnTo>
-                    <a:pt x="107078" y="2239709"/>
-                  </a:lnTo>
-                  <a:lnTo>
-                    <a:pt x="120463" y="2236238"/>
-                  </a:lnTo>
-                  <a:lnTo>
-                    <a:pt x="133848" y="2232751"/>
-                  </a:lnTo>
-                  <a:lnTo>
-                    <a:pt x="147233" y="2229250"/>
-                  </a:lnTo>
-                  <a:lnTo>
-                    <a:pt x="160617" y="2225729"/>
-                  </a:lnTo>
-                  <a:lnTo>
-                    <a:pt x="174002" y="2222167"/>
-                  </a:lnTo>
-                  <a:lnTo>
-                    <a:pt x="187387" y="2218574"/>
-                  </a:lnTo>
-                  <a:lnTo>
-                    <a:pt x="200772" y="2214948"/>
-                  </a:lnTo>
-                  <a:lnTo>
-                    <a:pt x="214157" y="2211247"/>
-                  </a:lnTo>
-                  <a:lnTo>
-                    <a:pt x="227542" y="2207496"/>
-                  </a:lnTo>
-                  <a:lnTo>
-                    <a:pt x="240926" y="2203694"/>
-                  </a:lnTo>
-                  <a:lnTo>
-                    <a:pt x="254311" y="2199787"/>
-                  </a:lnTo>
-                  <a:lnTo>
-                    <a:pt x="267696" y="2195803"/>
-                  </a:lnTo>
-                  <a:lnTo>
-                    <a:pt x="281081" y="2191747"/>
-                  </a:lnTo>
-                  <a:lnTo>
-                    <a:pt x="294466" y="2187562"/>
-                  </a:lnTo>
-                  <a:lnTo>
-                    <a:pt x="307851" y="2183267"/>
-                  </a:lnTo>
-                  <a:lnTo>
-                    <a:pt x="321235" y="2178878"/>
-                  </a:lnTo>
-                  <a:lnTo>
-                    <a:pt x="334620" y="2174342"/>
-                  </a:lnTo>
-                  <a:lnTo>
-                    <a:pt x="348005" y="2169656"/>
-                  </a:lnTo>
-                  <a:lnTo>
-                    <a:pt x="361390" y="2164855"/>
-                  </a:lnTo>
-                  <a:lnTo>
-                    <a:pt x="374775" y="2159898"/>
-                  </a:lnTo>
-                  <a:lnTo>
-                    <a:pt x="388160" y="2154745"/>
-                  </a:lnTo>
-                  <a:lnTo>
-                    <a:pt x="401544" y="2149460"/>
-                  </a:lnTo>
-                  <a:lnTo>
-                    <a:pt x="414929" y="2144014"/>
-                  </a:lnTo>
-                  <a:lnTo>
-                    <a:pt x="428314" y="2138328"/>
-                  </a:lnTo>
-                  <a:lnTo>
-                    <a:pt x="441699" y="2132493"/>
-                  </a:lnTo>
-                  <a:lnTo>
-                    <a:pt x="455084" y="2126501"/>
-                  </a:lnTo>
-                  <a:lnTo>
-                    <a:pt x="468469" y="2120226"/>
-                  </a:lnTo>
-                  <a:lnTo>
-                    <a:pt x="481853" y="2113789"/>
-                  </a:lnTo>
-                  <a:lnTo>
-                    <a:pt x="495238" y="2107190"/>
-                  </a:lnTo>
-                  <a:lnTo>
-                    <a:pt x="508623" y="2100299"/>
-                  </a:lnTo>
-                  <a:lnTo>
-                    <a:pt x="522008" y="2093222"/>
-                  </a:lnTo>
-                  <a:lnTo>
-                    <a:pt x="535393" y="2085975"/>
-                  </a:lnTo>
-                  <a:lnTo>
-                    <a:pt x="548778" y="2078450"/>
-                  </a:lnTo>
-                  <a:lnTo>
-                    <a:pt x="562162" y="2070711"/>
-                  </a:lnTo>
-                  <a:lnTo>
-                    <a:pt x="575547" y="2062798"/>
-                  </a:lnTo>
-                  <a:lnTo>
-                    <a:pt x="588932" y="2054628"/>
-                  </a:lnTo>
-                  <a:lnTo>
-                    <a:pt x="602317" y="2046220"/>
-                  </a:lnTo>
-                  <a:lnTo>
-                    <a:pt x="615702" y="2037639"/>
-                  </a:lnTo>
-                  <a:lnTo>
-                    <a:pt x="629087" y="2028829"/>
-                  </a:lnTo>
-                  <a:lnTo>
-                    <a:pt x="642471" y="2019761"/>
-                  </a:lnTo>
-                  <a:lnTo>
-                    <a:pt x="655856" y="2010526"/>
-                  </a:lnTo>
-                  <a:lnTo>
-                    <a:pt x="669241" y="2001092"/>
-                  </a:lnTo>
-                  <a:lnTo>
-                    <a:pt x="682626" y="1991388"/>
-                  </a:lnTo>
-                  <a:lnTo>
-                    <a:pt x="696011" y="1981524"/>
-                  </a:lnTo>
-                  <a:lnTo>
-                    <a:pt x="709396" y="1971494"/>
-                  </a:lnTo>
-                  <a:lnTo>
-                    <a:pt x="722780" y="1961188"/>
-                  </a:lnTo>
-                  <a:lnTo>
-                    <a:pt x="736165" y="1950733"/>
-                  </a:lnTo>
-                  <a:lnTo>
-                    <a:pt x="749550" y="1940130"/>
-                  </a:lnTo>
-                  <a:lnTo>
-                    <a:pt x="762935" y="1929275"/>
-                  </a:lnTo>
-                  <a:lnTo>
-                    <a:pt x="776320" y="1918272"/>
-                  </a:lnTo>
-                  <a:lnTo>
-                    <a:pt x="789705" y="1907133"/>
-                  </a:lnTo>
-                  <a:lnTo>
-                    <a:pt x="803089" y="1895781"/>
-                  </a:lnTo>
-                  <a:lnTo>
-                    <a:pt x="816474" y="1884276"/>
-                  </a:lnTo>
-                  <a:lnTo>
-                    <a:pt x="829859" y="1872647"/>
-                  </a:lnTo>
-                  <a:lnTo>
-                    <a:pt x="843244" y="1860841"/>
-                  </a:lnTo>
-                  <a:lnTo>
-                    <a:pt x="856629" y="1848879"/>
-                  </a:lnTo>
-                  <a:lnTo>
-                    <a:pt x="870014" y="1836805"/>
-                  </a:lnTo>
-                  <a:lnTo>
-                    <a:pt x="883398" y="1824585"/>
-                  </a:lnTo>
-                  <a:lnTo>
-                    <a:pt x="896783" y="1812207"/>
-                  </a:lnTo>
-                  <a:lnTo>
-                    <a:pt x="910168" y="1799728"/>
-                  </a:lnTo>
-                  <a:lnTo>
-                    <a:pt x="923553" y="1787129"/>
-                  </a:lnTo>
-                  <a:lnTo>
-                    <a:pt x="936938" y="1774370"/>
-                  </a:lnTo>
-                  <a:lnTo>
-                    <a:pt x="950323" y="1761517"/>
-                  </a:lnTo>
-                  <a:lnTo>
-                    <a:pt x="963707" y="1748566"/>
-                  </a:lnTo>
-                  <a:lnTo>
-                    <a:pt x="977092" y="1735451"/>
-                  </a:lnTo>
-                  <a:lnTo>
-                    <a:pt x="990477" y="1722247"/>
-                  </a:lnTo>
-                  <a:lnTo>
-                    <a:pt x="1003862" y="1708955"/>
-                  </a:lnTo>
-                  <a:lnTo>
-                    <a:pt x="1017247" y="1695506"/>
-                  </a:lnTo>
-                  <a:lnTo>
-                    <a:pt x="1030632" y="1681962"/>
-                  </a:lnTo>
-                  <a:lnTo>
-                    <a:pt x="1044016" y="1668331"/>
-                  </a:lnTo>
-                  <a:lnTo>
-                    <a:pt x="1057401" y="1654557"/>
-                  </a:lnTo>
-                  <a:lnTo>
-                    <a:pt x="1070786" y="1640675"/>
-                  </a:lnTo>
-                  <a:lnTo>
-                    <a:pt x="1084171" y="1626704"/>
-                  </a:lnTo>
-                  <a:lnTo>
-                    <a:pt x="1097556" y="1612599"/>
-                  </a:lnTo>
-                  <a:lnTo>
-                    <a:pt x="1110941" y="1598369"/>
-                  </a:lnTo>
-                  <a:lnTo>
-                    <a:pt x="1124325" y="1584046"/>
-                  </a:lnTo>
-                  <a:lnTo>
-                    <a:pt x="1137710" y="1569596"/>
-                  </a:lnTo>
-                  <a:lnTo>
-                    <a:pt x="1151095" y="1555001"/>
-                  </a:lnTo>
-                  <a:lnTo>
-                    <a:pt x="1164480" y="1540307"/>
-                  </a:lnTo>
-                  <a:lnTo>
-                    <a:pt x="1177865" y="1525493"/>
-                  </a:lnTo>
-                  <a:lnTo>
-                    <a:pt x="1191250" y="1510509"/>
-                  </a:lnTo>
-                  <a:lnTo>
-                    <a:pt x="1204634" y="1495420"/>
-                  </a:lnTo>
-                  <a:lnTo>
-                    <a:pt x="1218019" y="1480218"/>
-                  </a:lnTo>
-                  <a:lnTo>
-                    <a:pt x="1231404" y="1464819"/>
-                  </a:lnTo>
-                  <a:lnTo>
-                    <a:pt x="1244789" y="1449308"/>
-                  </a:lnTo>
-                  <a:lnTo>
-                    <a:pt x="1258174" y="1433684"/>
-                  </a:lnTo>
-                  <a:lnTo>
-                    <a:pt x="1271559" y="1417852"/>
-                  </a:lnTo>
-                  <a:lnTo>
-                    <a:pt x="1284943" y="1401893"/>
-                  </a:lnTo>
-                  <a:lnTo>
-                    <a:pt x="1298328" y="1385814"/>
-                  </a:lnTo>
-                  <a:lnTo>
-                    <a:pt x="1311713" y="1369535"/>
-                  </a:lnTo>
-                  <a:lnTo>
-                    <a:pt x="1325098" y="1353106"/>
-                  </a:lnTo>
-                  <a:lnTo>
-                    <a:pt x="1338483" y="1336552"/>
-                  </a:lnTo>
-                  <a:lnTo>
-                    <a:pt x="1351868" y="1319809"/>
-                  </a:lnTo>
-                  <a:lnTo>
-                    <a:pt x="1365252" y="1302894"/>
-                  </a:lnTo>
-                  <a:lnTo>
-                    <a:pt x="1378637" y="1285851"/>
-                  </a:lnTo>
-                  <a:lnTo>
-                    <a:pt x="1392022" y="1268636"/>
-                  </a:lnTo>
-                  <a:lnTo>
-                    <a:pt x="1405407" y="1251230"/>
-                  </a:lnTo>
-                  <a:lnTo>
-                    <a:pt x="1418792" y="1233697"/>
-                  </a:lnTo>
-                  <a:lnTo>
-                    <a:pt x="1432177" y="1216010"/>
-                  </a:lnTo>
-                  <a:lnTo>
-                    <a:pt x="1445561" y="1198119"/>
-                  </a:lnTo>
-                  <a:lnTo>
-                    <a:pt x="1458946" y="1180105"/>
-                  </a:lnTo>
-                  <a:lnTo>
-                    <a:pt x="1472331" y="1161960"/>
-                  </a:lnTo>
-                  <a:lnTo>
-                    <a:pt x="1485716" y="1143605"/>
-                  </a:lnTo>
-                  <a:lnTo>
-                    <a:pt x="1499101" y="1125135"/>
-                  </a:lnTo>
-                  <a:lnTo>
-                    <a:pt x="1512486" y="1106551"/>
-                  </a:lnTo>
-                  <a:lnTo>
-                    <a:pt x="1525870" y="1087773"/>
-                  </a:lnTo>
-                  <a:lnTo>
-                    <a:pt x="1539255" y="1068885"/>
-                  </a:lnTo>
-                  <a:lnTo>
-                    <a:pt x="1552640" y="1049898"/>
-                  </a:lnTo>
-                  <a:lnTo>
-                    <a:pt x="1566025" y="1030753"/>
-                  </a:lnTo>
-                  <a:lnTo>
-                    <a:pt x="1579410" y="1011504"/>
-                  </a:lnTo>
-                  <a:lnTo>
-                    <a:pt x="1592795" y="992172"/>
-                  </a:lnTo>
-                  <a:lnTo>
-                    <a:pt x="1606179" y="972723"/>
-                  </a:lnTo>
-                  <a:lnTo>
-                    <a:pt x="1619564" y="953183"/>
-                  </a:lnTo>
-                  <a:lnTo>
-                    <a:pt x="1632949" y="933582"/>
-                  </a:lnTo>
-                  <a:lnTo>
-                    <a:pt x="1646334" y="913904"/>
-                  </a:lnTo>
-                  <a:lnTo>
-                    <a:pt x="1659719" y="894160"/>
-                  </a:lnTo>
-                  <a:lnTo>
-                    <a:pt x="1673104" y="874379"/>
-                  </a:lnTo>
-                  <a:lnTo>
-                    <a:pt x="1686488" y="854560"/>
-                  </a:lnTo>
-                  <a:lnTo>
-                    <a:pt x="1699873" y="834711"/>
-                  </a:lnTo>
-                  <a:lnTo>
-                    <a:pt x="1713258" y="814854"/>
-                  </a:lnTo>
-                  <a:lnTo>
-                    <a:pt x="1726643" y="794993"/>
-                  </a:lnTo>
-                  <a:lnTo>
-                    <a:pt x="1740028" y="775150"/>
-                  </a:lnTo>
-                  <a:lnTo>
-                    <a:pt x="1753413" y="755331"/>
-                  </a:lnTo>
-                  <a:lnTo>
-                    <a:pt x="1766797" y="735538"/>
-                  </a:lnTo>
-                  <a:lnTo>
-                    <a:pt x="1780182" y="715819"/>
-                  </a:lnTo>
-                  <a:lnTo>
-                    <a:pt x="1793567" y="696160"/>
-                  </a:lnTo>
-                  <a:lnTo>
-                    <a:pt x="1806952" y="676560"/>
-                  </a:lnTo>
-                  <a:lnTo>
-                    <a:pt x="1820337" y="657081"/>
-                  </a:lnTo>
-                  <a:lnTo>
-                    <a:pt x="1833722" y="637707"/>
-                  </a:lnTo>
-                  <a:lnTo>
-                    <a:pt x="1847106" y="618427"/>
-                  </a:lnTo>
-                  <a:lnTo>
-                    <a:pt x="1860491" y="599306"/>
-                  </a:lnTo>
-                  <a:lnTo>
-                    <a:pt x="1873876" y="580346"/>
-                  </a:lnTo>
-                  <a:lnTo>
-                    <a:pt x="1887261" y="561513"/>
-                  </a:lnTo>
-                  <a:lnTo>
-                    <a:pt x="1900646" y="542866"/>
-                  </a:lnTo>
-                  <a:lnTo>
-                    <a:pt x="1914031" y="524443"/>
-                  </a:lnTo>
-                  <a:lnTo>
-                    <a:pt x="1927415" y="506180"/>
-                  </a:lnTo>
-                  <a:lnTo>
-                    <a:pt x="1940800" y="488121"/>
-                  </a:lnTo>
-                  <a:lnTo>
-                    <a:pt x="1954185" y="470352"/>
-                  </a:lnTo>
-                  <a:lnTo>
-                    <a:pt x="1967570" y="452773"/>
-                  </a:lnTo>
-                  <a:lnTo>
-                    <a:pt x="1980955" y="435404"/>
-                  </a:lnTo>
-                  <a:lnTo>
-                    <a:pt x="1994340" y="418397"/>
-                  </a:lnTo>
-                  <a:lnTo>
-                    <a:pt x="2007724" y="401605"/>
-                  </a:lnTo>
-                  <a:lnTo>
-                    <a:pt x="2021109" y="385030"/>
-                  </a:lnTo>
-                  <a:lnTo>
-                    <a:pt x="2034494" y="368866"/>
-                  </a:lnTo>
-                  <a:lnTo>
-                    <a:pt x="2047879" y="352950"/>
-                  </a:lnTo>
-                  <a:lnTo>
-                    <a:pt x="2061264" y="337272"/>
-                  </a:lnTo>
-                  <a:lnTo>
-                    <a:pt x="2074649" y="322005"/>
-                  </a:lnTo>
-                  <a:lnTo>
-                    <a:pt x="2088033" y="307037"/>
-                  </a:lnTo>
-                  <a:lnTo>
-                    <a:pt x="2101418" y="292325"/>
-                  </a:lnTo>
-                  <a:lnTo>
-                    <a:pt x="2114803" y="278009"/>
-                  </a:lnTo>
-                  <a:lnTo>
-                    <a:pt x="2128188" y="264046"/>
-                  </a:lnTo>
-                  <a:lnTo>
-                    <a:pt x="2141573" y="250349"/>
-                  </a:lnTo>
-                  <a:lnTo>
-                    <a:pt x="2154958" y="237027"/>
-                  </a:lnTo>
-                  <a:lnTo>
-                    <a:pt x="2168342" y="224106"/>
-                  </a:lnTo>
-                  <a:lnTo>
-                    <a:pt x="2181727" y="211460"/>
-                  </a:lnTo>
-                  <a:lnTo>
-                    <a:pt x="2195112" y="199158"/>
-                  </a:lnTo>
-                  <a:lnTo>
-                    <a:pt x="2208497" y="187304"/>
-                  </a:lnTo>
-                  <a:lnTo>
-                    <a:pt x="2221882" y="175729"/>
-                  </a:lnTo>
-                  <a:lnTo>
-                    <a:pt x="2235267" y="164463"/>
-                  </a:lnTo>
-                  <a:lnTo>
-                    <a:pt x="2248651" y="153688"/>
-                  </a:lnTo>
-                  <a:lnTo>
-                    <a:pt x="2262036" y="143195"/>
-                  </a:lnTo>
-                  <a:lnTo>
-                    <a:pt x="2275421" y="132982"/>
-                  </a:lnTo>
-                  <a:lnTo>
-                    <a:pt x="2288806" y="123281"/>
-                  </a:lnTo>
-                  <a:lnTo>
-                    <a:pt x="2302191" y="113872"/>
-                  </a:lnTo>
-                  <a:lnTo>
-                    <a:pt x="2315576" y="104745"/>
-                  </a:lnTo>
-                  <a:lnTo>
-                    <a:pt x="2328960" y="96091"/>
-                  </a:lnTo>
-                  <a:lnTo>
-                    <a:pt x="2342345" y="87770"/>
-                  </a:lnTo>
-                  <a:lnTo>
-                    <a:pt x="2355730" y="79732"/>
-                  </a:lnTo>
-                  <a:lnTo>
-                    <a:pt x="2369115" y="72129"/>
-                  </a:lnTo>
-                  <a:lnTo>
-                    <a:pt x="2382500" y="64903"/>
-                  </a:lnTo>
-                  <a:lnTo>
-                    <a:pt x="2395885" y="57962"/>
-                  </a:lnTo>
-                  <a:lnTo>
-                    <a:pt x="2409269" y="51421"/>
-                  </a:lnTo>
-                  <a:lnTo>
-                    <a:pt x="2422654" y="45304"/>
-                  </a:lnTo>
-                  <a:lnTo>
-                    <a:pt x="2436039" y="39478"/>
-                  </a:lnTo>
-                  <a:lnTo>
-                    <a:pt x="2449424" y="34020"/>
-                  </a:lnTo>
-                  <a:lnTo>
-                    <a:pt x="2462809" y="29039"/>
-                  </a:lnTo>
-                  <a:lnTo>
-                    <a:pt x="2476194" y="24359"/>
-                  </a:lnTo>
-                  <a:lnTo>
-                    <a:pt x="2489578" y="20016"/>
-                  </a:lnTo>
-                  <a:lnTo>
-                    <a:pt x="2502963" y="16212"/>
-                  </a:lnTo>
-                  <a:lnTo>
-                    <a:pt x="2516348" y="12724"/>
-                  </a:lnTo>
-                  <a:lnTo>
-                    <a:pt x="2529733" y="9551"/>
-                  </a:lnTo>
-                  <a:lnTo>
-                    <a:pt x="2543118" y="6970"/>
-                  </a:lnTo>
-                  <a:lnTo>
-                    <a:pt x="2556503" y="4731"/>
-                  </a:lnTo>
-                  <a:lnTo>
-                    <a:pt x="2569887" y="2825"/>
-                  </a:lnTo>
-                  <a:lnTo>
-                    <a:pt x="2583272" y="1495"/>
-                  </a:lnTo>
-                  <a:lnTo>
-                    <a:pt x="2596657" y="576"/>
-                  </a:lnTo>
-                  <a:lnTo>
-                    <a:pt x="2610042" y="9"/>
+                    <a:pt x="13384" y="2283325"/>
+                  </a:lnTo>
+                  <a:lnTo>
+                    <a:pt x="26769" y="2279831"/>
+                  </a:lnTo>
+                  <a:lnTo>
+                    <a:pt x="40154" y="2276372"/>
+                  </a:lnTo>
+                  <a:lnTo>
+                    <a:pt x="53539" y="2272933"/>
+                  </a:lnTo>
+                  <a:lnTo>
+                    <a:pt x="66924" y="2269510"/>
+                  </a:lnTo>
+                  <a:lnTo>
+                    <a:pt x="80308" y="2266109"/>
+                  </a:lnTo>
+                  <a:lnTo>
+                    <a:pt x="93693" y="2262721"/>
+                  </a:lnTo>
+                  <a:lnTo>
+                    <a:pt x="107078" y="2259341"/>
+                  </a:lnTo>
+                  <a:lnTo>
+                    <a:pt x="120463" y="2255967"/>
+                  </a:lnTo>
+                  <a:lnTo>
+                    <a:pt x="133848" y="2252591"/>
+                  </a:lnTo>
+                  <a:lnTo>
+                    <a:pt x="147233" y="2249209"/>
+                  </a:lnTo>
+                  <a:lnTo>
+                    <a:pt x="160617" y="2245817"/>
+                  </a:lnTo>
+                  <a:lnTo>
+                    <a:pt x="174002" y="2242399"/>
+                  </a:lnTo>
+                  <a:lnTo>
+                    <a:pt x="187387" y="2238957"/>
+                  </a:lnTo>
+                  <a:lnTo>
+                    <a:pt x="200772" y="2235490"/>
+                  </a:lnTo>
+                  <a:lnTo>
+                    <a:pt x="214157" y="2231961"/>
+                  </a:lnTo>
+                  <a:lnTo>
+                    <a:pt x="227542" y="2228389"/>
+                  </a:lnTo>
+                  <a:lnTo>
+                    <a:pt x="240926" y="2224772"/>
+                  </a:lnTo>
+                  <a:lnTo>
+                    <a:pt x="254311" y="2221066"/>
+                  </a:lnTo>
+                  <a:lnTo>
+                    <a:pt x="267696" y="2217285"/>
+                  </a:lnTo>
+                  <a:lnTo>
+                    <a:pt x="281081" y="2213437"/>
+                  </a:lnTo>
+                  <a:lnTo>
+                    <a:pt x="294466" y="2209480"/>
+                  </a:lnTo>
+                  <a:lnTo>
+                    <a:pt x="307851" y="2205407"/>
+                  </a:lnTo>
+                  <a:lnTo>
+                    <a:pt x="321235" y="2201245"/>
+                  </a:lnTo>
+                  <a:lnTo>
+                    <a:pt x="334620" y="2196958"/>
+                  </a:lnTo>
+                  <a:lnTo>
+                    <a:pt x="348005" y="2192512"/>
+                  </a:lnTo>
+                  <a:lnTo>
+                    <a:pt x="361390" y="2187953"/>
+                  </a:lnTo>
+                  <a:lnTo>
+                    <a:pt x="374775" y="2183265"/>
+                  </a:lnTo>
+                  <a:lnTo>
+                    <a:pt x="388160" y="2178366"/>
+                  </a:lnTo>
+                  <a:lnTo>
+                    <a:pt x="401544" y="2173335"/>
+                  </a:lnTo>
+                  <a:lnTo>
+                    <a:pt x="414929" y="2168172"/>
+                  </a:lnTo>
+                  <a:lnTo>
+                    <a:pt x="428314" y="2162757"/>
+                  </a:lnTo>
+                  <a:lnTo>
+                    <a:pt x="441699" y="2157189"/>
+                  </a:lnTo>
+                  <a:lnTo>
+                    <a:pt x="455084" y="2151473"/>
+                  </a:lnTo>
+                  <a:lnTo>
+                    <a:pt x="468469" y="2145508"/>
+                  </a:lnTo>
+                  <a:lnTo>
+                    <a:pt x="481853" y="2139351"/>
+                  </a:lnTo>
+                  <a:lnTo>
+                    <a:pt x="495238" y="2133034"/>
+                  </a:lnTo>
+                  <a:lnTo>
+                    <a:pt x="508623" y="2126481"/>
+                  </a:lnTo>
+                  <a:lnTo>
+                    <a:pt x="522008" y="2119700"/>
+                  </a:lnTo>
+                  <a:lnTo>
+                    <a:pt x="535393" y="2112752"/>
+                  </a:lnTo>
+                  <a:lnTo>
+                    <a:pt x="548778" y="2105590"/>
+                  </a:lnTo>
+                  <a:lnTo>
+                    <a:pt x="562162" y="2098167"/>
+                  </a:lnTo>
+                  <a:lnTo>
+                    <a:pt x="575547" y="2090575"/>
+                  </a:lnTo>
+                  <a:lnTo>
+                    <a:pt x="588932" y="2082798"/>
+                  </a:lnTo>
+                  <a:lnTo>
+                    <a:pt x="602317" y="2074732"/>
+                  </a:lnTo>
+                  <a:lnTo>
+                    <a:pt x="615702" y="2066502"/>
+                  </a:lnTo>
+                  <a:lnTo>
+                    <a:pt x="629087" y="2058107"/>
+                  </a:lnTo>
+                  <a:lnTo>
+                    <a:pt x="642471" y="2049427"/>
+                  </a:lnTo>
+                  <a:lnTo>
+                    <a:pt x="655856" y="2040578"/>
+                  </a:lnTo>
+                  <a:lnTo>
+                    <a:pt x="669241" y="2031573"/>
+                  </a:lnTo>
+                  <a:lnTo>
+                    <a:pt x="682626" y="2022324"/>
+                  </a:lnTo>
+                  <a:lnTo>
+                    <a:pt x="696011" y="2012891"/>
+                  </a:lnTo>
+                  <a:lnTo>
+                    <a:pt x="709396" y="2003313"/>
+                  </a:lnTo>
+                  <a:lnTo>
+                    <a:pt x="722780" y="1993531"/>
+                  </a:lnTo>
+                  <a:lnTo>
+                    <a:pt x="736165" y="1983557"/>
+                  </a:lnTo>
+                  <a:lnTo>
+                    <a:pt x="749550" y="1973449"/>
+                  </a:lnTo>
+                  <a:lnTo>
+                    <a:pt x="762935" y="1963179"/>
+                  </a:lnTo>
+                  <a:lnTo>
+                    <a:pt x="776320" y="1952710"/>
+                  </a:lnTo>
+                  <a:lnTo>
+                    <a:pt x="789705" y="1942122"/>
+                  </a:lnTo>
+                  <a:lnTo>
+                    <a:pt x="803089" y="1931405"/>
+                  </a:lnTo>
+                  <a:lnTo>
+                    <a:pt x="816474" y="1920491"/>
+                  </a:lnTo>
+                  <a:lnTo>
+                    <a:pt x="829859" y="1909468"/>
+                  </a:lnTo>
+                  <a:lnTo>
+                    <a:pt x="843244" y="1898339"/>
+                  </a:lnTo>
+                  <a:lnTo>
+                    <a:pt x="856629" y="1887031"/>
+                  </a:lnTo>
+                  <a:lnTo>
+                    <a:pt x="870014" y="1875616"/>
+                  </a:lnTo>
+                  <a:lnTo>
+                    <a:pt x="883398" y="1864103"/>
+                  </a:lnTo>
+                  <a:lnTo>
+                    <a:pt x="896783" y="1852442"/>
+                  </a:lnTo>
+                  <a:lnTo>
+                    <a:pt x="910168" y="1840666"/>
+                  </a:lnTo>
+                  <a:lnTo>
+                    <a:pt x="923553" y="1828799"/>
+                  </a:lnTo>
+                  <a:lnTo>
+                    <a:pt x="936938" y="1816808"/>
+                  </a:lnTo>
+                  <a:lnTo>
+                    <a:pt x="950323" y="1804690"/>
+                  </a:lnTo>
+                  <a:lnTo>
+                    <a:pt x="963707" y="1792484"/>
+                  </a:lnTo>
+                  <a:lnTo>
+                    <a:pt x="977092" y="1780172"/>
+                  </a:lnTo>
+                  <a:lnTo>
+                    <a:pt x="990477" y="1767718"/>
+                  </a:lnTo>
+                  <a:lnTo>
+                    <a:pt x="1003862" y="1755176"/>
+                  </a:lnTo>
+                  <a:lnTo>
+                    <a:pt x="1017247" y="1742539"/>
+                  </a:lnTo>
+                  <a:lnTo>
+                    <a:pt x="1030632" y="1729741"/>
+                  </a:lnTo>
+                  <a:lnTo>
+                    <a:pt x="1044016" y="1716848"/>
+                  </a:lnTo>
+                  <a:lnTo>
+                    <a:pt x="1057401" y="1703861"/>
+                  </a:lnTo>
+                  <a:lnTo>
+                    <a:pt x="1070786" y="1690707"/>
+                  </a:lnTo>
+                  <a:lnTo>
+                    <a:pt x="1084171" y="1677438"/>
+                  </a:lnTo>
+                  <a:lnTo>
+                    <a:pt x="1097556" y="1664066"/>
+                  </a:lnTo>
+                  <a:lnTo>
+                    <a:pt x="1110941" y="1650529"/>
+                  </a:lnTo>
+                  <a:lnTo>
+                    <a:pt x="1124325" y="1636848"/>
+                  </a:lnTo>
+                  <a:lnTo>
+                    <a:pt x="1137710" y="1623051"/>
+                  </a:lnTo>
+                  <a:lnTo>
+                    <a:pt x="1151095" y="1609092"/>
+                  </a:lnTo>
+                  <a:lnTo>
+                    <a:pt x="1164480" y="1594952"/>
+                  </a:lnTo>
+                  <a:lnTo>
+                    <a:pt x="1177865" y="1580684"/>
+                  </a:lnTo>
+                  <a:lnTo>
+                    <a:pt x="1191250" y="1566260"/>
+                  </a:lnTo>
+                  <a:lnTo>
+                    <a:pt x="1204634" y="1551613"/>
+                  </a:lnTo>
+                  <a:lnTo>
+                    <a:pt x="1218019" y="1536824"/>
+                  </a:lnTo>
+                  <a:lnTo>
+                    <a:pt x="1231404" y="1521890"/>
+                  </a:lnTo>
+                  <a:lnTo>
+                    <a:pt x="1244789" y="1506687"/>
+                  </a:lnTo>
+                  <a:lnTo>
+                    <a:pt x="1258174" y="1491330"/>
+                  </a:lnTo>
+                  <a:lnTo>
+                    <a:pt x="1271559" y="1475818"/>
+                  </a:lnTo>
+                  <a:lnTo>
+                    <a:pt x="1284943" y="1460039"/>
+                  </a:lnTo>
+                  <a:lnTo>
+                    <a:pt x="1298328" y="1444072"/>
+                  </a:lnTo>
+                  <a:lnTo>
+                    <a:pt x="1311713" y="1427941"/>
+                  </a:lnTo>
+                  <a:lnTo>
+                    <a:pt x="1325098" y="1411556"/>
+                  </a:lnTo>
+                  <a:lnTo>
+                    <a:pt x="1338483" y="1394947"/>
+                  </a:lnTo>
+                  <a:lnTo>
+                    <a:pt x="1351868" y="1378166"/>
+                  </a:lnTo>
+                  <a:lnTo>
+                    <a:pt x="1365252" y="1361154"/>
+                  </a:lnTo>
+                  <a:lnTo>
+                    <a:pt x="1378637" y="1343884"/>
+                  </a:lnTo>
+                  <a:lnTo>
+                    <a:pt x="1392022" y="1326440"/>
+                  </a:lnTo>
+                  <a:lnTo>
+                    <a:pt x="1405407" y="1308793"/>
+                  </a:lnTo>
+                  <a:lnTo>
+                    <a:pt x="1418792" y="1290859"/>
+                  </a:lnTo>
+                  <a:lnTo>
+                    <a:pt x="1432177" y="1272754"/>
+                  </a:lnTo>
+                  <a:lnTo>
+                    <a:pt x="1445561" y="1254478"/>
+                  </a:lnTo>
+                  <a:lnTo>
+                    <a:pt x="1458946" y="1235897"/>
+                  </a:lnTo>
+                  <a:lnTo>
+                    <a:pt x="1472331" y="1217152"/>
+                  </a:lnTo>
+                  <a:lnTo>
+                    <a:pt x="1485716" y="1198246"/>
+                  </a:lnTo>
+                  <a:lnTo>
+                    <a:pt x="1499101" y="1179079"/>
+                  </a:lnTo>
+                  <a:lnTo>
+                    <a:pt x="1512486" y="1159736"/>
+                  </a:lnTo>
+                  <a:lnTo>
+                    <a:pt x="1525870" y="1140246"/>
+                  </a:lnTo>
+                  <a:lnTo>
+                    <a:pt x="1539255" y="1120545"/>
+                  </a:lnTo>
+                  <a:lnTo>
+                    <a:pt x="1552640" y="1100665"/>
+                  </a:lnTo>
+                  <a:lnTo>
+                    <a:pt x="1566025" y="1080658"/>
+                  </a:lnTo>
+                  <a:lnTo>
+                    <a:pt x="1579410" y="1060491"/>
+                  </a:lnTo>
+                  <a:lnTo>
+                    <a:pt x="1592795" y="1040156"/>
+                  </a:lnTo>
+                  <a:lnTo>
+                    <a:pt x="1606179" y="1019719"/>
+                  </a:lnTo>
+                  <a:lnTo>
+                    <a:pt x="1619564" y="999171"/>
+                  </a:lnTo>
+                  <a:lnTo>
+                    <a:pt x="1632949" y="978480"/>
+                  </a:lnTo>
+                  <a:lnTo>
+                    <a:pt x="1646334" y="957718"/>
+                  </a:lnTo>
+                  <a:lnTo>
+                    <a:pt x="1659719" y="936887"/>
+                  </a:lnTo>
+                  <a:lnTo>
+                    <a:pt x="1673104" y="915960"/>
+                  </a:lnTo>
+                  <a:lnTo>
+                    <a:pt x="1686488" y="894993"/>
+                  </a:lnTo>
+                  <a:lnTo>
+                    <a:pt x="1699873" y="873992"/>
+                  </a:lnTo>
+                  <a:lnTo>
+                    <a:pt x="1713258" y="852959"/>
+                  </a:lnTo>
+                  <a:lnTo>
+                    <a:pt x="1726643" y="831921"/>
+                  </a:lnTo>
+                  <a:lnTo>
+                    <a:pt x="1740028" y="810887"/>
+                  </a:lnTo>
+                  <a:lnTo>
+                    <a:pt x="1753413" y="789876"/>
+                  </a:lnTo>
+                  <a:lnTo>
+                    <a:pt x="1766797" y="768911"/>
+                  </a:lnTo>
+                  <a:lnTo>
+                    <a:pt x="1780182" y="747990"/>
+                  </a:lnTo>
+                  <a:lnTo>
+                    <a:pt x="1793567" y="727136"/>
+                  </a:lnTo>
+                  <a:lnTo>
+                    <a:pt x="1806952" y="706392"/>
+                  </a:lnTo>
+                  <a:lnTo>
+                    <a:pt x="1820337" y="685733"/>
+                  </a:lnTo>
+                  <a:lnTo>
+                    <a:pt x="1833722" y="665174"/>
+                  </a:lnTo>
+                  <a:lnTo>
+                    <a:pt x="1847106" y="644802"/>
+                  </a:lnTo>
+                  <a:lnTo>
+                    <a:pt x="1860491" y="624555"/>
+                  </a:lnTo>
+                  <a:lnTo>
+                    <a:pt x="1873876" y="604436"/>
+                  </a:lnTo>
+                  <a:lnTo>
+                    <a:pt x="1887261" y="584575"/>
+                  </a:lnTo>
+                  <a:lnTo>
+                    <a:pt x="1900646" y="564886"/>
+                  </a:lnTo>
+                  <a:lnTo>
+                    <a:pt x="1914031" y="545363"/>
+                  </a:lnTo>
+                  <a:lnTo>
+                    <a:pt x="1927415" y="526128"/>
+                  </a:lnTo>
+                  <a:lnTo>
+                    <a:pt x="1940800" y="507133"/>
+                  </a:lnTo>
+                  <a:lnTo>
+                    <a:pt x="1954185" y="488339"/>
+                  </a:lnTo>
+                  <a:lnTo>
+                    <a:pt x="1967570" y="469847"/>
+                  </a:lnTo>
+                  <a:lnTo>
+                    <a:pt x="1980955" y="451670"/>
+                  </a:lnTo>
+                  <a:lnTo>
+                    <a:pt x="1994340" y="433725"/>
+                  </a:lnTo>
+                  <a:lnTo>
+                    <a:pt x="2007724" y="416080"/>
+                  </a:lnTo>
+                  <a:lnTo>
+                    <a:pt x="2021109" y="398827"/>
+                  </a:lnTo>
+                  <a:lnTo>
+                    <a:pt x="2034494" y="381831"/>
+                  </a:lnTo>
+                  <a:lnTo>
+                    <a:pt x="2047879" y="365119"/>
+                  </a:lnTo>
+                  <a:lnTo>
+                    <a:pt x="2061264" y="348877"/>
+                  </a:lnTo>
+                  <a:lnTo>
+                    <a:pt x="2074649" y="332913"/>
+                  </a:lnTo>
+                  <a:lnTo>
+                    <a:pt x="2088033" y="317227"/>
+                  </a:lnTo>
+                  <a:lnTo>
+                    <a:pt x="2101418" y="302038"/>
+                  </a:lnTo>
+                  <a:lnTo>
+                    <a:pt x="2114803" y="287163"/>
+                  </a:lnTo>
+                  <a:lnTo>
+                    <a:pt x="2128188" y="272580"/>
+                  </a:lnTo>
+                  <a:lnTo>
+                    <a:pt x="2141573" y="258461"/>
+                  </a:lnTo>
+                  <a:lnTo>
+                    <a:pt x="2154958" y="244715"/>
+                  </a:lnTo>
+                  <a:lnTo>
+                    <a:pt x="2168342" y="231268"/>
+                  </a:lnTo>
+                  <a:lnTo>
+                    <a:pt x="2181727" y="218241"/>
+                  </a:lnTo>
+                  <a:lnTo>
+                    <a:pt x="2195112" y="205643"/>
+                  </a:lnTo>
+                  <a:lnTo>
+                    <a:pt x="2208497" y="193345"/>
+                  </a:lnTo>
+                  <a:lnTo>
+                    <a:pt x="2221882" y="181419"/>
+                  </a:lnTo>
+                  <a:lnTo>
+                    <a:pt x="2235267" y="169972"/>
+                  </a:lnTo>
+                  <a:lnTo>
+                    <a:pt x="2248651" y="158824"/>
+                  </a:lnTo>
+                  <a:lnTo>
+                    <a:pt x="2262036" y="147994"/>
+                  </a:lnTo>
+                  <a:lnTo>
+                    <a:pt x="2275421" y="137691"/>
+                  </a:lnTo>
+                  <a:lnTo>
+                    <a:pt x="2288806" y="127683"/>
+                  </a:lnTo>
+                  <a:lnTo>
+                    <a:pt x="2302191" y="117971"/>
+                  </a:lnTo>
+                  <a:lnTo>
+                    <a:pt x="2315576" y="108765"/>
+                  </a:lnTo>
+                  <a:lnTo>
+                    <a:pt x="2328960" y="99885"/>
+                  </a:lnTo>
+                  <a:lnTo>
+                    <a:pt x="2342345" y="91296"/>
+                  </a:lnTo>
+                  <a:lnTo>
+                    <a:pt x="2355730" y="83159"/>
+                  </a:lnTo>
+                  <a:lnTo>
+                    <a:pt x="2369115" y="75395"/>
+                  </a:lnTo>
+                  <a:lnTo>
+                    <a:pt x="2382500" y="67921"/>
+                  </a:lnTo>
+                  <a:lnTo>
+                    <a:pt x="2395885" y="60848"/>
+                  </a:lnTo>
+                  <a:lnTo>
+                    <a:pt x="2409269" y="54199"/>
+                  </a:lnTo>
+                  <a:lnTo>
+                    <a:pt x="2422654" y="47842"/>
+                  </a:lnTo>
+                  <a:lnTo>
+                    <a:pt x="2436039" y="41840"/>
+                  </a:lnTo>
+                  <a:lnTo>
+                    <a:pt x="2449424" y="36319"/>
+                  </a:lnTo>
+                  <a:lnTo>
+                    <a:pt x="2462809" y="31097"/>
+                  </a:lnTo>
+                  <a:lnTo>
+                    <a:pt x="2476194" y="26186"/>
+                  </a:lnTo>
+                  <a:lnTo>
+                    <a:pt x="2489578" y="21824"/>
+                  </a:lnTo>
+                  <a:lnTo>
+                    <a:pt x="2502963" y="17773"/>
+                  </a:lnTo>
+                  <a:lnTo>
+                    <a:pt x="2516348" y="14035"/>
+                  </a:lnTo>
+                  <a:lnTo>
+                    <a:pt x="2529733" y="10837"/>
+                  </a:lnTo>
+                  <a:lnTo>
+                    <a:pt x="2543118" y="8012"/>
+                  </a:lnTo>
+                  <a:lnTo>
+                    <a:pt x="2556503" y="5518"/>
+                  </a:lnTo>
+                  <a:lnTo>
+                    <a:pt x="2569887" y="3536"/>
+                  </a:lnTo>
+                  <a:lnTo>
+                    <a:pt x="2583272" y="2009"/>
+                  </a:lnTo>
+                  <a:lnTo>
+                    <a:pt x="2596657" y="835"/>
+                  </a:lnTo>
+                  <a:lnTo>
+                    <a:pt x="2610042" y="144"/>
                   </a:lnTo>
                   <a:lnTo>
                     <a:pt x="2623427" y="0"/>
                   </a:lnTo>
                   <a:lnTo>
-                    <a:pt x="2636812" y="475"/>
-                  </a:lnTo>
-                  <a:lnTo>
-                    <a:pt x="2650196" y="1325"/>
-                  </a:lnTo>
-                  <a:lnTo>
-                    <a:pt x="2663581" y="2706"/>
-                  </a:lnTo>
-                  <a:lnTo>
-                    <a:pt x="2676966" y="4653"/>
-                  </a:lnTo>
-                  <a:lnTo>
-                    <a:pt x="2690351" y="6992"/>
-                  </a:lnTo>
-                  <a:lnTo>
-                    <a:pt x="2703736" y="9831"/>
-                  </a:lnTo>
-                  <a:lnTo>
-                    <a:pt x="2717121" y="13315"/>
-                  </a:lnTo>
-                  <a:lnTo>
-                    <a:pt x="2730505" y="17206"/>
-                  </a:lnTo>
-                  <a:lnTo>
-                    <a:pt x="2743890" y="21556"/>
-                  </a:lnTo>
-                  <a:lnTo>
-                    <a:pt x="2757275" y="26626"/>
-                  </a:lnTo>
-                  <a:lnTo>
-                    <a:pt x="2770660" y="32112"/>
-                  </a:lnTo>
-                  <a:lnTo>
-                    <a:pt x="2784045" y="38014"/>
-                  </a:lnTo>
-                  <a:lnTo>
-                    <a:pt x="2797430" y="44682"/>
-                  </a:lnTo>
-                  <a:lnTo>
-                    <a:pt x="2810814" y="51775"/>
-                  </a:lnTo>
-                  <a:lnTo>
-                    <a:pt x="2824199" y="59283"/>
-                  </a:lnTo>
-                  <a:lnTo>
-                    <a:pt x="2837584" y="67488"/>
-                  </a:lnTo>
-                  <a:lnTo>
-                    <a:pt x="2850969" y="76163"/>
-                  </a:lnTo>
-                  <a:lnTo>
-                    <a:pt x="2864354" y="85240"/>
-                  </a:lnTo>
-                  <a:lnTo>
-                    <a:pt x="2877739" y="94931"/>
-                  </a:lnTo>
-                  <a:lnTo>
-                    <a:pt x="2891123" y="105121"/>
-                  </a:lnTo>
-                  <a:lnTo>
-                    <a:pt x="2904508" y="115687"/>
-                  </a:lnTo>
-                  <a:lnTo>
-                    <a:pt x="2917893" y="126772"/>
-                  </a:lnTo>
-                  <a:lnTo>
-                    <a:pt x="2931278" y="138362"/>
-                  </a:lnTo>
-                  <a:lnTo>
-                    <a:pt x="2944663" y="150290"/>
-                  </a:lnTo>
-                  <a:lnTo>
-                    <a:pt x="2958048" y="162634"/>
-                  </a:lnTo>
-                  <a:lnTo>
-                    <a:pt x="2971432" y="175463"/>
-                  </a:lnTo>
-                  <a:lnTo>
-                    <a:pt x="2984817" y="188577"/>
-                  </a:lnTo>
-                  <a:lnTo>
-                    <a:pt x="2998202" y="202006"/>
-                  </a:lnTo>
-                  <a:lnTo>
-                    <a:pt x="3011587" y="215866"/>
-                  </a:lnTo>
-                  <a:lnTo>
-                    <a:pt x="3024972" y="229950"/>
-                  </a:lnTo>
-                  <a:lnTo>
-                    <a:pt x="3038357" y="244253"/>
-                  </a:lnTo>
-                  <a:lnTo>
-                    <a:pt x="3051741" y="258899"/>
-                  </a:lnTo>
-                  <a:lnTo>
-                    <a:pt x="3065126" y="273700"/>
-                  </a:lnTo>
-                  <a:lnTo>
-                    <a:pt x="3078511" y="288647"/>
-                  </a:lnTo>
-                  <a:lnTo>
-                    <a:pt x="3091896" y="303793"/>
-                  </a:lnTo>
-                  <a:lnTo>
-                    <a:pt x="3105281" y="319033"/>
-                  </a:lnTo>
-                  <a:lnTo>
-                    <a:pt x="3118666" y="334342"/>
-                  </a:lnTo>
-                  <a:lnTo>
-                    <a:pt x="3132050" y="349719"/>
-                  </a:lnTo>
-                  <a:lnTo>
-                    <a:pt x="3145435" y="365107"/>
-                  </a:lnTo>
-                  <a:lnTo>
-                    <a:pt x="3158820" y="380485"/>
-                  </a:lnTo>
-                  <a:lnTo>
-                    <a:pt x="3172205" y="395823"/>
-                  </a:lnTo>
-                  <a:lnTo>
-                    <a:pt x="3185590" y="411068"/>
-                  </a:lnTo>
-                  <a:lnTo>
-                    <a:pt x="3198975" y="426230"/>
-                  </a:lnTo>
-                  <a:lnTo>
-                    <a:pt x="3212359" y="441266"/>
-                  </a:lnTo>
-                  <a:lnTo>
-                    <a:pt x="3225744" y="456096"/>
-                  </a:lnTo>
-                  <a:lnTo>
-                    <a:pt x="3239129" y="470774"/>
-                  </a:lnTo>
-                  <a:lnTo>
-                    <a:pt x="3252514" y="485270"/>
-                  </a:lnTo>
-                  <a:lnTo>
-                    <a:pt x="3265899" y="499442"/>
-                  </a:lnTo>
-                  <a:lnTo>
-                    <a:pt x="3279284" y="513404"/>
-                  </a:lnTo>
-                  <a:lnTo>
-                    <a:pt x="3292668" y="527153"/>
-                  </a:lnTo>
-                  <a:lnTo>
-                    <a:pt x="3306053" y="540467"/>
-                  </a:lnTo>
-                  <a:lnTo>
-                    <a:pt x="3319438" y="553527"/>
-                  </a:lnTo>
-                  <a:lnTo>
-                    <a:pt x="3332823" y="566332"/>
-                  </a:lnTo>
-                  <a:lnTo>
-                    <a:pt x="3346208" y="578678"/>
-                  </a:lnTo>
-                  <a:lnTo>
-                    <a:pt x="3359593" y="590705"/>
-                  </a:lnTo>
-                  <a:lnTo>
-                    <a:pt x="3372977" y="602450"/>
-                  </a:lnTo>
-                  <a:lnTo>
-                    <a:pt x="3386362" y="613746"/>
-                  </a:lnTo>
-                  <a:lnTo>
-                    <a:pt x="3399747" y="624670"/>
-                  </a:lnTo>
-                  <a:lnTo>
-                    <a:pt x="3413132" y="635304"/>
-                  </a:lnTo>
-                  <a:lnTo>
-                    <a:pt x="3426517" y="645524"/>
-                  </a:lnTo>
-                  <a:lnTo>
-                    <a:pt x="3439902" y="655338"/>
-                  </a:lnTo>
-                  <a:lnTo>
-                    <a:pt x="3453286" y="664871"/>
-                  </a:lnTo>
-                  <a:lnTo>
-                    <a:pt x="3466671" y="674047"/>
-                  </a:lnTo>
-                  <a:lnTo>
-                    <a:pt x="3480056" y="682806"/>
-                  </a:lnTo>
-                  <a:lnTo>
-                    <a:pt x="3493441" y="691309"/>
-                  </a:lnTo>
-                  <a:lnTo>
-                    <a:pt x="3506826" y="699524"/>
-                  </a:lnTo>
-                  <a:lnTo>
-                    <a:pt x="3520211" y="707339"/>
-                  </a:lnTo>
-                  <a:lnTo>
-                    <a:pt x="3533595" y="714936"/>
-                  </a:lnTo>
-                  <a:lnTo>
-                    <a:pt x="3546980" y="722319"/>
-                  </a:lnTo>
-                  <a:lnTo>
-                    <a:pt x="3560365" y="729346"/>
-                  </a:lnTo>
-                  <a:lnTo>
-                    <a:pt x="3573750" y="736205"/>
-                  </a:lnTo>
-                  <a:lnTo>
-                    <a:pt x="3587135" y="742900"/>
-                  </a:lnTo>
-                  <a:lnTo>
-                    <a:pt x="3600520" y="749351"/>
-                  </a:lnTo>
-                  <a:lnTo>
-                    <a:pt x="3613904" y="755671"/>
-                  </a:lnTo>
-                  <a:lnTo>
-                    <a:pt x="3627289" y="761883"/>
-                  </a:lnTo>
-                  <a:lnTo>
-                    <a:pt x="3640674" y="767956"/>
-                  </a:lnTo>
-                  <a:lnTo>
-                    <a:pt x="3654059" y="773952"/>
-                  </a:lnTo>
-                  <a:lnTo>
-                    <a:pt x="3667444" y="779899"/>
-                  </a:lnTo>
-                  <a:lnTo>
-                    <a:pt x="3680829" y="785799"/>
-                  </a:lnTo>
-                  <a:lnTo>
-                    <a:pt x="3694213" y="791689"/>
-                  </a:lnTo>
-                  <a:lnTo>
-                    <a:pt x="3707598" y="797588"/>
-                  </a:lnTo>
-                  <a:lnTo>
-                    <a:pt x="3720983" y="803511"/>
-                  </a:lnTo>
-                  <a:lnTo>
-                    <a:pt x="3734368" y="809504"/>
-                  </a:lnTo>
-                  <a:lnTo>
-                    <a:pt x="3747753" y="815556"/>
-                  </a:lnTo>
-                  <a:lnTo>
-                    <a:pt x="3761138" y="821686"/>
-                  </a:lnTo>
-                  <a:lnTo>
-                    <a:pt x="3774522" y="827965"/>
-                  </a:lnTo>
-                  <a:lnTo>
-                    <a:pt x="3787907" y="834347"/>
-                  </a:lnTo>
-                  <a:lnTo>
-                    <a:pt x="3801292" y="840837"/>
-                  </a:lnTo>
-                  <a:lnTo>
-                    <a:pt x="3814677" y="847554"/>
-                  </a:lnTo>
-                  <a:lnTo>
-                    <a:pt x="3828062" y="854408"/>
-                  </a:lnTo>
-                  <a:lnTo>
-                    <a:pt x="3841447" y="861400"/>
-                  </a:lnTo>
-                  <a:lnTo>
-                    <a:pt x="3854831" y="868648"/>
-                  </a:lnTo>
-                  <a:lnTo>
-                    <a:pt x="3868216" y="876074"/>
-                  </a:lnTo>
-                  <a:lnTo>
-                    <a:pt x="3881601" y="883658"/>
-                  </a:lnTo>
-                  <a:lnTo>
-                    <a:pt x="3894986" y="891501"/>
-                  </a:lnTo>
-                  <a:lnTo>
-                    <a:pt x="3908371" y="899555"/>
-                  </a:lnTo>
-                  <a:lnTo>
-                    <a:pt x="3921756" y="907776"/>
-                  </a:lnTo>
-                  <a:lnTo>
-                    <a:pt x="3935140" y="916239"/>
-                  </a:lnTo>
-                  <a:lnTo>
-                    <a:pt x="3948525" y="924936"/>
-                  </a:lnTo>
-                  <a:lnTo>
-                    <a:pt x="3961910" y="933797"/>
-                  </a:lnTo>
-                  <a:lnTo>
-                    <a:pt x="3975295" y="942869"/>
-                  </a:lnTo>
-                  <a:lnTo>
-                    <a:pt x="3988680" y="952184"/>
-                  </a:lnTo>
-                  <a:lnTo>
-                    <a:pt x="4002065" y="961650"/>
-                  </a:lnTo>
-                  <a:lnTo>
-                    <a:pt x="4015449" y="971289"/>
-                  </a:lnTo>
-                  <a:lnTo>
-                    <a:pt x="4028834" y="981164"/>
-                  </a:lnTo>
-                  <a:lnTo>
-                    <a:pt x="4042219" y="991169"/>
-                  </a:lnTo>
-                  <a:lnTo>
-                    <a:pt x="4055604" y="1001306"/>
-                  </a:lnTo>
-                  <a:lnTo>
-                    <a:pt x="4068989" y="1011657"/>
-                  </a:lnTo>
-                  <a:lnTo>
-                    <a:pt x="4082374" y="1022113"/>
-                  </a:lnTo>
-                  <a:lnTo>
-                    <a:pt x="4095758" y="1032672"/>
-                  </a:lnTo>
-                  <a:lnTo>
-                    <a:pt x="4109143" y="1043389"/>
-                  </a:lnTo>
-                  <a:lnTo>
-                    <a:pt x="4122528" y="1054193"/>
-                  </a:lnTo>
-                  <a:lnTo>
-                    <a:pt x="4135913" y="1065071"/>
-                  </a:lnTo>
-                  <a:lnTo>
-                    <a:pt x="4149298" y="1076051"/>
-                  </a:lnTo>
-                  <a:lnTo>
-                    <a:pt x="4162683" y="1087096"/>
-                  </a:lnTo>
-                  <a:lnTo>
-                    <a:pt x="4176067" y="1098185"/>
-                  </a:lnTo>
-                  <a:lnTo>
-                    <a:pt x="4189452" y="1109329"/>
-                  </a:lnTo>
-                  <a:lnTo>
-                    <a:pt x="4202837" y="1120508"/>
-                  </a:lnTo>
-                  <a:lnTo>
-                    <a:pt x="4216222" y="1131707"/>
-                  </a:lnTo>
-                  <a:lnTo>
-                    <a:pt x="4229607" y="1142922"/>
-                  </a:lnTo>
-                  <a:lnTo>
-                    <a:pt x="4242992" y="1154142"/>
-                  </a:lnTo>
-                  <a:lnTo>
-                    <a:pt x="4256376" y="1165358"/>
-                  </a:lnTo>
-                  <a:lnTo>
-                    <a:pt x="4269761" y="1176566"/>
-                  </a:lnTo>
-                  <a:lnTo>
-                    <a:pt x="4283146" y="1187747"/>
-                  </a:lnTo>
-                  <a:lnTo>
-                    <a:pt x="4296531" y="1198906"/>
-                  </a:lnTo>
-                  <a:lnTo>
-                    <a:pt x="4309916" y="1210041"/>
-                  </a:lnTo>
-                  <a:lnTo>
-                    <a:pt x="4323301" y="1221123"/>
-                  </a:lnTo>
-                  <a:lnTo>
-                    <a:pt x="4336685" y="1232170"/>
-                  </a:lnTo>
-                  <a:lnTo>
-                    <a:pt x="4350070" y="1243183"/>
-                  </a:lnTo>
-                  <a:lnTo>
-                    <a:pt x="4363455" y="1254128"/>
-                  </a:lnTo>
-                  <a:lnTo>
-                    <a:pt x="4376840" y="1265029"/>
-                  </a:lnTo>
-                  <a:lnTo>
-                    <a:pt x="4390225" y="1275889"/>
-                  </a:lnTo>
-                  <a:lnTo>
-                    <a:pt x="4403610" y="1286681"/>
-                  </a:lnTo>
-                  <a:lnTo>
-                    <a:pt x="4416994" y="1297420"/>
-                  </a:lnTo>
-                  <a:lnTo>
-                    <a:pt x="4430379" y="1308117"/>
-                  </a:lnTo>
-                  <a:lnTo>
-                    <a:pt x="4443764" y="1318753"/>
-                  </a:lnTo>
-                  <a:lnTo>
-                    <a:pt x="4457149" y="1329333"/>
-                  </a:lnTo>
-                  <a:lnTo>
-                    <a:pt x="4470534" y="1339875"/>
-                  </a:lnTo>
-                  <a:lnTo>
-                    <a:pt x="4483919" y="1350366"/>
-                  </a:lnTo>
-                  <a:lnTo>
-                    <a:pt x="4497303" y="1360804"/>
-                  </a:lnTo>
-                  <a:lnTo>
-                    <a:pt x="4510688" y="1371210"/>
-                  </a:lnTo>
-                  <a:lnTo>
-                    <a:pt x="4524073" y="1381579"/>
-                  </a:lnTo>
-                  <a:lnTo>
-                    <a:pt x="4537458" y="1391903"/>
-                  </a:lnTo>
-                  <a:lnTo>
-                    <a:pt x="4550843" y="1402203"/>
-                  </a:lnTo>
-                  <a:lnTo>
-                    <a:pt x="4564228" y="1412479"/>
-                  </a:lnTo>
-                  <a:lnTo>
-                    <a:pt x="4577612" y="1422722"/>
-                  </a:lnTo>
-                  <a:lnTo>
-                    <a:pt x="4590997" y="1432951"/>
-                  </a:lnTo>
-                  <a:lnTo>
-                    <a:pt x="4604382" y="1443167"/>
-                  </a:lnTo>
-                  <a:lnTo>
-                    <a:pt x="4617767" y="1453366"/>
-                  </a:lnTo>
-                  <a:lnTo>
-                    <a:pt x="4631152" y="1463561"/>
-                  </a:lnTo>
-                  <a:lnTo>
-                    <a:pt x="4644537" y="1473751"/>
-                  </a:lnTo>
-                  <a:lnTo>
-                    <a:pt x="4657921" y="1483940"/>
-                  </a:lnTo>
-                  <a:lnTo>
-                    <a:pt x="4671306" y="1494134"/>
-                  </a:lnTo>
-                  <a:lnTo>
-                    <a:pt x="4684691" y="1504331"/>
-                  </a:lnTo>
-                  <a:lnTo>
-                    <a:pt x="4698076" y="1514538"/>
-                  </a:lnTo>
-                  <a:lnTo>
-                    <a:pt x="4711461" y="1524758"/>
-                  </a:lnTo>
-                  <a:lnTo>
-                    <a:pt x="4724846" y="1534989"/>
-                  </a:lnTo>
-                  <a:lnTo>
-                    <a:pt x="4738230" y="1545236"/>
-                  </a:lnTo>
-                  <a:lnTo>
-                    <a:pt x="4751615" y="1555503"/>
-                  </a:lnTo>
-                  <a:lnTo>
-                    <a:pt x="4765000" y="1565785"/>
-                  </a:lnTo>
-                  <a:lnTo>
-                    <a:pt x="4778385" y="1576085"/>
-                  </a:lnTo>
-                  <a:lnTo>
-                    <a:pt x="4791770" y="1586411"/>
-                  </a:lnTo>
-                  <a:lnTo>
-                    <a:pt x="4805155" y="1596752"/>
-                  </a:lnTo>
-                  <a:lnTo>
-                    <a:pt x="4818539" y="1607109"/>
-                  </a:lnTo>
-                  <a:lnTo>
-                    <a:pt x="4831924" y="1617494"/>
-                  </a:lnTo>
-                  <a:lnTo>
-                    <a:pt x="4845309" y="1627892"/>
-                  </a:lnTo>
-                  <a:lnTo>
-                    <a:pt x="4858694" y="1638304"/>
-                  </a:lnTo>
-                  <a:lnTo>
-                    <a:pt x="4872079" y="1648736"/>
-                  </a:lnTo>
-                  <a:lnTo>
-                    <a:pt x="4885464" y="1659179"/>
-                  </a:lnTo>
-                  <a:lnTo>
-                    <a:pt x="4898848" y="1669630"/>
-                  </a:lnTo>
-                  <a:lnTo>
-                    <a:pt x="4912233" y="1680091"/>
-                  </a:lnTo>
-                  <a:lnTo>
-                    <a:pt x="4925618" y="1690556"/>
-                  </a:lnTo>
-                  <a:lnTo>
-                    <a:pt x="4939003" y="1701021"/>
-                  </a:lnTo>
-                  <a:lnTo>
-                    <a:pt x="4952388" y="1711485"/>
-                  </a:lnTo>
-                  <a:lnTo>
-                    <a:pt x="4965773" y="1721941"/>
-                  </a:lnTo>
-                  <a:lnTo>
-                    <a:pt x="4979157" y="1732388"/>
-                  </a:lnTo>
-                  <a:lnTo>
-                    <a:pt x="4992542" y="1742822"/>
-                  </a:lnTo>
-                  <a:lnTo>
-                    <a:pt x="5005927" y="1753231"/>
-                  </a:lnTo>
-                  <a:lnTo>
-                    <a:pt x="5019312" y="1763620"/>
-                  </a:lnTo>
-                  <a:lnTo>
-                    <a:pt x="5032697" y="1773985"/>
-                  </a:lnTo>
-                  <a:lnTo>
-                    <a:pt x="5046082" y="1784305"/>
-                  </a:lnTo>
-                  <a:lnTo>
-                    <a:pt x="5059466" y="1794593"/>
-                  </a:lnTo>
-                  <a:lnTo>
-                    <a:pt x="5072851" y="1804846"/>
-                  </a:lnTo>
-                  <a:lnTo>
-                    <a:pt x="5086236" y="1815031"/>
-                  </a:lnTo>
-                  <a:lnTo>
-                    <a:pt x="5099621" y="1825171"/>
-                  </a:lnTo>
-                  <a:lnTo>
-                    <a:pt x="5113006" y="1835267"/>
-                  </a:lnTo>
-                  <a:lnTo>
-                    <a:pt x="5126391" y="1845273"/>
-                  </a:lnTo>
-                  <a:lnTo>
-                    <a:pt x="5139775" y="1855220"/>
-                  </a:lnTo>
-                  <a:lnTo>
-                    <a:pt x="5153160" y="1865109"/>
-                  </a:lnTo>
-                  <a:lnTo>
-                    <a:pt x="5166545" y="1874898"/>
-                  </a:lnTo>
-                  <a:lnTo>
-                    <a:pt x="5179930" y="1884605"/>
-                  </a:lnTo>
-                  <a:lnTo>
-                    <a:pt x="5193315" y="1894244"/>
-                  </a:lnTo>
-                  <a:lnTo>
-                    <a:pt x="5206700" y="1903777"/>
-                  </a:lnTo>
-                  <a:lnTo>
-                    <a:pt x="5220084" y="1913205"/>
-                  </a:lnTo>
-                  <a:lnTo>
-                    <a:pt x="5233469" y="1922555"/>
-                  </a:lnTo>
-                  <a:lnTo>
-                    <a:pt x="5246854" y="1931797"/>
-                  </a:lnTo>
-                  <a:lnTo>
-                    <a:pt x="5260239" y="1940911"/>
-                  </a:lnTo>
-                  <a:lnTo>
-                    <a:pt x="5273624" y="1949939"/>
-                  </a:lnTo>
-                  <a:lnTo>
-                    <a:pt x="5287009" y="1958861"/>
-                  </a:lnTo>
-                  <a:lnTo>
-                    <a:pt x="5300393" y="1967633"/>
-                  </a:lnTo>
-                  <a:lnTo>
-                    <a:pt x="5313778" y="1976313"/>
-                  </a:lnTo>
-                  <a:lnTo>
-                    <a:pt x="5327163" y="1984894"/>
-                  </a:lnTo>
-                  <a:lnTo>
-                    <a:pt x="5340548" y="1993304"/>
-                  </a:lnTo>
-                  <a:lnTo>
-                    <a:pt x="5353933" y="2001618"/>
-                  </a:lnTo>
-                  <a:lnTo>
-                    <a:pt x="5367318" y="2009836"/>
-                  </a:lnTo>
-                  <a:lnTo>
-                    <a:pt x="5380702" y="2017881"/>
-                  </a:lnTo>
-                  <a:lnTo>
-                    <a:pt x="5394087" y="2025820"/>
-                  </a:lnTo>
-                  <a:lnTo>
-                    <a:pt x="5407472" y="2033661"/>
-                  </a:lnTo>
-                  <a:lnTo>
-                    <a:pt x="5420857" y="2041343"/>
-                  </a:lnTo>
-                  <a:lnTo>
-                    <a:pt x="5434242" y="2048905"/>
-                  </a:lnTo>
-                  <a:lnTo>
-                    <a:pt x="5447627" y="2056371"/>
-                  </a:lnTo>
-                  <a:lnTo>
-                    <a:pt x="5461011" y="2063693"/>
-                  </a:lnTo>
-                  <a:lnTo>
-                    <a:pt x="5474396" y="2070885"/>
-                  </a:lnTo>
-                  <a:lnTo>
-                    <a:pt x="5487781" y="2077982"/>
-                  </a:lnTo>
-                  <a:lnTo>
-                    <a:pt x="5501166" y="2084953"/>
-                  </a:lnTo>
-                  <a:lnTo>
-                    <a:pt x="5514551" y="2091786"/>
-                  </a:lnTo>
-                  <a:lnTo>
-                    <a:pt x="5527936" y="2098529"/>
-                  </a:lnTo>
-                  <a:lnTo>
-                    <a:pt x="5541320" y="2105162"/>
-                  </a:lnTo>
-                  <a:lnTo>
-                    <a:pt x="5554705" y="2111652"/>
-                  </a:lnTo>
-                  <a:lnTo>
-                    <a:pt x="5568090" y="2118057"/>
-                  </a:lnTo>
-                  <a:lnTo>
-                    <a:pt x="5581475" y="2124370"/>
-                  </a:lnTo>
-                  <a:lnTo>
-                    <a:pt x="5594860" y="2130536"/>
-                  </a:lnTo>
-                  <a:lnTo>
-                    <a:pt x="5608245" y="2136622"/>
-                  </a:lnTo>
-                  <a:lnTo>
-                    <a:pt x="5621629" y="2142627"/>
-                  </a:lnTo>
-                  <a:lnTo>
-                    <a:pt x="5635014" y="2148494"/>
-                  </a:lnTo>
-                  <a:lnTo>
-                    <a:pt x="5648399" y="2154280"/>
-                  </a:lnTo>
-                  <a:lnTo>
-                    <a:pt x="5661784" y="2159992"/>
-                  </a:lnTo>
-                  <a:lnTo>
-                    <a:pt x="5675169" y="2165583"/>
-                  </a:lnTo>
-                  <a:lnTo>
-                    <a:pt x="5688554" y="2171088"/>
-                  </a:lnTo>
-                  <a:lnTo>
-                    <a:pt x="5701938" y="2176523"/>
-                  </a:lnTo>
-                  <a:lnTo>
-                    <a:pt x="5715323" y="2181853"/>
-                  </a:lnTo>
-                  <a:lnTo>
-                    <a:pt x="5728708" y="2187092"/>
-                  </a:lnTo>
-                  <a:lnTo>
-                    <a:pt x="5742093" y="2192265"/>
-                  </a:lnTo>
-                  <a:lnTo>
-                    <a:pt x="5755478" y="2197347"/>
-                  </a:lnTo>
-                  <a:lnTo>
-                    <a:pt x="5768863" y="2202331"/>
-                  </a:lnTo>
-                  <a:lnTo>
-                    <a:pt x="5782247" y="2207251"/>
-                  </a:lnTo>
-                  <a:lnTo>
-                    <a:pt x="5795632" y="2212092"/>
-                  </a:lnTo>
-                  <a:lnTo>
-                    <a:pt x="5809017" y="2216829"/>
-                  </a:lnTo>
-                  <a:lnTo>
-                    <a:pt x="5822402" y="2221502"/>
-                  </a:lnTo>
-                  <a:lnTo>
-                    <a:pt x="5835787" y="2226107"/>
-                  </a:lnTo>
-                  <a:lnTo>
-                    <a:pt x="5849172" y="2230597"/>
-                  </a:lnTo>
-                  <a:lnTo>
-                    <a:pt x="5862556" y="2235024"/>
-                  </a:lnTo>
-                  <a:lnTo>
-                    <a:pt x="5875941" y="2239387"/>
-                  </a:lnTo>
-                  <a:lnTo>
-                    <a:pt x="5889326" y="2243633"/>
-                  </a:lnTo>
-                  <a:lnTo>
-                    <a:pt x="5902711" y="2247810"/>
-                  </a:lnTo>
-                  <a:lnTo>
-                    <a:pt x="5916096" y="2251921"/>
-                  </a:lnTo>
-                  <a:lnTo>
-                    <a:pt x="5929481" y="2255922"/>
-                  </a:lnTo>
-                  <a:lnTo>
-                    <a:pt x="5942865" y="2259841"/>
-                  </a:lnTo>
-                  <a:lnTo>
-                    <a:pt x="5956250" y="2263693"/>
-                  </a:lnTo>
-                  <a:lnTo>
-                    <a:pt x="5969635" y="2267440"/>
-                  </a:lnTo>
-                  <a:lnTo>
-                    <a:pt x="5983020" y="2271092"/>
-                  </a:lnTo>
-                  <a:lnTo>
-                    <a:pt x="5996405" y="2274674"/>
-                  </a:lnTo>
-                  <a:lnTo>
-                    <a:pt x="6009790" y="2278158"/>
-                  </a:lnTo>
-                  <a:lnTo>
-                    <a:pt x="6023174" y="2281533"/>
-                  </a:lnTo>
-                  <a:lnTo>
-                    <a:pt x="6036559" y="2284835"/>
-                  </a:lnTo>
-                  <a:lnTo>
-                    <a:pt x="6049944" y="2288045"/>
-                  </a:lnTo>
-                  <a:lnTo>
-                    <a:pt x="6063329" y="2291133"/>
-                  </a:lnTo>
-                  <a:lnTo>
-                    <a:pt x="6076714" y="2294145"/>
-                  </a:lnTo>
-                  <a:lnTo>
-                    <a:pt x="6090099" y="2297074"/>
-                  </a:lnTo>
-                  <a:lnTo>
-                    <a:pt x="6103483" y="2299867"/>
-                  </a:lnTo>
-                  <a:lnTo>
-                    <a:pt x="6116868" y="2302582"/>
-                  </a:lnTo>
-                  <a:lnTo>
-                    <a:pt x="6130253" y="2305221"/>
-                  </a:lnTo>
-                  <a:lnTo>
-                    <a:pt x="6143638" y="2307719"/>
-                  </a:lnTo>
-                  <a:lnTo>
-                    <a:pt x="6157023" y="2310135"/>
-                  </a:lnTo>
-                  <a:lnTo>
-                    <a:pt x="6170408" y="2312474"/>
-                  </a:lnTo>
-                  <a:lnTo>
-                    <a:pt x="6183792" y="2314685"/>
-                  </a:lnTo>
-                  <a:lnTo>
-                    <a:pt x="6197177" y="2316805"/>
-                  </a:lnTo>
-                  <a:lnTo>
-                    <a:pt x="6210562" y="2318849"/>
-                  </a:lnTo>
-                  <a:lnTo>
-                    <a:pt x="6223947" y="2320778"/>
-                  </a:lnTo>
-                  <a:lnTo>
-                    <a:pt x="6237332" y="2322610"/>
-                  </a:lnTo>
-                  <a:lnTo>
-                    <a:pt x="6250717" y="2324370"/>
-                  </a:lnTo>
-                  <a:lnTo>
-                    <a:pt x="6264101" y="2326030"/>
-                  </a:lnTo>
-                  <a:lnTo>
-                    <a:pt x="6277486" y="2327589"/>
-                  </a:lnTo>
-                  <a:lnTo>
-                    <a:pt x="6290871" y="2329081"/>
-                  </a:lnTo>
-                  <a:lnTo>
-                    <a:pt x="6304256" y="2330490"/>
-                  </a:lnTo>
-                  <a:lnTo>
-                    <a:pt x="6317641" y="2331798"/>
-                  </a:lnTo>
-                  <a:lnTo>
-                    <a:pt x="6331026" y="2333045"/>
-                  </a:lnTo>
-                  <a:lnTo>
-                    <a:pt x="6344410" y="2334228"/>
-                  </a:lnTo>
-                  <a:lnTo>
-                    <a:pt x="6357795" y="2335312"/>
-                  </a:lnTo>
-                  <a:lnTo>
-                    <a:pt x="6371180" y="2336345"/>
-                  </a:lnTo>
-                  <a:lnTo>
-                    <a:pt x="6384565" y="2337326"/>
-                  </a:lnTo>
-                  <a:lnTo>
-                    <a:pt x="6397950" y="2338223"/>
-                  </a:lnTo>
-                  <a:lnTo>
-                    <a:pt x="6411335" y="2339075"/>
-                  </a:lnTo>
-                  <a:lnTo>
-                    <a:pt x="6424719" y="2339887"/>
-                  </a:lnTo>
-                  <a:lnTo>
-                    <a:pt x="6438104" y="2340636"/>
-                  </a:lnTo>
-                  <a:lnTo>
-                    <a:pt x="6451489" y="2341347"/>
-                  </a:lnTo>
-                  <a:lnTo>
-                    <a:pt x="6464874" y="2342028"/>
-                  </a:lnTo>
-                  <a:lnTo>
-                    <a:pt x="6478259" y="2342667"/>
-                  </a:lnTo>
-                  <a:lnTo>
-                    <a:pt x="6491644" y="2343278"/>
-                  </a:lnTo>
-                  <a:lnTo>
-                    <a:pt x="6505028" y="2343869"/>
-                  </a:lnTo>
-                  <a:lnTo>
-                    <a:pt x="6518413" y="2344438"/>
-                  </a:lnTo>
-                  <a:lnTo>
-                    <a:pt x="6531798" y="2344989"/>
-                  </a:lnTo>
-                  <a:lnTo>
-                    <a:pt x="6545183" y="2345533"/>
-                  </a:lnTo>
-                  <a:lnTo>
-                    <a:pt x="6558568" y="2346069"/>
-                  </a:lnTo>
-                  <a:lnTo>
-                    <a:pt x="6571953" y="2346603"/>
-                  </a:lnTo>
-                  <a:lnTo>
-                    <a:pt x="6585337" y="2347139"/>
-                  </a:lnTo>
-                  <a:lnTo>
-                    <a:pt x="6598722" y="2347679"/>
-                  </a:lnTo>
-                  <a:lnTo>
-                    <a:pt x="6612107" y="2348233"/>
-                  </a:lnTo>
-                  <a:lnTo>
-                    <a:pt x="6625492" y="2348798"/>
-                  </a:lnTo>
-                  <a:lnTo>
-                    <a:pt x="6638877" y="2349376"/>
-                  </a:lnTo>
-                  <a:lnTo>
-                    <a:pt x="6652262" y="2349984"/>
-                  </a:lnTo>
-                  <a:lnTo>
-                    <a:pt x="6665646" y="2350612"/>
-                  </a:lnTo>
-                  <a:lnTo>
-                    <a:pt x="6679031" y="2351260"/>
-                  </a:lnTo>
-                  <a:lnTo>
-                    <a:pt x="6692416" y="2351946"/>
-                  </a:lnTo>
-                  <a:lnTo>
-                    <a:pt x="6705801" y="2352663"/>
-                  </a:lnTo>
-                  <a:lnTo>
-                    <a:pt x="6719186" y="2353406"/>
-                  </a:lnTo>
-                  <a:lnTo>
-                    <a:pt x="6732571" y="2354193"/>
-                  </a:lnTo>
-                  <a:lnTo>
-                    <a:pt x="6745955" y="2355018"/>
-                  </a:lnTo>
-                  <a:lnTo>
-                    <a:pt x="6759340" y="2355875"/>
-                  </a:lnTo>
-                  <a:lnTo>
-                    <a:pt x="6772725" y="2356775"/>
-                  </a:lnTo>
-                  <a:lnTo>
-                    <a:pt x="6786110" y="2357722"/>
-                  </a:lnTo>
-                  <a:lnTo>
-                    <a:pt x="6799495" y="2358702"/>
-                  </a:lnTo>
-                  <a:lnTo>
-                    <a:pt x="6812880" y="2359724"/>
-                  </a:lnTo>
-                  <a:lnTo>
-                    <a:pt x="6826264" y="2360798"/>
-                  </a:lnTo>
-                  <a:lnTo>
-                    <a:pt x="6839649" y="2361905"/>
+                    <a:pt x="2636812" y="232"/>
+                  </a:lnTo>
+                  <a:lnTo>
+                    <a:pt x="2650196" y="914"/>
+                  </a:lnTo>
+                  <a:lnTo>
+                    <a:pt x="2663581" y="2243"/>
+                  </a:lnTo>
+                  <a:lnTo>
+                    <a:pt x="2676966" y="3973"/>
+                  </a:lnTo>
+                  <a:lnTo>
+                    <a:pt x="2690351" y="6109"/>
+                  </a:lnTo>
+                  <a:lnTo>
+                    <a:pt x="2703736" y="8998"/>
+                  </a:lnTo>
+                  <a:lnTo>
+                    <a:pt x="2717121" y="12310"/>
+                  </a:lnTo>
+                  <a:lnTo>
+                    <a:pt x="2730505" y="16045"/>
+                  </a:lnTo>
+                  <a:lnTo>
+                    <a:pt x="2743890" y="20497"/>
+                  </a:lnTo>
+                  <a:lnTo>
+                    <a:pt x="2757275" y="25456"/>
+                  </a:lnTo>
+                  <a:lnTo>
+                    <a:pt x="2770660" y="30854"/>
+                  </a:lnTo>
+                  <a:lnTo>
+                    <a:pt x="2784045" y="36909"/>
+                  </a:lnTo>
+                  <a:lnTo>
+                    <a:pt x="2797430" y="43556"/>
+                  </a:lnTo>
+                  <a:lnTo>
+                    <a:pt x="2810814" y="50644"/>
+                  </a:lnTo>
+                  <a:lnTo>
+                    <a:pt x="2824199" y="58317"/>
+                  </a:lnTo>
+                  <a:lnTo>
+                    <a:pt x="2837584" y="66651"/>
+                  </a:lnTo>
+                  <a:lnTo>
+                    <a:pt x="2850969" y="75418"/>
+                  </a:lnTo>
+                  <a:lnTo>
+                    <a:pt x="2864354" y="84684"/>
+                  </a:lnTo>
+                  <a:lnTo>
+                    <a:pt x="2877739" y="94659"/>
+                  </a:lnTo>
+                  <a:lnTo>
+                    <a:pt x="2891123" y="105046"/>
+                  </a:lnTo>
+                  <a:lnTo>
+                    <a:pt x="2904508" y="115843"/>
+                  </a:lnTo>
+                  <a:lnTo>
+                    <a:pt x="2917893" y="127353"/>
+                  </a:lnTo>
+                  <a:lnTo>
+                    <a:pt x="2931278" y="139246"/>
+                  </a:lnTo>
+                  <a:lnTo>
+                    <a:pt x="2944663" y="151510"/>
+                  </a:lnTo>
+                  <a:lnTo>
+                    <a:pt x="2958048" y="164352"/>
+                  </a:lnTo>
+                  <a:lnTo>
+                    <a:pt x="2971432" y="177583"/>
+                  </a:lnTo>
+                  <a:lnTo>
+                    <a:pt x="2984817" y="191132"/>
+                  </a:lnTo>
+                  <a:lnTo>
+                    <a:pt x="2998202" y="205119"/>
+                  </a:lnTo>
+                  <a:lnTo>
+                    <a:pt x="3011587" y="219470"/>
+                  </a:lnTo>
+                  <a:lnTo>
+                    <a:pt x="3024972" y="234071"/>
+                  </a:lnTo>
+                  <a:lnTo>
+                    <a:pt x="3038357" y="248975"/>
+                  </a:lnTo>
+                  <a:lnTo>
+                    <a:pt x="3051741" y="264183"/>
+                  </a:lnTo>
+                  <a:lnTo>
+                    <a:pt x="3065126" y="279562"/>
+                  </a:lnTo>
+                  <a:lnTo>
+                    <a:pt x="3078511" y="295123"/>
+                  </a:lnTo>
+                  <a:lnTo>
+                    <a:pt x="3091896" y="310890"/>
+                  </a:lnTo>
+                  <a:lnTo>
+                    <a:pt x="3105281" y="326743"/>
+                  </a:lnTo>
+                  <a:lnTo>
+                    <a:pt x="3118666" y="342677"/>
+                  </a:lnTo>
+                  <a:lnTo>
+                    <a:pt x="3132050" y="358683"/>
+                  </a:lnTo>
+                  <a:lnTo>
+                    <a:pt x="3145435" y="374690"/>
+                  </a:lnTo>
+                  <a:lnTo>
+                    <a:pt x="3158820" y="390689"/>
+                  </a:lnTo>
+                  <a:lnTo>
+                    <a:pt x="3172205" y="406625"/>
+                  </a:lnTo>
+                  <a:lnTo>
+                    <a:pt x="3185590" y="422465"/>
+                  </a:lnTo>
+                  <a:lnTo>
+                    <a:pt x="3198975" y="438212"/>
+                  </a:lnTo>
+                  <a:lnTo>
+                    <a:pt x="3212359" y="453792"/>
+                  </a:lnTo>
+                  <a:lnTo>
+                    <a:pt x="3225744" y="469161"/>
+                  </a:lnTo>
+                  <a:lnTo>
+                    <a:pt x="3239129" y="484361"/>
+                  </a:lnTo>
+                  <a:lnTo>
+                    <a:pt x="3252514" y="499325"/>
+                  </a:lnTo>
+                  <a:lnTo>
+                    <a:pt x="3265899" y="513953"/>
+                  </a:lnTo>
+                  <a:lnTo>
+                    <a:pt x="3279284" y="528346"/>
+                  </a:lnTo>
+                  <a:lnTo>
+                    <a:pt x="3292668" y="542473"/>
+                  </a:lnTo>
+                  <a:lnTo>
+                    <a:pt x="3306053" y="556138"/>
+                  </a:lnTo>
+                  <a:lnTo>
+                    <a:pt x="3319438" y="569518"/>
+                  </a:lnTo>
+                  <a:lnTo>
+                    <a:pt x="3332823" y="582610"/>
+                  </a:lnTo>
+                  <a:lnTo>
+                    <a:pt x="3346208" y="595171"/>
+                  </a:lnTo>
+                  <a:lnTo>
+                    <a:pt x="3359593" y="607395"/>
+                  </a:lnTo>
+                  <a:lnTo>
+                    <a:pt x="3372977" y="619302"/>
+                  </a:lnTo>
+                  <a:lnTo>
+                    <a:pt x="3386362" y="630698"/>
+                  </a:lnTo>
+                  <a:lnTo>
+                    <a:pt x="3399747" y="641690"/>
+                  </a:lnTo>
+                  <a:lnTo>
+                    <a:pt x="3413132" y="652357"/>
+                  </a:lnTo>
+                  <a:lnTo>
+                    <a:pt x="3426517" y="662565"/>
+                  </a:lnTo>
+                  <a:lnTo>
+                    <a:pt x="3439902" y="672323"/>
+                  </a:lnTo>
+                  <a:lnTo>
+                    <a:pt x="3453286" y="681766"/>
+                  </a:lnTo>
+                  <a:lnTo>
+                    <a:pt x="3466671" y="690825"/>
+                  </a:lnTo>
+                  <a:lnTo>
+                    <a:pt x="3480056" y="699415"/>
+                  </a:lnTo>
+                  <a:lnTo>
+                    <a:pt x="3493441" y="707720"/>
+                  </a:lnTo>
+                  <a:lnTo>
+                    <a:pt x="3506826" y="715726"/>
+                  </a:lnTo>
+                  <a:lnTo>
+                    <a:pt x="3520211" y="723276"/>
+                  </a:lnTo>
+                  <a:lnTo>
+                    <a:pt x="3533595" y="730588"/>
+                  </a:lnTo>
+                  <a:lnTo>
+                    <a:pt x="3546980" y="737667"/>
+                  </a:lnTo>
+                  <a:lnTo>
+                    <a:pt x="3560365" y="744380"/>
+                  </a:lnTo>
+                  <a:lnTo>
+                    <a:pt x="3573750" y="750892"/>
+                  </a:lnTo>
+                  <a:lnTo>
+                    <a:pt x="3587135" y="757229"/>
+                  </a:lnTo>
+                  <a:lnTo>
+                    <a:pt x="3600520" y="763326"/>
+                  </a:lnTo>
+                  <a:lnTo>
+                    <a:pt x="3613904" y="769265"/>
+                  </a:lnTo>
+                  <a:lnTo>
+                    <a:pt x="3627289" y="775095"/>
+                  </a:lnTo>
+                  <a:lnTo>
+                    <a:pt x="3640674" y="780795"/>
+                  </a:lnTo>
+                  <a:lnTo>
+                    <a:pt x="3654059" y="786407"/>
+                  </a:lnTo>
+                  <a:lnTo>
+                    <a:pt x="3667444" y="791977"/>
+                  </a:lnTo>
+                  <a:lnTo>
+                    <a:pt x="3680829" y="797509"/>
+                  </a:lnTo>
+                  <a:lnTo>
+                    <a:pt x="3694213" y="803040"/>
+                  </a:lnTo>
+                  <a:lnTo>
+                    <a:pt x="3707598" y="808594"/>
+                  </a:lnTo>
+                  <a:lnTo>
+                    <a:pt x="3720983" y="814177"/>
+                  </a:lnTo>
+                  <a:lnTo>
+                    <a:pt x="3734368" y="819860"/>
+                  </a:lnTo>
+                  <a:lnTo>
+                    <a:pt x="3747753" y="825624"/>
+                  </a:lnTo>
+                  <a:lnTo>
+                    <a:pt x="3761138" y="831472"/>
+                  </a:lnTo>
+                  <a:lnTo>
+                    <a:pt x="3774522" y="837498"/>
+                  </a:lnTo>
+                  <a:lnTo>
+                    <a:pt x="3787907" y="843665"/>
+                  </a:lnTo>
+                  <a:lnTo>
+                    <a:pt x="3801292" y="849963"/>
+                  </a:lnTo>
+                  <a:lnTo>
+                    <a:pt x="3814677" y="856481"/>
+                  </a:lnTo>
+                  <a:lnTo>
+                    <a:pt x="3828062" y="863205"/>
+                  </a:lnTo>
+                  <a:lnTo>
+                    <a:pt x="3841447" y="870094"/>
+                  </a:lnTo>
+                  <a:lnTo>
+                    <a:pt x="3854831" y="877215"/>
+                  </a:lnTo>
+                  <a:lnTo>
+                    <a:pt x="3868216" y="884601"/>
+                  </a:lnTo>
+                  <a:lnTo>
+                    <a:pt x="3881601" y="892171"/>
+                  </a:lnTo>
+                  <a:lnTo>
+                    <a:pt x="3894986" y="899962"/>
+                  </a:lnTo>
+                  <a:lnTo>
+                    <a:pt x="3908371" y="908064"/>
+                  </a:lnTo>
+                  <a:lnTo>
+                    <a:pt x="3921756" y="916356"/>
+                  </a:lnTo>
+                  <a:lnTo>
+                    <a:pt x="3935140" y="924841"/>
+                  </a:lnTo>
+                  <a:lnTo>
+                    <a:pt x="3948525" y="933665"/>
+                  </a:lnTo>
+                  <a:lnTo>
+                    <a:pt x="3961910" y="942671"/>
+                  </a:lnTo>
+                  <a:lnTo>
+                    <a:pt x="3975295" y="951859"/>
+                  </a:lnTo>
+                  <a:lnTo>
+                    <a:pt x="3988680" y="961340"/>
+                  </a:lnTo>
+                  <a:lnTo>
+                    <a:pt x="4002065" y="971012"/>
+                  </a:lnTo>
+                  <a:lnTo>
+                    <a:pt x="4015449" y="980847"/>
+                  </a:lnTo>
+                  <a:lnTo>
+                    <a:pt x="4028834" y="990914"/>
+                  </a:lnTo>
+                  <a:lnTo>
+                    <a:pt x="4042219" y="1001168"/>
+                  </a:lnTo>
+                  <a:lnTo>
+                    <a:pt x="4055604" y="1011558"/>
+                  </a:lnTo>
+                  <a:lnTo>
+                    <a:pt x="4068989" y="1022118"/>
+                  </a:lnTo>
+                  <a:lnTo>
+                    <a:pt x="4082374" y="1032847"/>
+                  </a:lnTo>
+                  <a:lnTo>
+                    <a:pt x="4095758" y="1043680"/>
+                  </a:lnTo>
+                  <a:lnTo>
+                    <a:pt x="4109143" y="1054626"/>
+                  </a:lnTo>
+                  <a:lnTo>
+                    <a:pt x="4122528" y="1065709"/>
+                  </a:lnTo>
+                  <a:lnTo>
+                    <a:pt x="4135913" y="1076861"/>
+                  </a:lnTo>
+                  <a:lnTo>
+                    <a:pt x="4149298" y="1088079"/>
+                  </a:lnTo>
+                  <a:lnTo>
+                    <a:pt x="4162683" y="1099391"/>
+                  </a:lnTo>
+                  <a:lnTo>
+                    <a:pt x="4176067" y="1110739"/>
+                  </a:lnTo>
+                  <a:lnTo>
+                    <a:pt x="4189452" y="1122121"/>
+                  </a:lnTo>
+                  <a:lnTo>
+                    <a:pt x="4202837" y="1133539"/>
+                  </a:lnTo>
+                  <a:lnTo>
+                    <a:pt x="4216222" y="1144968"/>
+                  </a:lnTo>
+                  <a:lnTo>
+                    <a:pt x="4229607" y="1156401"/>
+                  </a:lnTo>
+                  <a:lnTo>
+                    <a:pt x="4242992" y="1167829"/>
+                  </a:lnTo>
+                  <a:lnTo>
+                    <a:pt x="4256376" y="1179239"/>
+                  </a:lnTo>
+                  <a:lnTo>
+                    <a:pt x="4269761" y="1190629"/>
+                  </a:lnTo>
+                  <a:lnTo>
+                    <a:pt x="4283146" y="1201988"/>
+                  </a:lnTo>
+                  <a:lnTo>
+                    <a:pt x="4296531" y="1213298"/>
+                  </a:lnTo>
+                  <a:lnTo>
+                    <a:pt x="4309916" y="1224572"/>
+                  </a:lnTo>
+                  <a:lnTo>
+                    <a:pt x="4323301" y="1235803"/>
+                  </a:lnTo>
+                  <a:lnTo>
+                    <a:pt x="4336685" y="1246958"/>
+                  </a:lnTo>
+                  <a:lnTo>
+                    <a:pt x="4350070" y="1258067"/>
+                  </a:lnTo>
+                  <a:lnTo>
+                    <a:pt x="4363455" y="1269128"/>
+                  </a:lnTo>
+                  <a:lnTo>
+                    <a:pt x="4376840" y="1280098"/>
+                  </a:lnTo>
+                  <a:lnTo>
+                    <a:pt x="4390225" y="1291015"/>
+                  </a:lnTo>
+                  <a:lnTo>
+                    <a:pt x="4403610" y="1301881"/>
+                  </a:lnTo>
+                  <a:lnTo>
+                    <a:pt x="4416994" y="1312664"/>
+                  </a:lnTo>
+                  <a:lnTo>
+                    <a:pt x="4430379" y="1323387"/>
+                  </a:lnTo>
+                  <a:lnTo>
+                    <a:pt x="4443764" y="1334060"/>
+                  </a:lnTo>
+                  <a:lnTo>
+                    <a:pt x="4457149" y="1344663"/>
+                  </a:lnTo>
+                  <a:lnTo>
+                    <a:pt x="4470534" y="1355205"/>
+                  </a:lnTo>
+                  <a:lnTo>
+                    <a:pt x="4483919" y="1365705"/>
+                  </a:lnTo>
+                  <a:lnTo>
+                    <a:pt x="4497303" y="1376152"/>
+                  </a:lnTo>
+                  <a:lnTo>
+                    <a:pt x="4510688" y="1386543"/>
+                  </a:lnTo>
+                  <a:lnTo>
+                    <a:pt x="4524073" y="1396900"/>
+                  </a:lnTo>
+                  <a:lnTo>
+                    <a:pt x="4537458" y="1407223"/>
+                  </a:lnTo>
+                  <a:lnTo>
+                    <a:pt x="4550843" y="1417501"/>
+                  </a:lnTo>
+                  <a:lnTo>
+                    <a:pt x="4564228" y="1427758"/>
+                  </a:lnTo>
+                  <a:lnTo>
+                    <a:pt x="4577612" y="1437994"/>
+                  </a:lnTo>
+                  <a:lnTo>
+                    <a:pt x="4590997" y="1448203"/>
+                  </a:lnTo>
+                  <a:lnTo>
+                    <a:pt x="4604382" y="1458402"/>
+                  </a:lnTo>
+                  <a:lnTo>
+                    <a:pt x="4617767" y="1468592"/>
+                  </a:lnTo>
+                  <a:lnTo>
+                    <a:pt x="4631152" y="1478775"/>
+                  </a:lnTo>
+                  <a:lnTo>
+                    <a:pt x="4644537" y="1488959"/>
+                  </a:lnTo>
+                  <a:lnTo>
+                    <a:pt x="4657921" y="1499145"/>
+                  </a:lnTo>
+                  <a:lnTo>
+                    <a:pt x="4671306" y="1509338"/>
+                  </a:lnTo>
+                  <a:lnTo>
+                    <a:pt x="4684691" y="1519543"/>
+                  </a:lnTo>
+                  <a:lnTo>
+                    <a:pt x="4698076" y="1529760"/>
+                  </a:lnTo>
+                  <a:lnTo>
+                    <a:pt x="4711461" y="1539994"/>
+                  </a:lnTo>
+                  <a:lnTo>
+                    <a:pt x="4724846" y="1550252"/>
+                  </a:lnTo>
+                  <a:lnTo>
+                    <a:pt x="4738230" y="1560527"/>
+                  </a:lnTo>
+                  <a:lnTo>
+                    <a:pt x="4751615" y="1570822"/>
+                  </a:lnTo>
+                  <a:lnTo>
+                    <a:pt x="4765000" y="1581152"/>
+                  </a:lnTo>
+                  <a:lnTo>
+                    <a:pt x="4778385" y="1591502"/>
+                  </a:lnTo>
+                  <a:lnTo>
+                    <a:pt x="4791770" y="1601874"/>
+                  </a:lnTo>
+                  <a:lnTo>
+                    <a:pt x="4805155" y="1612282"/>
+                  </a:lnTo>
+                  <a:lnTo>
+                    <a:pt x="4818539" y="1622712"/>
+                  </a:lnTo>
+                  <a:lnTo>
+                    <a:pt x="4831924" y="1633163"/>
+                  </a:lnTo>
+                  <a:lnTo>
+                    <a:pt x="4845309" y="1643645"/>
+                  </a:lnTo>
+                  <a:lnTo>
+                    <a:pt x="4858694" y="1654149"/>
+                  </a:lnTo>
+                  <a:lnTo>
+                    <a:pt x="4872079" y="1664670"/>
+                  </a:lnTo>
+                  <a:lnTo>
+                    <a:pt x="4885464" y="1675212"/>
+                  </a:lnTo>
+                  <a:lnTo>
+                    <a:pt x="4898848" y="1685771"/>
+                  </a:lnTo>
+                  <a:lnTo>
+                    <a:pt x="4912233" y="1696341"/>
+                  </a:lnTo>
+                  <a:lnTo>
+                    <a:pt x="4925618" y="1706921"/>
+                  </a:lnTo>
+                  <a:lnTo>
+                    <a:pt x="4939003" y="1717507"/>
+                  </a:lnTo>
+                  <a:lnTo>
+                    <a:pt x="4952388" y="1728094"/>
+                  </a:lnTo>
+                  <a:lnTo>
+                    <a:pt x="4965773" y="1738681"/>
+                  </a:lnTo>
+                  <a:lnTo>
+                    <a:pt x="4979157" y="1749257"/>
+                  </a:lnTo>
+                  <a:lnTo>
+                    <a:pt x="4992542" y="1759823"/>
+                  </a:lnTo>
+                  <a:lnTo>
+                    <a:pt x="5005927" y="1770377"/>
+                  </a:lnTo>
+                  <a:lnTo>
+                    <a:pt x="5019312" y="1780901"/>
+                  </a:lnTo>
+                  <a:lnTo>
+                    <a:pt x="5032697" y="1791400"/>
+                  </a:lnTo>
+                  <a:lnTo>
+                    <a:pt x="5046082" y="1801873"/>
+                  </a:lnTo>
+                  <a:lnTo>
+                    <a:pt x="5059466" y="1812301"/>
+                  </a:lnTo>
+                  <a:lnTo>
+                    <a:pt x="5072851" y="1822683"/>
+                  </a:lnTo>
+                  <a:lnTo>
+                    <a:pt x="5086236" y="1833026"/>
+                  </a:lnTo>
+                  <a:lnTo>
+                    <a:pt x="5099621" y="1843311"/>
+                  </a:lnTo>
+                  <a:lnTo>
+                    <a:pt x="5113006" y="1853525"/>
+                  </a:lnTo>
+                  <a:lnTo>
+                    <a:pt x="5126391" y="1863687"/>
+                  </a:lnTo>
+                  <a:lnTo>
+                    <a:pt x="5139775" y="1873782"/>
+                  </a:lnTo>
+                  <a:lnTo>
+                    <a:pt x="5153160" y="1883778"/>
+                  </a:lnTo>
+                  <a:lnTo>
+                    <a:pt x="5166545" y="1893708"/>
+                  </a:lnTo>
+                  <a:lnTo>
+                    <a:pt x="5179930" y="1903569"/>
+                  </a:lnTo>
+                  <a:lnTo>
+                    <a:pt x="5193315" y="1913299"/>
+                  </a:lnTo>
+                  <a:lnTo>
+                    <a:pt x="5206700" y="1922952"/>
+                  </a:lnTo>
+                  <a:lnTo>
+                    <a:pt x="5220084" y="1932526"/>
+                  </a:lnTo>
+                  <a:lnTo>
+                    <a:pt x="5233469" y="1941961"/>
+                  </a:lnTo>
+                  <a:lnTo>
+                    <a:pt x="5246854" y="1951296"/>
+                  </a:lnTo>
+                  <a:lnTo>
+                    <a:pt x="5260239" y="1960543"/>
+                  </a:lnTo>
+                  <a:lnTo>
+                    <a:pt x="5273624" y="1969652"/>
+                  </a:lnTo>
+                  <a:lnTo>
+                    <a:pt x="5287009" y="1978637"/>
+                  </a:lnTo>
+                  <a:lnTo>
+                    <a:pt x="5300393" y="1987526"/>
+                  </a:lnTo>
+                  <a:lnTo>
+                    <a:pt x="5313778" y="1996285"/>
+                  </a:lnTo>
+                  <a:lnTo>
+                    <a:pt x="5327163" y="2004895"/>
+                  </a:lnTo>
+                  <a:lnTo>
+                    <a:pt x="5340548" y="2013406"/>
+                  </a:lnTo>
+                  <a:lnTo>
+                    <a:pt x="5353933" y="2021797"/>
+                  </a:lnTo>
+                  <a:lnTo>
+                    <a:pt x="5367318" y="2030019"/>
+                  </a:lnTo>
+                  <a:lnTo>
+                    <a:pt x="5380702" y="2038138"/>
+                  </a:lnTo>
+                  <a:lnTo>
+                    <a:pt x="5394087" y="2046154"/>
+                  </a:lnTo>
+                  <a:lnTo>
+                    <a:pt x="5407472" y="2053981"/>
+                  </a:lnTo>
+                  <a:lnTo>
+                    <a:pt x="5420857" y="2061706"/>
+                  </a:lnTo>
+                  <a:lnTo>
+                    <a:pt x="5434242" y="2069328"/>
+                  </a:lnTo>
+                  <a:lnTo>
+                    <a:pt x="5447627" y="2076782"/>
+                  </a:lnTo>
+                  <a:lnTo>
+                    <a:pt x="5461011" y="2084118"/>
+                  </a:lnTo>
+                  <a:lnTo>
+                    <a:pt x="5474396" y="2091355"/>
+                  </a:lnTo>
+                  <a:lnTo>
+                    <a:pt x="5487781" y="2098445"/>
+                  </a:lnTo>
+                  <a:lnTo>
+                    <a:pt x="5501166" y="2105405"/>
+                  </a:lnTo>
+                  <a:lnTo>
+                    <a:pt x="5514551" y="2112270"/>
+                  </a:lnTo>
+                  <a:lnTo>
+                    <a:pt x="5527936" y="2119012"/>
+                  </a:lnTo>
+                  <a:lnTo>
+                    <a:pt x="5541320" y="2125615"/>
+                  </a:lnTo>
+                  <a:lnTo>
+                    <a:pt x="5554705" y="2132128"/>
+                  </a:lnTo>
+                  <a:lnTo>
+                    <a:pt x="5568090" y="2138540"/>
+                  </a:lnTo>
+                  <a:lnTo>
+                    <a:pt x="5581475" y="2144807"/>
+                  </a:lnTo>
+                  <a:lnTo>
+                    <a:pt x="5594860" y="2150991"/>
+                  </a:lnTo>
+                  <a:lnTo>
+                    <a:pt x="5608245" y="2157093"/>
+                  </a:lnTo>
+                  <a:lnTo>
+                    <a:pt x="5621629" y="2163049"/>
+                  </a:lnTo>
+                  <a:lnTo>
+                    <a:pt x="5635014" y="2168927"/>
+                  </a:lnTo>
+                  <a:lnTo>
+                    <a:pt x="5648399" y="2174729"/>
+                  </a:lnTo>
+                  <a:lnTo>
+                    <a:pt x="5661784" y="2180408"/>
+                  </a:lnTo>
+                  <a:lnTo>
+                    <a:pt x="5675169" y="2186002"/>
+                  </a:lnTo>
+                  <a:lnTo>
+                    <a:pt x="5688554" y="2191524"/>
+                  </a:lnTo>
+                  <a:lnTo>
+                    <a:pt x="5701938" y="2196945"/>
+                  </a:lnTo>
+                  <a:lnTo>
+                    <a:pt x="5715323" y="2202273"/>
+                  </a:lnTo>
+                  <a:lnTo>
+                    <a:pt x="5728708" y="2207535"/>
+                  </a:lnTo>
+                  <a:lnTo>
+                    <a:pt x="5742093" y="2212711"/>
+                  </a:lnTo>
+                  <a:lnTo>
+                    <a:pt x="5755478" y="2217789"/>
+                  </a:lnTo>
+                  <a:lnTo>
+                    <a:pt x="5768863" y="2222803"/>
+                  </a:lnTo>
+                  <a:lnTo>
+                    <a:pt x="5782247" y="2227745"/>
+                  </a:lnTo>
+                  <a:lnTo>
+                    <a:pt x="5795632" y="2232581"/>
+                  </a:lnTo>
+                  <a:lnTo>
+                    <a:pt x="5809017" y="2237354"/>
+                  </a:lnTo>
+                  <a:lnTo>
+                    <a:pt x="5822402" y="2242065"/>
+                  </a:lnTo>
+                  <a:lnTo>
+                    <a:pt x="5835787" y="2246665"/>
+                  </a:lnTo>
+                  <a:lnTo>
+                    <a:pt x="5849172" y="2251199"/>
+                  </a:lnTo>
+                  <a:lnTo>
+                    <a:pt x="5862556" y="2255671"/>
+                  </a:lnTo>
+                  <a:lnTo>
+                    <a:pt x="5875941" y="2260041"/>
+                  </a:lnTo>
+                  <a:lnTo>
+                    <a:pt x="5889326" y="2264332"/>
+                  </a:lnTo>
+                  <a:lnTo>
+                    <a:pt x="5902711" y="2268559"/>
+                  </a:lnTo>
+                  <a:lnTo>
+                    <a:pt x="5916096" y="2272693"/>
+                  </a:lnTo>
+                  <a:lnTo>
+                    <a:pt x="5929481" y="2276733"/>
+                  </a:lnTo>
+                  <a:lnTo>
+                    <a:pt x="5942865" y="2280706"/>
+                  </a:lnTo>
+                  <a:lnTo>
+                    <a:pt x="5956250" y="2284593"/>
+                  </a:lnTo>
+                  <a:lnTo>
+                    <a:pt x="5969635" y="2288371"/>
+                  </a:lnTo>
+                  <a:lnTo>
+                    <a:pt x="5983020" y="2292078"/>
+                  </a:lnTo>
+                  <a:lnTo>
+                    <a:pt x="5996405" y="2295706"/>
+                  </a:lnTo>
+                  <a:lnTo>
+                    <a:pt x="6009790" y="2299207"/>
+                  </a:lnTo>
+                  <a:lnTo>
+                    <a:pt x="6023174" y="2302634"/>
+                  </a:lnTo>
+                  <a:lnTo>
+                    <a:pt x="6036559" y="2305985"/>
+                  </a:lnTo>
+                  <a:lnTo>
+                    <a:pt x="6049944" y="2309203"/>
+                  </a:lnTo>
+                  <a:lnTo>
+                    <a:pt x="6063329" y="2312336"/>
+                  </a:lnTo>
+                  <a:lnTo>
+                    <a:pt x="6076714" y="2315391"/>
+                  </a:lnTo>
+                  <a:lnTo>
+                    <a:pt x="6090099" y="2318321"/>
+                  </a:lnTo>
+                  <a:lnTo>
+                    <a:pt x="6103483" y="2321151"/>
+                  </a:lnTo>
+                  <a:lnTo>
+                    <a:pt x="6116868" y="2323900"/>
+                  </a:lnTo>
+                  <a:lnTo>
+                    <a:pt x="6130253" y="2326535"/>
+                  </a:lnTo>
+                  <a:lnTo>
+                    <a:pt x="6143638" y="2329054"/>
+                  </a:lnTo>
+                  <a:lnTo>
+                    <a:pt x="6157023" y="2331492"/>
+                  </a:lnTo>
+                  <a:lnTo>
+                    <a:pt x="6170408" y="2333829"/>
+                  </a:lnTo>
+                  <a:lnTo>
+                    <a:pt x="6183792" y="2336036"/>
+                  </a:lnTo>
+                  <a:lnTo>
+                    <a:pt x="6197177" y="2338164"/>
+                  </a:lnTo>
+                  <a:lnTo>
+                    <a:pt x="6210562" y="2340205"/>
+                  </a:lnTo>
+                  <a:lnTo>
+                    <a:pt x="6223947" y="2342107"/>
+                  </a:lnTo>
+                  <a:lnTo>
+                    <a:pt x="6237332" y="2343931"/>
+                  </a:lnTo>
+                  <a:lnTo>
+                    <a:pt x="6250717" y="2345678"/>
+                  </a:lnTo>
+                  <a:lnTo>
+                    <a:pt x="6264101" y="2347295"/>
+                  </a:lnTo>
+                  <a:lnTo>
+                    <a:pt x="6277486" y="2348831"/>
+                  </a:lnTo>
+                  <a:lnTo>
+                    <a:pt x="6290871" y="2350296"/>
+                  </a:lnTo>
+                  <a:lnTo>
+                    <a:pt x="6304256" y="2351651"/>
+                  </a:lnTo>
+                  <a:lnTo>
+                    <a:pt x="6317641" y="2352922"/>
+                  </a:lnTo>
+                  <a:lnTo>
+                    <a:pt x="6331026" y="2354128"/>
+                  </a:lnTo>
+                  <a:lnTo>
+                    <a:pt x="6344410" y="2355248"/>
+                  </a:lnTo>
+                  <a:lnTo>
+                    <a:pt x="6357795" y="2356283"/>
+                  </a:lnTo>
+                  <a:lnTo>
+                    <a:pt x="6371180" y="2357262"/>
+                  </a:lnTo>
+                  <a:lnTo>
+                    <a:pt x="6384565" y="2358176"/>
+                  </a:lnTo>
+                  <a:lnTo>
+                    <a:pt x="6397950" y="2359011"/>
+                  </a:lnTo>
+                  <a:lnTo>
+                    <a:pt x="6411335" y="2359800"/>
+                  </a:lnTo>
+                  <a:lnTo>
+                    <a:pt x="6424719" y="2360544"/>
+                  </a:lnTo>
+                  <a:lnTo>
+                    <a:pt x="6438104" y="2361219"/>
+                  </a:lnTo>
+                  <a:lnTo>
+                    <a:pt x="6451489" y="2361861"/>
+                  </a:lnTo>
+                  <a:lnTo>
+                    <a:pt x="6464874" y="2362471"/>
+                  </a:lnTo>
+                  <a:lnTo>
+                    <a:pt x="6478259" y="2363034"/>
+                  </a:lnTo>
+                  <a:lnTo>
+                    <a:pt x="6491644" y="2363572"/>
+                  </a:lnTo>
+                  <a:lnTo>
+                    <a:pt x="6505028" y="2364091"/>
+                  </a:lnTo>
+                  <a:lnTo>
+                    <a:pt x="6518413" y="2364584"/>
+                  </a:lnTo>
+                  <a:lnTo>
+                    <a:pt x="6531798" y="2365065"/>
+                  </a:lnTo>
+                  <a:lnTo>
+                    <a:pt x="6545183" y="2365537"/>
+                  </a:lnTo>
+                  <a:lnTo>
+                    <a:pt x="6558568" y="2366003"/>
+                  </a:lnTo>
+                  <a:lnTo>
+                    <a:pt x="6571953" y="2366470"/>
+                  </a:lnTo>
+                  <a:lnTo>
+                    <a:pt x="6585337" y="2366941"/>
+                  </a:lnTo>
+                  <a:lnTo>
+                    <a:pt x="6598722" y="2367418"/>
+                  </a:lnTo>
+                  <a:lnTo>
+                    <a:pt x="6612107" y="2367913"/>
+                  </a:lnTo>
+                  <a:lnTo>
+                    <a:pt x="6625492" y="2368421"/>
+                  </a:lnTo>
+                  <a:lnTo>
+                    <a:pt x="6638877" y="2368945"/>
+                  </a:lnTo>
+                  <a:lnTo>
+                    <a:pt x="6652262" y="2369505"/>
+                  </a:lnTo>
+                  <a:lnTo>
+                    <a:pt x="6665646" y="2370087"/>
+                  </a:lnTo>
+                  <a:lnTo>
+                    <a:pt x="6679031" y="2370693"/>
+                  </a:lnTo>
+                  <a:lnTo>
+                    <a:pt x="6692416" y="2371343"/>
+                  </a:lnTo>
+                  <a:lnTo>
+                    <a:pt x="6705801" y="2372028"/>
+                  </a:lnTo>
+                  <a:lnTo>
+                    <a:pt x="6719186" y="2372742"/>
+                  </a:lnTo>
+                  <a:lnTo>
+                    <a:pt x="6732571" y="2373505"/>
+                  </a:lnTo>
+                  <a:lnTo>
+                    <a:pt x="6745955" y="2374313"/>
+                  </a:lnTo>
+                  <a:lnTo>
+                    <a:pt x="6759340" y="2375156"/>
+                  </a:lnTo>
+                  <a:lnTo>
+                    <a:pt x="6772725" y="2376045"/>
+                  </a:lnTo>
+                  <a:lnTo>
+                    <a:pt x="6786110" y="2376990"/>
+                  </a:lnTo>
+                  <a:lnTo>
+                    <a:pt x="6799495" y="2377971"/>
+                  </a:lnTo>
+                  <a:lnTo>
+                    <a:pt x="6812880" y="2378995"/>
+                  </a:lnTo>
+                  <a:lnTo>
+                    <a:pt x="6826264" y="2380081"/>
+                  </a:lnTo>
+                  <a:lnTo>
+                    <a:pt x="6839649" y="2381203"/>
                   </a:lnTo>
                 </a:path>
               </a:pathLst>
@@ -12520,7 +12520,7 @@
           </p:nvSpPr>
           <p:spPr>
             <a:xfrm>
-              <a:off x="4243373" y="2629955"/>
+              <a:off x="4250663" y="2629955"/>
               <a:ext cx="0" cy="3056607"/>
             </a:xfrm>
             <a:custGeom>
@@ -13353,7 +13353,7 @@
                   <a:latin typeface="Helvetica"/>
                   <a:cs typeface="Helvetica"/>
                 </a:rPr>
-                <a:t>Female: N = 188, median = -0.7 %   |   Male: N = 135, median = 2.5 %   |   Mann-Whitney U p = 0.165</a:t>
+                <a:t>Female: N = 187, median = -0.5 %   |   Male: N = 135, median = 2.5 %   |   Mann-Whitney U p = 0.186</a:t>
               </a:r>
             </a:p>
           </p:txBody>
